--- a/Bithalo magyar ppt.pptx
+++ b/Bithalo magyar ppt.pptx
@@ -5,7 +5,7 @@
     <p:sldMasterId id="2147483648" r:id="rId1"/>
   </p:sldMasterIdLst>
   <p:notesMasterIdLst>
-    <p:notesMasterId r:id="rId14"/>
+    <p:notesMasterId r:id="rId16"/>
   </p:notesMasterIdLst>
   <p:sldIdLst>
     <p:sldId id="256" r:id="rId2"/>
@@ -13,13 +13,15 @@
     <p:sldId id="258" r:id="rId4"/>
     <p:sldId id="259" r:id="rId5"/>
     <p:sldId id="260" r:id="rId6"/>
-    <p:sldId id="261" r:id="rId7"/>
-    <p:sldId id="262" r:id="rId8"/>
-    <p:sldId id="263" r:id="rId9"/>
-    <p:sldId id="264" r:id="rId10"/>
-    <p:sldId id="265" r:id="rId11"/>
-    <p:sldId id="266" r:id="rId12"/>
-    <p:sldId id="267" r:id="rId13"/>
+    <p:sldId id="270" r:id="rId7"/>
+    <p:sldId id="269" r:id="rId8"/>
+    <p:sldId id="261" r:id="rId9"/>
+    <p:sldId id="263" r:id="rId10"/>
+    <p:sldId id="266" r:id="rId11"/>
+    <p:sldId id="264" r:id="rId12"/>
+    <p:sldId id="262" r:id="rId13"/>
+    <p:sldId id="265" r:id="rId14"/>
+    <p:sldId id="267" r:id="rId15"/>
   </p:sldIdLst>
   <p:sldSz cx="9144000" cy="5143500" type="screen16x9"/>
   <p:notesSz cx="5143500" cy="9144000"/>
@@ -584,6 +586,174 @@
 </p:notes>
 </file>
 
+<file path=ppt/notesSlides/notesSlide13.xml><?xml version="1.0" encoding="utf-8"?>
+<p:notes xmlns:a="http://schemas.openxmlformats.org/drawingml/2006/main" xmlns:r="http://schemas.openxmlformats.org/officeDocument/2006/relationships" xmlns:p="http://schemas.openxmlformats.org/presentationml/2006/main">
+  <p:cSld>
+    <p:spTree>
+      <p:nvGrpSpPr>
+        <p:cNvPr id="1" name=""/>
+        <p:cNvGrpSpPr/>
+        <p:nvPr/>
+      </p:nvGrpSpPr>
+      <p:grpSpPr>
+        <a:xfrm>
+          <a:off x="0" y="0"/>
+          <a:ext cx="0" cy="0"/>
+          <a:chOff x="0" y="0"/>
+          <a:chExt cx="0" cy="0"/>
+        </a:xfrm>
+      </p:grpSpPr>
+      <p:sp>
+        <p:nvSpPr>
+          <p:cNvPr id="2" name="Slide Image Placeholder 1"/>
+          <p:cNvSpPr>
+            <a:spLocks noGrp="1" noRot="1" noChangeAspect="1"/>
+          </p:cNvSpPr>
+          <p:nvPr>
+            <p:ph type="sldImg"/>
+          </p:nvPr>
+        </p:nvSpPr>
+        <p:spPr/>
+      </p:sp>
+      <p:sp>
+        <p:nvSpPr>
+          <p:cNvPr id="3" name="Notes Placeholder 2"/>
+          <p:cNvSpPr>
+            <a:spLocks noGrp="1"/>
+          </p:cNvSpPr>
+          <p:nvPr>
+            <p:ph type="body" idx="1"/>
+          </p:nvPr>
+        </p:nvSpPr>
+        <p:spPr/>
+        <p:txBody>
+          <a:bodyPr/>
+          <a:lstStyle/>
+          <a:p>
+            <a:endParaRPr lang="en-US" dirty="0"/>
+          </a:p>
+        </p:txBody>
+      </p:sp>
+      <p:sp>
+        <p:nvSpPr>
+          <p:cNvPr id="4" name="Slide Number Placeholder 3"/>
+          <p:cNvSpPr>
+            <a:spLocks noGrp="1"/>
+          </p:cNvSpPr>
+          <p:nvPr>
+            <p:ph type="sldNum" sz="quarter" idx="10"/>
+          </p:nvPr>
+        </p:nvSpPr>
+        <p:spPr/>
+        <p:txBody>
+          <a:bodyPr/>
+          <a:lstStyle/>
+          <a:p>
+            <a:fld id="{F7021451-1387-4CA6-816F-3879F97B5CBC}" type="slidenum">
+              <a:rPr lang="en-US"/>
+              <a:t>13</a:t>
+            </a:fld>
+            <a:endParaRPr lang="en-US"/>
+          </a:p>
+        </p:txBody>
+      </p:sp>
+    </p:spTree>
+    <p:extLst>
+      <p:ext uri="{BB962C8B-B14F-4D97-AF65-F5344CB8AC3E}">
+        <p14:creationId xmlns:p14="http://schemas.microsoft.com/office/powerpoint/2010/main" val="1024086991"/>
+      </p:ext>
+    </p:extLst>
+  </p:cSld>
+  <p:clrMapOvr>
+    <a:masterClrMapping/>
+  </p:clrMapOvr>
+</p:notes>
+</file>
+
+<file path=ppt/notesSlides/notesSlide14.xml><?xml version="1.0" encoding="utf-8"?>
+<p:notes xmlns:a="http://schemas.openxmlformats.org/drawingml/2006/main" xmlns:r="http://schemas.openxmlformats.org/officeDocument/2006/relationships" xmlns:p="http://schemas.openxmlformats.org/presentationml/2006/main">
+  <p:cSld>
+    <p:spTree>
+      <p:nvGrpSpPr>
+        <p:cNvPr id="1" name=""/>
+        <p:cNvGrpSpPr/>
+        <p:nvPr/>
+      </p:nvGrpSpPr>
+      <p:grpSpPr>
+        <a:xfrm>
+          <a:off x="0" y="0"/>
+          <a:ext cx="0" cy="0"/>
+          <a:chOff x="0" y="0"/>
+          <a:chExt cx="0" cy="0"/>
+        </a:xfrm>
+      </p:grpSpPr>
+      <p:sp>
+        <p:nvSpPr>
+          <p:cNvPr id="2" name="Slide Image Placeholder 1"/>
+          <p:cNvSpPr>
+            <a:spLocks noGrp="1" noRot="1" noChangeAspect="1"/>
+          </p:cNvSpPr>
+          <p:nvPr>
+            <p:ph type="sldImg"/>
+          </p:nvPr>
+        </p:nvSpPr>
+        <p:spPr/>
+      </p:sp>
+      <p:sp>
+        <p:nvSpPr>
+          <p:cNvPr id="3" name="Notes Placeholder 2"/>
+          <p:cNvSpPr>
+            <a:spLocks noGrp="1"/>
+          </p:cNvSpPr>
+          <p:nvPr>
+            <p:ph type="body" idx="1"/>
+          </p:nvPr>
+        </p:nvSpPr>
+        <p:spPr/>
+        <p:txBody>
+          <a:bodyPr/>
+          <a:lstStyle/>
+          <a:p>
+            <a:endParaRPr lang="en-US" dirty="0"/>
+          </a:p>
+        </p:txBody>
+      </p:sp>
+      <p:sp>
+        <p:nvSpPr>
+          <p:cNvPr id="4" name="Slide Number Placeholder 3"/>
+          <p:cNvSpPr>
+            <a:spLocks noGrp="1"/>
+          </p:cNvSpPr>
+          <p:nvPr>
+            <p:ph type="sldNum" sz="quarter" idx="10"/>
+          </p:nvPr>
+        </p:nvSpPr>
+        <p:spPr/>
+        <p:txBody>
+          <a:bodyPr/>
+          <a:lstStyle/>
+          <a:p>
+            <a:fld id="{F7021451-1387-4CA6-816F-3879F97B5CBC}" type="slidenum">
+              <a:rPr lang="en-US"/>
+              <a:t>14</a:t>
+            </a:fld>
+            <a:endParaRPr lang="en-US"/>
+          </a:p>
+        </p:txBody>
+      </p:sp>
+    </p:spTree>
+    <p:extLst>
+      <p:ext uri="{BB962C8B-B14F-4D97-AF65-F5344CB8AC3E}">
+        <p14:creationId xmlns:p14="http://schemas.microsoft.com/office/powerpoint/2010/main" val="1024086991"/>
+      </p:ext>
+    </p:extLst>
+  </p:cSld>
+  <p:clrMapOvr>
+    <a:masterClrMapping/>
+  </p:clrMapOvr>
+</p:notes>
+</file>
+
 <file path=ppt/notesSlides/notesSlide2.xml><?xml version="1.0" encoding="utf-8"?>
 <p:notes xmlns:a="http://schemas.openxmlformats.org/drawingml/2006/main" xmlns:r="http://schemas.openxmlformats.org/officeDocument/2006/relationships" xmlns:p="http://schemas.openxmlformats.org/presentationml/2006/main">
   <p:cSld>
@@ -712,6 +882,10 @@
           <a:bodyPr/>
           <a:lstStyle/>
           <a:p>
+            <a:r>
+              <a:rPr lang="hu-HU" dirty="0"/>
+              <a:t>kurva</a:t>
+            </a:r>
             <a:endParaRPr lang="en-US" dirty="0"/>
           </a:p>
         </p:txBody>
@@ -796,6 +970,10 @@
           <a:bodyPr/>
           <a:lstStyle/>
           <a:p>
+            <a:r>
+              <a:rPr lang="hu-HU" dirty="0" err="1"/>
+              <a:t>uohuiuh</a:t>
+            </a:r>
             <a:endParaRPr lang="en-US" dirty="0"/>
           </a:p>
         </p:txBody>
@@ -994,7 +1172,7 @@
     </p:spTree>
     <p:extLst>
       <p:ext uri="{BB962C8B-B14F-4D97-AF65-F5344CB8AC3E}">
-        <p14:creationId xmlns:p14="http://schemas.microsoft.com/office/powerpoint/2010/main" val="1024086991"/>
+        <p14:creationId xmlns:p14="http://schemas.microsoft.com/office/powerpoint/2010/main" val="324310096"/>
       </p:ext>
     </p:extLst>
   </p:cSld>
@@ -1078,7 +1256,7 @@
     </p:spTree>
     <p:extLst>
       <p:ext uri="{BB962C8B-B14F-4D97-AF65-F5344CB8AC3E}">
-        <p14:creationId xmlns:p14="http://schemas.microsoft.com/office/powerpoint/2010/main" val="1024086991"/>
+        <p14:creationId xmlns:p14="http://schemas.microsoft.com/office/powerpoint/2010/main" val="4105639858"/>
       </p:ext>
     </p:extLst>
   </p:cSld>
@@ -1918,6 +2096,2823 @@
 
 <file path=ppt/slides/slide10.xml><?xml version="1.0" encoding="utf-8"?>
 <p:sld xmlns:a="http://schemas.openxmlformats.org/drawingml/2006/main" xmlns:r="http://schemas.openxmlformats.org/officeDocument/2006/relationships" xmlns:p="http://schemas.openxmlformats.org/presentationml/2006/main">
+  <p:cSld name="Slide 11">
+    <p:bg>
+      <p:bgPr>
+        <a:solidFill>
+          <a:srgbClr val="1A1F35"/>
+        </a:solidFill>
+        <a:effectLst/>
+      </p:bgPr>
+    </p:bg>
+    <p:spTree>
+      <p:nvGrpSpPr>
+        <p:cNvPr id="1" name=""/>
+        <p:cNvGrpSpPr/>
+        <p:nvPr/>
+      </p:nvGrpSpPr>
+      <p:grpSpPr>
+        <a:xfrm>
+          <a:off x="0" y="0"/>
+          <a:ext cx="0" cy="0"/>
+          <a:chOff x="0" y="0"/>
+          <a:chExt cx="0" cy="0"/>
+        </a:xfrm>
+      </p:grpSpPr>
+      <p:sp>
+        <p:nvSpPr>
+          <p:cNvPr id="2" name="Shape 0"/>
+          <p:cNvSpPr/>
+          <p:nvPr/>
+        </p:nvSpPr>
+        <p:spPr>
+          <a:xfrm>
+            <a:off x="0" y="0"/>
+            <a:ext cx="9144000" cy="777240"/>
+          </a:xfrm>
+          <a:prstGeom prst="rect">
+            <a:avLst/>
+          </a:prstGeom>
+          <a:solidFill>
+            <a:srgbClr val="2C3566"/>
+          </a:solidFill>
+          <a:ln w="12700">
+            <a:solidFill>
+              <a:srgbClr val="2C3566"/>
+            </a:solidFill>
+            <a:prstDash val="solid"/>
+          </a:ln>
+        </p:spPr>
+      </p:sp>
+      <p:sp>
+        <p:nvSpPr>
+          <p:cNvPr id="3" name="Shape 1"/>
+          <p:cNvSpPr/>
+          <p:nvPr/>
+        </p:nvSpPr>
+        <p:spPr>
+          <a:xfrm>
+            <a:off x="0" y="0"/>
+            <a:ext cx="9144000" cy="64008"/>
+          </a:xfrm>
+          <a:prstGeom prst="rect">
+            <a:avLst/>
+          </a:prstGeom>
+          <a:solidFill>
+            <a:srgbClr val="4F8EF7"/>
+          </a:solidFill>
+          <a:ln w="12700">
+            <a:solidFill>
+              <a:srgbClr val="4F8EF7"/>
+            </a:solidFill>
+            <a:prstDash val="solid"/>
+          </a:ln>
+        </p:spPr>
+      </p:sp>
+      <p:sp>
+        <p:nvSpPr>
+          <p:cNvPr id="4" name="Text 2"/>
+          <p:cNvSpPr/>
+          <p:nvPr/>
+        </p:nvSpPr>
+        <p:spPr>
+          <a:xfrm>
+            <a:off x="365760" y="137160"/>
+            <a:ext cx="8412480" cy="502920"/>
+          </a:xfrm>
+          <a:prstGeom prst="rect">
+            <a:avLst/>
+          </a:prstGeom>
+          <a:noFill/>
+          <a:ln/>
+        </p:spPr>
+        <p:txBody>
+          <a:bodyPr wrap="square" rtlCol="0" anchor="ctr"/>
+          <a:lstStyle/>
+          <a:p>
+            <a:pPr marL="0" indent="0">
+              <a:buNone/>
+            </a:pPr>
+            <a:r>
+              <a:rPr lang="en-US" sz="2000" b="1" dirty="0">
+                <a:solidFill>
+                  <a:srgbClr val="FFFFFF"/>
+                </a:solidFill>
+                <a:latin typeface="Calibri" pitchFamily="34" charset="0"/>
+                <a:ea typeface="Calibri" pitchFamily="34" charset="-122"/>
+                <a:cs typeface="Calibri" pitchFamily="34" charset="-120"/>
+              </a:rPr>
+              <a:t>📊  PROJEKT STATISZTIKÁK</a:t>
+            </a:r>
+            <a:endParaRPr lang="en-US" sz="2000" dirty="0"/>
+          </a:p>
+        </p:txBody>
+      </p:sp>
+      <p:sp>
+        <p:nvSpPr>
+          <p:cNvPr id="5" name="Text 3"/>
+          <p:cNvSpPr/>
+          <p:nvPr/>
+        </p:nvSpPr>
+        <p:spPr>
+          <a:xfrm>
+            <a:off x="365760" y="914400"/>
+            <a:ext cx="4114800" cy="365760"/>
+          </a:xfrm>
+          <a:prstGeom prst="rect">
+            <a:avLst/>
+          </a:prstGeom>
+          <a:noFill/>
+          <a:ln/>
+        </p:spPr>
+        <p:txBody>
+          <a:bodyPr wrap="square" rtlCol="0" anchor="ctr"/>
+          <a:lstStyle/>
+          <a:p>
+            <a:pPr marL="0" indent="0">
+              <a:buNone/>
+            </a:pPr>
+            <a:r>
+              <a:rPr lang="en-US" sz="1400" b="1" dirty="0">
+                <a:solidFill>
+                  <a:srgbClr val="FFFFFF"/>
+                </a:solidFill>
+                <a:latin typeface="Calibri" pitchFamily="34" charset="0"/>
+                <a:ea typeface="Calibri" pitchFamily="34" charset="-122"/>
+                <a:cs typeface="Calibri" pitchFamily="34" charset="-120"/>
+              </a:rPr>
+              <a:t>⏱️  Időráfordítás megoszlása</a:t>
+            </a:r>
+            <a:endParaRPr lang="en-US" sz="1400" dirty="0"/>
+          </a:p>
+        </p:txBody>
+      </p:sp>
+      <p:sp>
+        <p:nvSpPr>
+          <p:cNvPr id="6" name="Shape 4"/>
+          <p:cNvSpPr/>
+          <p:nvPr/>
+        </p:nvSpPr>
+        <p:spPr>
+          <a:xfrm>
+            <a:off x="365760" y="1371600"/>
+            <a:ext cx="4114800" cy="475488"/>
+          </a:xfrm>
+          <a:prstGeom prst="rect">
+            <a:avLst/>
+          </a:prstGeom>
+          <a:solidFill>
+            <a:srgbClr val="242A4A"/>
+          </a:solidFill>
+          <a:ln w="12700">
+            <a:solidFill>
+              <a:srgbClr val="2C3566"/>
+            </a:solidFill>
+            <a:prstDash val="solid"/>
+          </a:ln>
+        </p:spPr>
+      </p:sp>
+      <p:sp>
+        <p:nvSpPr>
+          <p:cNvPr id="7" name="Shape 5"/>
+          <p:cNvSpPr/>
+          <p:nvPr/>
+        </p:nvSpPr>
+        <p:spPr>
+          <a:xfrm>
+            <a:off x="365760" y="1371600"/>
+            <a:ext cx="1645920" cy="475488"/>
+          </a:xfrm>
+          <a:prstGeom prst="rect">
+            <a:avLst/>
+          </a:prstGeom>
+          <a:solidFill>
+            <a:srgbClr val="4F8EF7">
+              <a:alpha val="80000"/>
+            </a:srgbClr>
+          </a:solidFill>
+          <a:ln w="12700">
+            <a:solidFill>
+              <a:srgbClr val="4F8EF7"/>
+            </a:solidFill>
+            <a:prstDash val="solid"/>
+          </a:ln>
+        </p:spPr>
+      </p:sp>
+      <p:sp>
+        <p:nvSpPr>
+          <p:cNvPr id="8" name="Text 6"/>
+          <p:cNvSpPr/>
+          <p:nvPr/>
+        </p:nvSpPr>
+        <p:spPr>
+          <a:xfrm>
+            <a:off x="502920" y="1463040"/>
+            <a:ext cx="3840480" cy="292608"/>
+          </a:xfrm>
+          <a:prstGeom prst="rect">
+            <a:avLst/>
+          </a:prstGeom>
+          <a:noFill/>
+          <a:ln/>
+        </p:spPr>
+        <p:txBody>
+          <a:bodyPr wrap="square" lIns="0" tIns="0" rIns="0" bIns="0" rtlCol="0" anchor="ctr"/>
+          <a:lstStyle/>
+          <a:p>
+            <a:pPr marL="0" indent="0">
+              <a:buNone/>
+            </a:pPr>
+            <a:r>
+              <a:rPr lang="en-US" sz="1200" b="1" dirty="0">
+                <a:solidFill>
+                  <a:srgbClr val="FFFFFF"/>
+                </a:solidFill>
+                <a:latin typeface="Calibri" pitchFamily="34" charset="0"/>
+                <a:ea typeface="Calibri" pitchFamily="34" charset="-122"/>
+                <a:cs typeface="Calibri" pitchFamily="34" charset="-120"/>
+              </a:rPr>
+              <a:t>40%  Implementáció</a:t>
+            </a:r>
+            <a:endParaRPr lang="en-US" sz="1200" dirty="0"/>
+          </a:p>
+        </p:txBody>
+      </p:sp>
+      <p:sp>
+        <p:nvSpPr>
+          <p:cNvPr id="9" name="Shape 7"/>
+          <p:cNvSpPr/>
+          <p:nvPr/>
+        </p:nvSpPr>
+        <p:spPr>
+          <a:xfrm>
+            <a:off x="365760" y="1938528"/>
+            <a:ext cx="4114800" cy="475488"/>
+          </a:xfrm>
+          <a:prstGeom prst="rect">
+            <a:avLst/>
+          </a:prstGeom>
+          <a:solidFill>
+            <a:srgbClr val="242A4A"/>
+          </a:solidFill>
+          <a:ln w="12700">
+            <a:solidFill>
+              <a:srgbClr val="2C3566"/>
+            </a:solidFill>
+            <a:prstDash val="solid"/>
+          </a:ln>
+        </p:spPr>
+      </p:sp>
+      <p:sp>
+        <p:nvSpPr>
+          <p:cNvPr id="10" name="Shape 8"/>
+          <p:cNvSpPr/>
+          <p:nvPr/>
+        </p:nvSpPr>
+        <p:spPr>
+          <a:xfrm>
+            <a:off x="365760" y="1938528"/>
+            <a:ext cx="1234440" cy="475488"/>
+          </a:xfrm>
+          <a:prstGeom prst="rect">
+            <a:avLst/>
+          </a:prstGeom>
+          <a:solidFill>
+            <a:srgbClr val="22C55E">
+              <a:alpha val="80000"/>
+            </a:srgbClr>
+          </a:solidFill>
+          <a:ln w="12700">
+            <a:solidFill>
+              <a:srgbClr val="22C55E"/>
+            </a:solidFill>
+            <a:prstDash val="solid"/>
+          </a:ln>
+        </p:spPr>
+      </p:sp>
+      <p:sp>
+        <p:nvSpPr>
+          <p:cNvPr id="11" name="Text 9"/>
+          <p:cNvSpPr/>
+          <p:nvPr/>
+        </p:nvSpPr>
+        <p:spPr>
+          <a:xfrm>
+            <a:off x="502920" y="2029968"/>
+            <a:ext cx="3840480" cy="292608"/>
+          </a:xfrm>
+          <a:prstGeom prst="rect">
+            <a:avLst/>
+          </a:prstGeom>
+          <a:noFill/>
+          <a:ln/>
+        </p:spPr>
+        <p:txBody>
+          <a:bodyPr wrap="square" lIns="0" tIns="0" rIns="0" bIns="0" rtlCol="0" anchor="ctr"/>
+          <a:lstStyle/>
+          <a:p>
+            <a:pPr marL="0" indent="0">
+              <a:buNone/>
+            </a:pPr>
+            <a:r>
+              <a:rPr lang="en-US" sz="1200" b="1" dirty="0">
+                <a:solidFill>
+                  <a:srgbClr val="FFFFFF"/>
+                </a:solidFill>
+                <a:latin typeface="Calibri" pitchFamily="34" charset="0"/>
+                <a:ea typeface="Calibri" pitchFamily="34" charset="-122"/>
+                <a:cs typeface="Calibri" pitchFamily="34" charset="-120"/>
+              </a:rPr>
+              <a:t>30%  Tervezés</a:t>
+            </a:r>
+            <a:endParaRPr lang="en-US" sz="1200" dirty="0"/>
+          </a:p>
+        </p:txBody>
+      </p:sp>
+      <p:sp>
+        <p:nvSpPr>
+          <p:cNvPr id="12" name="Shape 10"/>
+          <p:cNvSpPr/>
+          <p:nvPr/>
+        </p:nvSpPr>
+        <p:spPr>
+          <a:xfrm>
+            <a:off x="365760" y="2505456"/>
+            <a:ext cx="4114800" cy="475488"/>
+          </a:xfrm>
+          <a:prstGeom prst="rect">
+            <a:avLst/>
+          </a:prstGeom>
+          <a:solidFill>
+            <a:srgbClr val="242A4A"/>
+          </a:solidFill>
+          <a:ln w="12700">
+            <a:solidFill>
+              <a:srgbClr val="2C3566"/>
+            </a:solidFill>
+            <a:prstDash val="solid"/>
+          </a:ln>
+        </p:spPr>
+      </p:sp>
+      <p:sp>
+        <p:nvSpPr>
+          <p:cNvPr id="13" name="Shape 11"/>
+          <p:cNvSpPr/>
+          <p:nvPr/>
+        </p:nvSpPr>
+        <p:spPr>
+          <a:xfrm>
+            <a:off x="365760" y="2505456"/>
+            <a:ext cx="822960" cy="475488"/>
+          </a:xfrm>
+          <a:prstGeom prst="rect">
+            <a:avLst/>
+          </a:prstGeom>
+          <a:solidFill>
+            <a:srgbClr val="F59E0B">
+              <a:alpha val="80000"/>
+            </a:srgbClr>
+          </a:solidFill>
+          <a:ln w="12700">
+            <a:solidFill>
+              <a:srgbClr val="F59E0B"/>
+            </a:solidFill>
+            <a:prstDash val="solid"/>
+          </a:ln>
+        </p:spPr>
+      </p:sp>
+      <p:sp>
+        <p:nvSpPr>
+          <p:cNvPr id="14" name="Text 12"/>
+          <p:cNvSpPr/>
+          <p:nvPr/>
+        </p:nvSpPr>
+        <p:spPr>
+          <a:xfrm>
+            <a:off x="502920" y="2596896"/>
+            <a:ext cx="3840480" cy="292608"/>
+          </a:xfrm>
+          <a:prstGeom prst="rect">
+            <a:avLst/>
+          </a:prstGeom>
+          <a:noFill/>
+          <a:ln/>
+        </p:spPr>
+        <p:txBody>
+          <a:bodyPr wrap="square" lIns="0" tIns="0" rIns="0" bIns="0" rtlCol="0" anchor="ctr"/>
+          <a:lstStyle/>
+          <a:p>
+            <a:pPr marL="0" indent="0">
+              <a:buNone/>
+            </a:pPr>
+            <a:r>
+              <a:rPr lang="en-US" sz="1200" b="1" dirty="0">
+                <a:solidFill>
+                  <a:srgbClr val="FFFFFF"/>
+                </a:solidFill>
+                <a:latin typeface="Calibri" pitchFamily="34" charset="0"/>
+                <a:ea typeface="Calibri" pitchFamily="34" charset="-122"/>
+                <a:cs typeface="Calibri" pitchFamily="34" charset="-120"/>
+              </a:rPr>
+              <a:t>20%  Tesztelés</a:t>
+            </a:r>
+            <a:endParaRPr lang="en-US" sz="1200" dirty="0"/>
+          </a:p>
+        </p:txBody>
+      </p:sp>
+      <p:sp>
+        <p:nvSpPr>
+          <p:cNvPr id="15" name="Shape 13"/>
+          <p:cNvSpPr/>
+          <p:nvPr/>
+        </p:nvSpPr>
+        <p:spPr>
+          <a:xfrm>
+            <a:off x="365760" y="3072384"/>
+            <a:ext cx="4114800" cy="475488"/>
+          </a:xfrm>
+          <a:prstGeom prst="rect">
+            <a:avLst/>
+          </a:prstGeom>
+          <a:solidFill>
+            <a:srgbClr val="242A4A"/>
+          </a:solidFill>
+          <a:ln w="12700">
+            <a:solidFill>
+              <a:srgbClr val="2C3566"/>
+            </a:solidFill>
+            <a:prstDash val="solid"/>
+          </a:ln>
+        </p:spPr>
+      </p:sp>
+      <p:sp>
+        <p:nvSpPr>
+          <p:cNvPr id="16" name="Shape 14"/>
+          <p:cNvSpPr/>
+          <p:nvPr/>
+        </p:nvSpPr>
+        <p:spPr>
+          <a:xfrm>
+            <a:off x="365760" y="3072384"/>
+            <a:ext cx="411480" cy="475488"/>
+          </a:xfrm>
+          <a:prstGeom prst="rect">
+            <a:avLst/>
+          </a:prstGeom>
+          <a:solidFill>
+            <a:srgbClr val="A78BFA">
+              <a:alpha val="80000"/>
+            </a:srgbClr>
+          </a:solidFill>
+          <a:ln w="12700">
+            <a:solidFill>
+              <a:srgbClr val="A78BFA"/>
+            </a:solidFill>
+            <a:prstDash val="solid"/>
+          </a:ln>
+        </p:spPr>
+      </p:sp>
+      <p:sp>
+        <p:nvSpPr>
+          <p:cNvPr id="17" name="Text 15"/>
+          <p:cNvSpPr/>
+          <p:nvPr/>
+        </p:nvSpPr>
+        <p:spPr>
+          <a:xfrm>
+            <a:off x="502920" y="3163824"/>
+            <a:ext cx="3840480" cy="292608"/>
+          </a:xfrm>
+          <a:prstGeom prst="rect">
+            <a:avLst/>
+          </a:prstGeom>
+          <a:noFill/>
+          <a:ln/>
+        </p:spPr>
+        <p:txBody>
+          <a:bodyPr wrap="square" lIns="0" tIns="0" rIns="0" bIns="0" rtlCol="0" anchor="ctr"/>
+          <a:lstStyle/>
+          <a:p>
+            <a:pPr marL="0" indent="0">
+              <a:buNone/>
+            </a:pPr>
+            <a:r>
+              <a:rPr lang="en-US" sz="1200" b="1" dirty="0">
+                <a:solidFill>
+                  <a:srgbClr val="FFFFFF"/>
+                </a:solidFill>
+                <a:latin typeface="Calibri" pitchFamily="34" charset="0"/>
+                <a:ea typeface="Calibri" pitchFamily="34" charset="-122"/>
+                <a:cs typeface="Calibri" pitchFamily="34" charset="-120"/>
+              </a:rPr>
+              <a:t>10%  Dokumentáció</a:t>
+            </a:r>
+            <a:endParaRPr lang="en-US" sz="1200" dirty="0"/>
+          </a:p>
+        </p:txBody>
+      </p:sp>
+      <p:sp>
+        <p:nvSpPr>
+          <p:cNvPr id="18" name="Text 16"/>
+          <p:cNvSpPr/>
+          <p:nvPr/>
+        </p:nvSpPr>
+        <p:spPr>
+          <a:xfrm>
+            <a:off x="4754880" y="914400"/>
+            <a:ext cx="4114800" cy="365760"/>
+          </a:xfrm>
+          <a:prstGeom prst="rect">
+            <a:avLst/>
+          </a:prstGeom>
+          <a:noFill/>
+          <a:ln/>
+        </p:spPr>
+        <p:txBody>
+          <a:bodyPr wrap="square" rtlCol="0" anchor="ctr"/>
+          <a:lstStyle/>
+          <a:p>
+            <a:pPr marL="0" indent="0">
+              <a:buNone/>
+            </a:pPr>
+            <a:r>
+              <a:rPr lang="en-US" sz="1400" b="1" dirty="0">
+                <a:solidFill>
+                  <a:srgbClr val="FFFFFF"/>
+                </a:solidFill>
+                <a:latin typeface="Calibri" pitchFamily="34" charset="0"/>
+                <a:ea typeface="Calibri" pitchFamily="34" charset="-122"/>
+                <a:cs typeface="Calibri" pitchFamily="34" charset="-120"/>
+              </a:rPr>
+              <a:t>🖥️  Eszközök megoszlása</a:t>
+            </a:r>
+            <a:endParaRPr lang="en-US" sz="1400" dirty="0"/>
+          </a:p>
+        </p:txBody>
+      </p:sp>
+      <p:sp>
+        <p:nvSpPr>
+          <p:cNvPr id="19" name="Shape 17"/>
+          <p:cNvSpPr/>
+          <p:nvPr/>
+        </p:nvSpPr>
+        <p:spPr>
+          <a:xfrm>
+            <a:off x="4754880" y="1371600"/>
+            <a:ext cx="1920240" cy="1097280"/>
+          </a:xfrm>
+          <a:prstGeom prst="rect">
+            <a:avLst/>
+          </a:prstGeom>
+          <a:solidFill>
+            <a:srgbClr val="242A4A"/>
+          </a:solidFill>
+          <a:ln w="19050">
+            <a:solidFill>
+              <a:srgbClr val="4F8EF7"/>
+            </a:solidFill>
+            <a:prstDash val="solid"/>
+          </a:ln>
+        </p:spPr>
+      </p:sp>
+      <p:sp>
+        <p:nvSpPr>
+          <p:cNvPr id="20" name="Text 18"/>
+          <p:cNvSpPr/>
+          <p:nvPr/>
+        </p:nvSpPr>
+        <p:spPr>
+          <a:xfrm>
+            <a:off x="4754880" y="1463040"/>
+            <a:ext cx="1920240" cy="502920"/>
+          </a:xfrm>
+          <a:prstGeom prst="rect">
+            <a:avLst/>
+          </a:prstGeom>
+          <a:noFill/>
+          <a:ln/>
+        </p:spPr>
+        <p:txBody>
+          <a:bodyPr wrap="square" rtlCol="0" anchor="ctr"/>
+          <a:lstStyle/>
+          <a:p>
+            <a:pPr marL="0" indent="0" algn="ctr">
+              <a:buNone/>
+            </a:pPr>
+            <a:r>
+              <a:rPr lang="hu-HU" sz="2800" b="1" dirty="0">
+                <a:solidFill>
+                  <a:srgbClr val="4F8EF7"/>
+                </a:solidFill>
+                <a:latin typeface="Calibri" pitchFamily="34" charset="0"/>
+                <a:ea typeface="Calibri" pitchFamily="34" charset="-122"/>
+                <a:cs typeface="Calibri" pitchFamily="34" charset="-120"/>
+              </a:rPr>
+              <a:t>58</a:t>
+            </a:r>
+            <a:r>
+              <a:rPr lang="en-US" sz="2800" b="1" dirty="0">
+                <a:solidFill>
+                  <a:srgbClr val="4F8EF7"/>
+                </a:solidFill>
+                <a:latin typeface="Calibri" pitchFamily="34" charset="0"/>
+                <a:ea typeface="Calibri" pitchFamily="34" charset="-122"/>
+                <a:cs typeface="Calibri" pitchFamily="34" charset="-120"/>
+              </a:rPr>
+              <a:t>%</a:t>
+            </a:r>
+            <a:endParaRPr lang="en-US" sz="2800" dirty="0"/>
+          </a:p>
+        </p:txBody>
+      </p:sp>
+      <p:sp>
+        <p:nvSpPr>
+          <p:cNvPr id="21" name="Text 19"/>
+          <p:cNvSpPr/>
+          <p:nvPr/>
+        </p:nvSpPr>
+        <p:spPr>
+          <a:xfrm>
+            <a:off x="4754880" y="2011680"/>
+            <a:ext cx="1920240" cy="365760"/>
+          </a:xfrm>
+          <a:prstGeom prst="rect">
+            <a:avLst/>
+          </a:prstGeom>
+          <a:noFill/>
+          <a:ln/>
+        </p:spPr>
+        <p:txBody>
+          <a:bodyPr wrap="square" rtlCol="0" anchor="ctr"/>
+          <a:lstStyle/>
+          <a:p>
+            <a:pPr marL="0" indent="0" algn="ctr">
+              <a:buNone/>
+            </a:pPr>
+            <a:r>
+              <a:rPr lang="en-US" sz="1100" dirty="0">
+                <a:solidFill>
+                  <a:srgbClr val="C8D4F0"/>
+                </a:solidFill>
+                <a:latin typeface="Calibri" pitchFamily="34" charset="0"/>
+                <a:ea typeface="Calibri" pitchFamily="34" charset="-122"/>
+                <a:cs typeface="Calibri" pitchFamily="34" charset="-120"/>
+              </a:rPr>
+              <a:t>PC  –  </a:t>
+            </a:r>
+            <a:r>
+              <a:rPr lang="hu-HU" sz="1100" dirty="0">
+                <a:solidFill>
+                  <a:srgbClr val="C8D4F0"/>
+                </a:solidFill>
+                <a:latin typeface="Calibri" pitchFamily="34" charset="0"/>
+                <a:ea typeface="Calibri" pitchFamily="34" charset="-122"/>
+                <a:cs typeface="Calibri" pitchFamily="34" charset="-120"/>
+              </a:rPr>
+              <a:t>22</a:t>
+            </a:r>
+            <a:r>
+              <a:rPr lang="en-US" sz="1100" dirty="0">
+                <a:solidFill>
+                  <a:srgbClr val="C8D4F0"/>
+                </a:solidFill>
+                <a:latin typeface="Calibri" pitchFamily="34" charset="0"/>
+                <a:ea typeface="Calibri" pitchFamily="34" charset="-122"/>
+                <a:cs typeface="Calibri" pitchFamily="34" charset="-120"/>
+              </a:rPr>
+              <a:t> db</a:t>
+            </a:r>
+            <a:endParaRPr lang="en-US" sz="1100" dirty="0"/>
+          </a:p>
+        </p:txBody>
+      </p:sp>
+      <p:sp>
+        <p:nvSpPr>
+          <p:cNvPr id="22" name="Shape 20"/>
+          <p:cNvSpPr/>
+          <p:nvPr/>
+        </p:nvSpPr>
+        <p:spPr>
+          <a:xfrm>
+            <a:off x="6858000" y="1371600"/>
+            <a:ext cx="1920240" cy="1097280"/>
+          </a:xfrm>
+          <a:prstGeom prst="rect">
+            <a:avLst/>
+          </a:prstGeom>
+          <a:solidFill>
+            <a:srgbClr val="242A4A"/>
+          </a:solidFill>
+          <a:ln w="19050">
+            <a:solidFill>
+              <a:srgbClr val="22C55E"/>
+            </a:solidFill>
+            <a:prstDash val="solid"/>
+          </a:ln>
+        </p:spPr>
+      </p:sp>
+      <p:sp>
+        <p:nvSpPr>
+          <p:cNvPr id="23" name="Text 21"/>
+          <p:cNvSpPr/>
+          <p:nvPr/>
+        </p:nvSpPr>
+        <p:spPr>
+          <a:xfrm>
+            <a:off x="6858000" y="1463040"/>
+            <a:ext cx="1920240" cy="502920"/>
+          </a:xfrm>
+          <a:prstGeom prst="rect">
+            <a:avLst/>
+          </a:prstGeom>
+          <a:noFill/>
+          <a:ln/>
+        </p:spPr>
+        <p:txBody>
+          <a:bodyPr wrap="square" rtlCol="0" anchor="ctr"/>
+          <a:lstStyle/>
+          <a:p>
+            <a:pPr marL="0" indent="0" algn="ctr">
+              <a:buNone/>
+            </a:pPr>
+            <a:r>
+              <a:rPr lang="hu-HU" sz="2800" b="1" dirty="0">
+                <a:solidFill>
+                  <a:srgbClr val="22C55E"/>
+                </a:solidFill>
+                <a:latin typeface="Calibri" pitchFamily="34" charset="0"/>
+                <a:ea typeface="Calibri" pitchFamily="34" charset="-122"/>
+                <a:cs typeface="Calibri" pitchFamily="34" charset="-120"/>
+              </a:rPr>
+              <a:t>16</a:t>
+            </a:r>
+            <a:r>
+              <a:rPr lang="en-US" sz="2800" b="1" dirty="0">
+                <a:solidFill>
+                  <a:srgbClr val="22C55E"/>
+                </a:solidFill>
+                <a:latin typeface="Calibri" pitchFamily="34" charset="0"/>
+                <a:ea typeface="Calibri" pitchFamily="34" charset="-122"/>
+                <a:cs typeface="Calibri" pitchFamily="34" charset="-120"/>
+              </a:rPr>
+              <a:t>%</a:t>
+            </a:r>
+            <a:endParaRPr lang="en-US" sz="2800" dirty="0"/>
+          </a:p>
+        </p:txBody>
+      </p:sp>
+      <p:sp>
+        <p:nvSpPr>
+          <p:cNvPr id="24" name="Text 22"/>
+          <p:cNvSpPr/>
+          <p:nvPr/>
+        </p:nvSpPr>
+        <p:spPr>
+          <a:xfrm>
+            <a:off x="6858000" y="2011680"/>
+            <a:ext cx="1920240" cy="365760"/>
+          </a:xfrm>
+          <a:prstGeom prst="rect">
+            <a:avLst/>
+          </a:prstGeom>
+          <a:noFill/>
+          <a:ln/>
+        </p:spPr>
+        <p:txBody>
+          <a:bodyPr wrap="square" rtlCol="0" anchor="ctr"/>
+          <a:lstStyle/>
+          <a:p>
+            <a:pPr marL="0" indent="0" algn="ctr">
+              <a:buNone/>
+            </a:pPr>
+            <a:r>
+              <a:rPr lang="en-US" sz="1100" dirty="0">
+                <a:solidFill>
+                  <a:srgbClr val="C8D4F0"/>
+                </a:solidFill>
+                <a:latin typeface="Calibri" pitchFamily="34" charset="0"/>
+                <a:ea typeface="Calibri" pitchFamily="34" charset="-122"/>
+                <a:cs typeface="Calibri" pitchFamily="34" charset="-120"/>
+              </a:rPr>
+              <a:t>Switch  –  </a:t>
+            </a:r>
+            <a:r>
+              <a:rPr lang="hu-HU" sz="1100" dirty="0">
+                <a:solidFill>
+                  <a:srgbClr val="C8D4F0"/>
+                </a:solidFill>
+                <a:latin typeface="Calibri" pitchFamily="34" charset="0"/>
+                <a:ea typeface="Calibri" pitchFamily="34" charset="-122"/>
+                <a:cs typeface="Calibri" pitchFamily="34" charset="-120"/>
+              </a:rPr>
+              <a:t>6</a:t>
+            </a:r>
+            <a:r>
+              <a:rPr lang="en-US" sz="1100" dirty="0">
+                <a:solidFill>
+                  <a:srgbClr val="C8D4F0"/>
+                </a:solidFill>
+                <a:latin typeface="Calibri" pitchFamily="34" charset="0"/>
+                <a:ea typeface="Calibri" pitchFamily="34" charset="-122"/>
+                <a:cs typeface="Calibri" pitchFamily="34" charset="-120"/>
+              </a:rPr>
+              <a:t> db</a:t>
+            </a:r>
+            <a:endParaRPr lang="en-US" sz="1100" dirty="0"/>
+          </a:p>
+        </p:txBody>
+      </p:sp>
+      <p:sp>
+        <p:nvSpPr>
+          <p:cNvPr id="25" name="Shape 23"/>
+          <p:cNvSpPr/>
+          <p:nvPr/>
+        </p:nvSpPr>
+        <p:spPr>
+          <a:xfrm>
+            <a:off x="4754880" y="2651760"/>
+            <a:ext cx="1920240" cy="1097280"/>
+          </a:xfrm>
+          <a:prstGeom prst="rect">
+            <a:avLst/>
+          </a:prstGeom>
+          <a:solidFill>
+            <a:srgbClr val="242A4A"/>
+          </a:solidFill>
+          <a:ln w="19050">
+            <a:solidFill>
+              <a:srgbClr val="F59E0B"/>
+            </a:solidFill>
+            <a:prstDash val="solid"/>
+          </a:ln>
+        </p:spPr>
+      </p:sp>
+      <p:sp>
+        <p:nvSpPr>
+          <p:cNvPr id="26" name="Text 24"/>
+          <p:cNvSpPr/>
+          <p:nvPr/>
+        </p:nvSpPr>
+        <p:spPr>
+          <a:xfrm>
+            <a:off x="4754880" y="2743200"/>
+            <a:ext cx="1920240" cy="502920"/>
+          </a:xfrm>
+          <a:prstGeom prst="rect">
+            <a:avLst/>
+          </a:prstGeom>
+          <a:noFill/>
+          <a:ln/>
+        </p:spPr>
+        <p:txBody>
+          <a:bodyPr wrap="square" rtlCol="0" anchor="ctr"/>
+          <a:lstStyle/>
+          <a:p>
+            <a:pPr marL="0" indent="0" algn="ctr">
+              <a:buNone/>
+            </a:pPr>
+            <a:r>
+              <a:rPr lang="hu-HU" sz="2800" b="1" dirty="0">
+                <a:solidFill>
+                  <a:srgbClr val="F59E0B"/>
+                </a:solidFill>
+                <a:latin typeface="Calibri" pitchFamily="34" charset="0"/>
+                <a:ea typeface="Calibri" pitchFamily="34" charset="-122"/>
+                <a:cs typeface="Calibri" pitchFamily="34" charset="-120"/>
+              </a:rPr>
+              <a:t>18</a:t>
+            </a:r>
+            <a:r>
+              <a:rPr lang="en-US" sz="2800" b="1" dirty="0">
+                <a:solidFill>
+                  <a:srgbClr val="F59E0B"/>
+                </a:solidFill>
+                <a:latin typeface="Calibri" pitchFamily="34" charset="0"/>
+                <a:ea typeface="Calibri" pitchFamily="34" charset="-122"/>
+                <a:cs typeface="Calibri" pitchFamily="34" charset="-120"/>
+              </a:rPr>
+              <a:t>%</a:t>
+            </a:r>
+            <a:endParaRPr lang="en-US" sz="2800" dirty="0"/>
+          </a:p>
+        </p:txBody>
+      </p:sp>
+      <p:sp>
+        <p:nvSpPr>
+          <p:cNvPr id="27" name="Text 25"/>
+          <p:cNvSpPr/>
+          <p:nvPr/>
+        </p:nvSpPr>
+        <p:spPr>
+          <a:xfrm>
+            <a:off x="4754880" y="3291840"/>
+            <a:ext cx="1920240" cy="365760"/>
+          </a:xfrm>
+          <a:prstGeom prst="rect">
+            <a:avLst/>
+          </a:prstGeom>
+          <a:noFill/>
+          <a:ln/>
+        </p:spPr>
+        <p:txBody>
+          <a:bodyPr wrap="square" rtlCol="0" anchor="ctr"/>
+          <a:lstStyle/>
+          <a:p>
+            <a:pPr marL="0" indent="0" algn="ctr">
+              <a:buNone/>
+            </a:pPr>
+            <a:r>
+              <a:rPr lang="en-US" sz="1100" dirty="0">
+                <a:solidFill>
+                  <a:srgbClr val="C8D4F0"/>
+                </a:solidFill>
+                <a:latin typeface="Calibri" pitchFamily="34" charset="0"/>
+                <a:ea typeface="Calibri" pitchFamily="34" charset="-122"/>
+                <a:cs typeface="Calibri" pitchFamily="34" charset="-120"/>
+              </a:rPr>
+              <a:t>Router  –  </a:t>
+            </a:r>
+            <a:r>
+              <a:rPr lang="hu-HU" sz="1100" dirty="0">
+                <a:solidFill>
+                  <a:srgbClr val="C8D4F0"/>
+                </a:solidFill>
+                <a:latin typeface="Calibri" pitchFamily="34" charset="0"/>
+                <a:ea typeface="Calibri" pitchFamily="34" charset="-122"/>
+                <a:cs typeface="Calibri" pitchFamily="34" charset="-120"/>
+              </a:rPr>
+              <a:t>7</a:t>
+            </a:r>
+            <a:r>
+              <a:rPr lang="en-US" sz="1100" dirty="0">
+                <a:solidFill>
+                  <a:srgbClr val="C8D4F0"/>
+                </a:solidFill>
+                <a:latin typeface="Calibri" pitchFamily="34" charset="0"/>
+                <a:ea typeface="Calibri" pitchFamily="34" charset="-122"/>
+                <a:cs typeface="Calibri" pitchFamily="34" charset="-120"/>
+              </a:rPr>
+              <a:t> db</a:t>
+            </a:r>
+            <a:endParaRPr lang="en-US" sz="1100" dirty="0"/>
+          </a:p>
+        </p:txBody>
+      </p:sp>
+      <p:sp>
+        <p:nvSpPr>
+          <p:cNvPr id="28" name="Shape 26"/>
+          <p:cNvSpPr/>
+          <p:nvPr/>
+        </p:nvSpPr>
+        <p:spPr>
+          <a:xfrm>
+            <a:off x="6858000" y="2651760"/>
+            <a:ext cx="1920240" cy="1097280"/>
+          </a:xfrm>
+          <a:prstGeom prst="rect">
+            <a:avLst/>
+          </a:prstGeom>
+          <a:solidFill>
+            <a:srgbClr val="242A4A"/>
+          </a:solidFill>
+          <a:ln w="19050">
+            <a:solidFill>
+              <a:srgbClr val="EF4444"/>
+            </a:solidFill>
+            <a:prstDash val="solid"/>
+          </a:ln>
+        </p:spPr>
+        <p:txBody>
+          <a:bodyPr/>
+          <a:lstStyle/>
+          <a:p>
+            <a:endParaRPr lang="hu-HU" dirty="0"/>
+          </a:p>
+        </p:txBody>
+      </p:sp>
+      <p:sp>
+        <p:nvSpPr>
+          <p:cNvPr id="29" name="Text 27"/>
+          <p:cNvSpPr/>
+          <p:nvPr/>
+        </p:nvSpPr>
+        <p:spPr>
+          <a:xfrm>
+            <a:off x="6858000" y="2743200"/>
+            <a:ext cx="1920240" cy="502920"/>
+          </a:xfrm>
+          <a:prstGeom prst="rect">
+            <a:avLst/>
+          </a:prstGeom>
+          <a:noFill/>
+          <a:ln/>
+        </p:spPr>
+        <p:txBody>
+          <a:bodyPr wrap="square" rtlCol="0" anchor="ctr"/>
+          <a:lstStyle/>
+          <a:p>
+            <a:pPr marL="0" indent="0" algn="ctr">
+              <a:buNone/>
+            </a:pPr>
+            <a:r>
+              <a:rPr lang="hu-HU" sz="2800" b="1" dirty="0">
+                <a:solidFill>
+                  <a:srgbClr val="EF4444"/>
+                </a:solidFill>
+                <a:latin typeface="Calibri" pitchFamily="34" charset="0"/>
+                <a:ea typeface="Calibri" pitchFamily="34" charset="-122"/>
+                <a:cs typeface="Calibri" pitchFamily="34" charset="-120"/>
+              </a:rPr>
+              <a:t>8</a:t>
+            </a:r>
+            <a:r>
+              <a:rPr lang="en-US" sz="2800" b="1" dirty="0">
+                <a:solidFill>
+                  <a:srgbClr val="EF4444"/>
+                </a:solidFill>
+                <a:latin typeface="Calibri" pitchFamily="34" charset="0"/>
+                <a:ea typeface="Calibri" pitchFamily="34" charset="-122"/>
+                <a:cs typeface="Calibri" pitchFamily="34" charset="-120"/>
+              </a:rPr>
+              <a:t>%</a:t>
+            </a:r>
+            <a:endParaRPr lang="en-US" sz="2800" dirty="0"/>
+          </a:p>
+        </p:txBody>
+      </p:sp>
+      <p:sp>
+        <p:nvSpPr>
+          <p:cNvPr id="30" name="Text 28"/>
+          <p:cNvSpPr/>
+          <p:nvPr/>
+        </p:nvSpPr>
+        <p:spPr>
+          <a:xfrm>
+            <a:off x="6858000" y="3291840"/>
+            <a:ext cx="1920240" cy="365760"/>
+          </a:xfrm>
+          <a:prstGeom prst="rect">
+            <a:avLst/>
+          </a:prstGeom>
+          <a:noFill/>
+          <a:ln/>
+        </p:spPr>
+        <p:txBody>
+          <a:bodyPr wrap="square" rtlCol="0" anchor="ctr"/>
+          <a:lstStyle/>
+          <a:p>
+            <a:pPr marL="0" indent="0" algn="ctr">
+              <a:buNone/>
+            </a:pPr>
+            <a:r>
+              <a:rPr lang="en-US" sz="1100" dirty="0">
+                <a:solidFill>
+                  <a:srgbClr val="C8D4F0"/>
+                </a:solidFill>
+                <a:latin typeface="Calibri" pitchFamily="34" charset="0"/>
+                <a:ea typeface="Calibri" pitchFamily="34" charset="-122"/>
+                <a:cs typeface="Calibri" pitchFamily="34" charset="-120"/>
+              </a:rPr>
+              <a:t>Szerver  –  3 db</a:t>
+            </a:r>
+            <a:endParaRPr lang="en-US" sz="1100" dirty="0"/>
+          </a:p>
+        </p:txBody>
+      </p:sp>
+      <p:sp>
+        <p:nvSpPr>
+          <p:cNvPr id="32" name="Text 30"/>
+          <p:cNvSpPr/>
+          <p:nvPr/>
+        </p:nvSpPr>
+        <p:spPr>
+          <a:xfrm>
+            <a:off x="548640" y="4535424"/>
+            <a:ext cx="8046720" cy="411480"/>
+          </a:xfrm>
+          <a:prstGeom prst="rect">
+            <a:avLst/>
+          </a:prstGeom>
+          <a:noFill/>
+          <a:ln/>
+        </p:spPr>
+        <p:txBody>
+          <a:bodyPr wrap="square" rtlCol="0" anchor="ctr"/>
+          <a:lstStyle/>
+          <a:p>
+            <a:pPr marL="0" indent="0">
+              <a:buNone/>
+            </a:pPr>
+            <a:endParaRPr lang="en-US" sz="1200" dirty="0"/>
+          </a:p>
+        </p:txBody>
+      </p:sp>
+    </p:spTree>
+  </p:cSld>
+  <p:clrMapOvr>
+    <a:masterClrMapping/>
+  </p:clrMapOvr>
+</p:sld>
+</file>
+
+<file path=ppt/slides/slide11.xml><?xml version="1.0" encoding="utf-8"?>
+<p:sld xmlns:a="http://schemas.openxmlformats.org/drawingml/2006/main" xmlns:r="http://schemas.openxmlformats.org/officeDocument/2006/relationships" xmlns:p="http://schemas.openxmlformats.org/presentationml/2006/main">
+  <p:cSld name="Slide 9">
+    <p:bg>
+      <p:bgPr>
+        <a:solidFill>
+          <a:srgbClr val="1A1F35"/>
+        </a:solidFill>
+        <a:effectLst/>
+      </p:bgPr>
+    </p:bg>
+    <p:spTree>
+      <p:nvGrpSpPr>
+        <p:cNvPr id="1" name=""/>
+        <p:cNvGrpSpPr/>
+        <p:nvPr/>
+      </p:nvGrpSpPr>
+      <p:grpSpPr>
+        <a:xfrm>
+          <a:off x="0" y="0"/>
+          <a:ext cx="0" cy="0"/>
+          <a:chOff x="0" y="0"/>
+          <a:chExt cx="0" cy="0"/>
+        </a:xfrm>
+      </p:grpSpPr>
+      <p:sp>
+        <p:nvSpPr>
+          <p:cNvPr id="2" name="Shape 0"/>
+          <p:cNvSpPr/>
+          <p:nvPr/>
+        </p:nvSpPr>
+        <p:spPr>
+          <a:xfrm>
+            <a:off x="0" y="0"/>
+            <a:ext cx="9144000" cy="777240"/>
+          </a:xfrm>
+          <a:prstGeom prst="rect">
+            <a:avLst/>
+          </a:prstGeom>
+          <a:solidFill>
+            <a:srgbClr val="2C3566"/>
+          </a:solidFill>
+          <a:ln w="12700">
+            <a:solidFill>
+              <a:srgbClr val="2C3566"/>
+            </a:solidFill>
+            <a:prstDash val="solid"/>
+          </a:ln>
+        </p:spPr>
+      </p:sp>
+      <p:sp>
+        <p:nvSpPr>
+          <p:cNvPr id="3" name="Shape 1"/>
+          <p:cNvSpPr/>
+          <p:nvPr/>
+        </p:nvSpPr>
+        <p:spPr>
+          <a:xfrm>
+            <a:off x="0" y="0"/>
+            <a:ext cx="9144000" cy="64008"/>
+          </a:xfrm>
+          <a:prstGeom prst="rect">
+            <a:avLst/>
+          </a:prstGeom>
+          <a:solidFill>
+            <a:srgbClr val="4F8EF7"/>
+          </a:solidFill>
+          <a:ln w="12700">
+            <a:solidFill>
+              <a:srgbClr val="4F8EF7"/>
+            </a:solidFill>
+            <a:prstDash val="solid"/>
+          </a:ln>
+        </p:spPr>
+      </p:sp>
+      <p:sp>
+        <p:nvSpPr>
+          <p:cNvPr id="4" name="Text 2"/>
+          <p:cNvSpPr/>
+          <p:nvPr/>
+        </p:nvSpPr>
+        <p:spPr>
+          <a:xfrm>
+            <a:off x="365760" y="137160"/>
+            <a:ext cx="8412480" cy="502920"/>
+          </a:xfrm>
+          <a:prstGeom prst="rect">
+            <a:avLst/>
+          </a:prstGeom>
+          <a:noFill/>
+          <a:ln/>
+        </p:spPr>
+        <p:txBody>
+          <a:bodyPr wrap="square" rtlCol="0" anchor="ctr"/>
+          <a:lstStyle/>
+          <a:p>
+            <a:pPr marL="0" indent="0">
+              <a:buNone/>
+            </a:pPr>
+            <a:r>
+              <a:rPr lang="en-US" sz="2000" b="1" dirty="0">
+                <a:solidFill>
+                  <a:srgbClr val="FFFFFF"/>
+                </a:solidFill>
+                <a:latin typeface="Calibri" pitchFamily="34" charset="0"/>
+                <a:ea typeface="Calibri" pitchFamily="34" charset="-122"/>
+                <a:cs typeface="Calibri" pitchFamily="34" charset="-120"/>
+              </a:rPr>
+              <a:t>🐙  GIT &amp; GITHUB – VERZIÓKEZELÉS</a:t>
+            </a:r>
+            <a:endParaRPr lang="en-US" sz="2000" dirty="0"/>
+          </a:p>
+        </p:txBody>
+      </p:sp>
+      <p:sp>
+        <p:nvSpPr>
+          <p:cNvPr id="5" name="Shape 3"/>
+          <p:cNvSpPr/>
+          <p:nvPr/>
+        </p:nvSpPr>
+        <p:spPr>
+          <a:xfrm>
+            <a:off x="365760" y="960120"/>
+            <a:ext cx="3840480" cy="3474720"/>
+          </a:xfrm>
+          <a:prstGeom prst="rect">
+            <a:avLst/>
+          </a:prstGeom>
+          <a:solidFill>
+            <a:srgbClr val="242A4A"/>
+          </a:solidFill>
+          <a:ln w="12700">
+            <a:solidFill>
+              <a:srgbClr val="4F8EF7"/>
+            </a:solidFill>
+            <a:prstDash val="solid"/>
+          </a:ln>
+        </p:spPr>
+      </p:sp>
+      <p:sp>
+        <p:nvSpPr>
+          <p:cNvPr id="7" name="Text 4"/>
+          <p:cNvSpPr/>
+          <p:nvPr/>
+        </p:nvSpPr>
+        <p:spPr>
+          <a:xfrm>
+            <a:off x="457200" y="4114800"/>
+            <a:ext cx="3657600" cy="365760"/>
+          </a:xfrm>
+          <a:prstGeom prst="rect">
+            <a:avLst/>
+          </a:prstGeom>
+          <a:noFill/>
+          <a:ln/>
+        </p:spPr>
+        <p:txBody>
+          <a:bodyPr wrap="square" rtlCol="0" anchor="ctr"/>
+          <a:lstStyle/>
+          <a:p>
+            <a:pPr marL="0" indent="0" algn="ctr">
+              <a:buNone/>
+            </a:pPr>
+            <a:endParaRPr lang="en-US" sz="1000" dirty="0"/>
+          </a:p>
+        </p:txBody>
+      </p:sp>
+      <p:sp>
+        <p:nvSpPr>
+          <p:cNvPr id="8" name="Shape 5"/>
+          <p:cNvSpPr/>
+          <p:nvPr/>
+        </p:nvSpPr>
+        <p:spPr>
+          <a:xfrm>
+            <a:off x="4572000" y="960120"/>
+            <a:ext cx="4114800" cy="804672"/>
+          </a:xfrm>
+          <a:prstGeom prst="rect">
+            <a:avLst/>
+          </a:prstGeom>
+          <a:solidFill>
+            <a:srgbClr val="242A4A"/>
+          </a:solidFill>
+          <a:ln w="12700">
+            <a:solidFill>
+              <a:srgbClr val="2C3566"/>
+            </a:solidFill>
+            <a:prstDash val="solid"/>
+          </a:ln>
+        </p:spPr>
+      </p:sp>
+      <p:sp>
+        <p:nvSpPr>
+          <p:cNvPr id="9" name="Shape 6"/>
+          <p:cNvSpPr/>
+          <p:nvPr/>
+        </p:nvSpPr>
+        <p:spPr>
+          <a:xfrm>
+            <a:off x="4572000" y="960120"/>
+            <a:ext cx="73152" cy="804672"/>
+          </a:xfrm>
+          <a:prstGeom prst="rect">
+            <a:avLst/>
+          </a:prstGeom>
+          <a:solidFill>
+            <a:srgbClr val="4F8EF7"/>
+          </a:solidFill>
+          <a:ln w="12700">
+            <a:solidFill>
+              <a:srgbClr val="4F8EF7"/>
+            </a:solidFill>
+            <a:prstDash val="solid"/>
+          </a:ln>
+        </p:spPr>
+      </p:sp>
+      <p:sp>
+        <p:nvSpPr>
+          <p:cNvPr id="10" name="Text 7"/>
+          <p:cNvSpPr/>
+          <p:nvPr/>
+        </p:nvSpPr>
+        <p:spPr>
+          <a:xfrm>
+            <a:off x="4754880" y="1033272"/>
+            <a:ext cx="3657600" cy="320040"/>
+          </a:xfrm>
+          <a:prstGeom prst="rect">
+            <a:avLst/>
+          </a:prstGeom>
+          <a:noFill/>
+          <a:ln/>
+        </p:spPr>
+        <p:txBody>
+          <a:bodyPr wrap="square" rtlCol="0" anchor="ctr"/>
+          <a:lstStyle/>
+          <a:p>
+            <a:pPr marL="0" indent="0">
+              <a:buNone/>
+            </a:pPr>
+            <a:r>
+              <a:rPr lang="en-US" sz="1300" b="1" dirty="0">
+                <a:solidFill>
+                  <a:srgbClr val="FFFFFF"/>
+                </a:solidFill>
+                <a:latin typeface="Calibri" pitchFamily="34" charset="0"/>
+                <a:ea typeface="Calibri" pitchFamily="34" charset="-122"/>
+                <a:cs typeface="Calibri" pitchFamily="34" charset="-120"/>
+              </a:rPr>
+              <a:t>🌿  Branch stratégia</a:t>
+            </a:r>
+            <a:endParaRPr lang="en-US" sz="1300" dirty="0"/>
+          </a:p>
+        </p:txBody>
+      </p:sp>
+      <p:sp>
+        <p:nvSpPr>
+          <p:cNvPr id="11" name="Text 8"/>
+          <p:cNvSpPr/>
+          <p:nvPr/>
+        </p:nvSpPr>
+        <p:spPr>
+          <a:xfrm>
+            <a:off x="4754880" y="1380744"/>
+            <a:ext cx="3657600" cy="292608"/>
+          </a:xfrm>
+          <a:prstGeom prst="rect">
+            <a:avLst/>
+          </a:prstGeom>
+          <a:noFill/>
+          <a:ln/>
+        </p:spPr>
+        <p:txBody>
+          <a:bodyPr wrap="square" rtlCol="0" anchor="ctr"/>
+          <a:lstStyle/>
+          <a:p>
+            <a:pPr marL="0" indent="0">
+              <a:buNone/>
+            </a:pPr>
+            <a:r>
+              <a:rPr lang="en-US" sz="1100" dirty="0">
+                <a:solidFill>
+                  <a:srgbClr val="C8D4F0"/>
+                </a:solidFill>
+                <a:latin typeface="Calibri" pitchFamily="34" charset="0"/>
+                <a:ea typeface="Calibri" pitchFamily="34" charset="-122"/>
+                <a:cs typeface="Calibri" pitchFamily="34" charset="-120"/>
+              </a:rPr>
+              <a:t>Main + feature branch-ek</a:t>
+            </a:r>
+            <a:endParaRPr lang="en-US" sz="1100" dirty="0"/>
+          </a:p>
+        </p:txBody>
+      </p:sp>
+      <p:sp>
+        <p:nvSpPr>
+          <p:cNvPr id="12" name="Shape 9"/>
+          <p:cNvSpPr/>
+          <p:nvPr/>
+        </p:nvSpPr>
+        <p:spPr>
+          <a:xfrm>
+            <a:off x="4572000" y="1874520"/>
+            <a:ext cx="4114800" cy="804672"/>
+          </a:xfrm>
+          <a:prstGeom prst="rect">
+            <a:avLst/>
+          </a:prstGeom>
+          <a:solidFill>
+            <a:srgbClr val="242A4A"/>
+          </a:solidFill>
+          <a:ln w="12700">
+            <a:solidFill>
+              <a:srgbClr val="2C3566"/>
+            </a:solidFill>
+            <a:prstDash val="solid"/>
+          </a:ln>
+        </p:spPr>
+      </p:sp>
+      <p:sp>
+        <p:nvSpPr>
+          <p:cNvPr id="13" name="Shape 10"/>
+          <p:cNvSpPr/>
+          <p:nvPr/>
+        </p:nvSpPr>
+        <p:spPr>
+          <a:xfrm>
+            <a:off x="4572000" y="1874520"/>
+            <a:ext cx="73152" cy="804672"/>
+          </a:xfrm>
+          <a:prstGeom prst="rect">
+            <a:avLst/>
+          </a:prstGeom>
+          <a:solidFill>
+            <a:srgbClr val="4F8EF7"/>
+          </a:solidFill>
+          <a:ln w="12700">
+            <a:solidFill>
+              <a:srgbClr val="4F8EF7"/>
+            </a:solidFill>
+            <a:prstDash val="solid"/>
+          </a:ln>
+        </p:spPr>
+      </p:sp>
+      <p:sp>
+        <p:nvSpPr>
+          <p:cNvPr id="14" name="Text 11"/>
+          <p:cNvSpPr/>
+          <p:nvPr/>
+        </p:nvSpPr>
+        <p:spPr>
+          <a:xfrm>
+            <a:off x="4754880" y="1947672"/>
+            <a:ext cx="3657600" cy="320040"/>
+          </a:xfrm>
+          <a:prstGeom prst="rect">
+            <a:avLst/>
+          </a:prstGeom>
+          <a:noFill/>
+          <a:ln/>
+        </p:spPr>
+        <p:txBody>
+          <a:bodyPr wrap="square" rtlCol="0" anchor="ctr"/>
+          <a:lstStyle/>
+          <a:p>
+            <a:pPr marL="0" indent="0">
+              <a:buNone/>
+            </a:pPr>
+            <a:r>
+              <a:rPr lang="en-US" sz="1300" b="1" dirty="0">
+                <a:solidFill>
+                  <a:srgbClr val="FFFFFF"/>
+                </a:solidFill>
+                <a:latin typeface="Calibri" pitchFamily="34" charset="0"/>
+                <a:ea typeface="Calibri" pitchFamily="34" charset="-122"/>
+                <a:cs typeface="Calibri" pitchFamily="34" charset="-120"/>
+              </a:rPr>
+              <a:t>💬  Commit konvenció</a:t>
+            </a:r>
+            <a:endParaRPr lang="en-US" sz="1300" dirty="0"/>
+          </a:p>
+        </p:txBody>
+      </p:sp>
+      <p:sp>
+        <p:nvSpPr>
+          <p:cNvPr id="15" name="Text 12"/>
+          <p:cNvSpPr/>
+          <p:nvPr/>
+        </p:nvSpPr>
+        <p:spPr>
+          <a:xfrm>
+            <a:off x="4754880" y="2295144"/>
+            <a:ext cx="3657600" cy="292608"/>
+          </a:xfrm>
+          <a:prstGeom prst="rect">
+            <a:avLst/>
+          </a:prstGeom>
+          <a:noFill/>
+          <a:ln/>
+        </p:spPr>
+        <p:txBody>
+          <a:bodyPr wrap="square" rtlCol="0" anchor="ctr"/>
+          <a:lstStyle/>
+          <a:p>
+            <a:pPr marL="0" indent="0">
+              <a:buNone/>
+            </a:pPr>
+            <a:r>
+              <a:rPr lang="en-US" sz="1100" dirty="0">
+                <a:solidFill>
+                  <a:srgbClr val="C8D4F0"/>
+                </a:solidFill>
+                <a:latin typeface="Calibri" pitchFamily="34" charset="0"/>
+                <a:ea typeface="Calibri" pitchFamily="34" charset="-122"/>
+                <a:cs typeface="Calibri" pitchFamily="34" charset="-120"/>
+              </a:rPr>
+              <a:t>Szemantikus commit üzenetek</a:t>
+            </a:r>
+            <a:endParaRPr lang="en-US" sz="1100" dirty="0"/>
+          </a:p>
+        </p:txBody>
+      </p:sp>
+      <p:sp>
+        <p:nvSpPr>
+          <p:cNvPr id="16" name="Shape 13"/>
+          <p:cNvSpPr/>
+          <p:nvPr/>
+        </p:nvSpPr>
+        <p:spPr>
+          <a:xfrm>
+            <a:off x="4572000" y="2788920"/>
+            <a:ext cx="4114800" cy="804672"/>
+          </a:xfrm>
+          <a:prstGeom prst="rect">
+            <a:avLst/>
+          </a:prstGeom>
+          <a:solidFill>
+            <a:srgbClr val="242A4A"/>
+          </a:solidFill>
+          <a:ln w="12700">
+            <a:solidFill>
+              <a:srgbClr val="2C3566"/>
+            </a:solidFill>
+            <a:prstDash val="solid"/>
+          </a:ln>
+        </p:spPr>
+      </p:sp>
+      <p:sp>
+        <p:nvSpPr>
+          <p:cNvPr id="17" name="Shape 14"/>
+          <p:cNvSpPr/>
+          <p:nvPr/>
+        </p:nvSpPr>
+        <p:spPr>
+          <a:xfrm>
+            <a:off x="4572000" y="2788920"/>
+            <a:ext cx="73152" cy="804672"/>
+          </a:xfrm>
+          <a:prstGeom prst="rect">
+            <a:avLst/>
+          </a:prstGeom>
+          <a:solidFill>
+            <a:srgbClr val="4F8EF7"/>
+          </a:solidFill>
+          <a:ln w="12700">
+            <a:solidFill>
+              <a:srgbClr val="4F8EF7"/>
+            </a:solidFill>
+            <a:prstDash val="solid"/>
+          </a:ln>
+        </p:spPr>
+      </p:sp>
+      <p:sp>
+        <p:nvSpPr>
+          <p:cNvPr id="18" name="Text 15"/>
+          <p:cNvSpPr/>
+          <p:nvPr/>
+        </p:nvSpPr>
+        <p:spPr>
+          <a:xfrm>
+            <a:off x="4754880" y="2862072"/>
+            <a:ext cx="3657600" cy="320040"/>
+          </a:xfrm>
+          <a:prstGeom prst="rect">
+            <a:avLst/>
+          </a:prstGeom>
+          <a:noFill/>
+          <a:ln/>
+        </p:spPr>
+        <p:txBody>
+          <a:bodyPr wrap="square" rtlCol="0" anchor="ctr"/>
+          <a:lstStyle/>
+          <a:p>
+            <a:pPr marL="0" indent="0">
+              <a:buNone/>
+            </a:pPr>
+            <a:r>
+              <a:rPr lang="en-US" sz="1300" b="1" dirty="0">
+                <a:solidFill>
+                  <a:srgbClr val="FFFFFF"/>
+                </a:solidFill>
+                <a:latin typeface="Calibri" pitchFamily="34" charset="0"/>
+                <a:ea typeface="Calibri" pitchFamily="34" charset="-122"/>
+                <a:cs typeface="Calibri" pitchFamily="34" charset="-120"/>
+              </a:rPr>
+              <a:t>🔁  Pull Request</a:t>
+            </a:r>
+            <a:endParaRPr lang="en-US" sz="1300" dirty="0"/>
+          </a:p>
+        </p:txBody>
+      </p:sp>
+      <p:sp>
+        <p:nvSpPr>
+          <p:cNvPr id="19" name="Text 16"/>
+          <p:cNvSpPr/>
+          <p:nvPr/>
+        </p:nvSpPr>
+        <p:spPr>
+          <a:xfrm>
+            <a:off x="4754880" y="3209544"/>
+            <a:ext cx="3657600" cy="292608"/>
+          </a:xfrm>
+          <a:prstGeom prst="rect">
+            <a:avLst/>
+          </a:prstGeom>
+          <a:noFill/>
+          <a:ln/>
+        </p:spPr>
+        <p:txBody>
+          <a:bodyPr wrap="square" rtlCol="0" anchor="ctr"/>
+          <a:lstStyle/>
+          <a:p>
+            <a:pPr marL="0" indent="0">
+              <a:buNone/>
+            </a:pPr>
+            <a:r>
+              <a:rPr lang="en-US" sz="1100" dirty="0">
+                <a:solidFill>
+                  <a:srgbClr val="C8D4F0"/>
+                </a:solidFill>
+                <a:latin typeface="Calibri" pitchFamily="34" charset="0"/>
+                <a:ea typeface="Calibri" pitchFamily="34" charset="-122"/>
+                <a:cs typeface="Calibri" pitchFamily="34" charset="-120"/>
+              </a:rPr>
+              <a:t>Code review minden merge előtt</a:t>
+            </a:r>
+            <a:endParaRPr lang="en-US" sz="1100" dirty="0"/>
+          </a:p>
+        </p:txBody>
+      </p:sp>
+      <p:sp>
+        <p:nvSpPr>
+          <p:cNvPr id="20" name="Shape 17"/>
+          <p:cNvSpPr/>
+          <p:nvPr/>
+        </p:nvSpPr>
+        <p:spPr>
+          <a:xfrm>
+            <a:off x="4572000" y="3749040"/>
+            <a:ext cx="4114800" cy="685800"/>
+          </a:xfrm>
+          <a:prstGeom prst="rect">
+            <a:avLst/>
+          </a:prstGeom>
+          <a:solidFill>
+            <a:srgbClr val="0D3B6E"/>
+          </a:solidFill>
+          <a:ln w="12700">
+            <a:solidFill>
+              <a:srgbClr val="7CB3FF"/>
+            </a:solidFill>
+            <a:prstDash val="solid"/>
+          </a:ln>
+        </p:spPr>
+      </p:sp>
+      <p:sp>
+        <p:nvSpPr>
+          <p:cNvPr id="21" name="Text 18"/>
+          <p:cNvSpPr/>
+          <p:nvPr/>
+        </p:nvSpPr>
+        <p:spPr>
+          <a:xfrm>
+            <a:off x="4709160" y="3794760"/>
+            <a:ext cx="3840480" cy="274320"/>
+          </a:xfrm>
+          <a:prstGeom prst="rect">
+            <a:avLst/>
+          </a:prstGeom>
+          <a:noFill/>
+          <a:ln/>
+        </p:spPr>
+        <p:txBody>
+          <a:bodyPr wrap="square" rtlCol="0" anchor="ctr"/>
+          <a:lstStyle/>
+          <a:p>
+            <a:pPr marL="0" indent="0">
+              <a:buNone/>
+            </a:pPr>
+            <a:r>
+              <a:rPr lang="en-US" sz="1100" b="1" dirty="0">
+                <a:solidFill>
+                  <a:srgbClr val="7CB3FF"/>
+                </a:solidFill>
+                <a:latin typeface="Calibri" pitchFamily="34" charset="0"/>
+                <a:ea typeface="Calibri" pitchFamily="34" charset="-122"/>
+                <a:cs typeface="Calibri" pitchFamily="34" charset="-120"/>
+              </a:rPr>
+              <a:t>📦  Tárolt tartalmak:</a:t>
+            </a:r>
+            <a:endParaRPr lang="en-US" sz="1100" dirty="0"/>
+          </a:p>
+        </p:txBody>
+      </p:sp>
+      <p:sp>
+        <p:nvSpPr>
+          <p:cNvPr id="22" name="Text 19"/>
+          <p:cNvSpPr/>
+          <p:nvPr/>
+        </p:nvSpPr>
+        <p:spPr>
+          <a:xfrm>
+            <a:off x="4709160" y="4069080"/>
+            <a:ext cx="3840480" cy="320040"/>
+          </a:xfrm>
+          <a:prstGeom prst="rect">
+            <a:avLst/>
+          </a:prstGeom>
+          <a:noFill/>
+          <a:ln/>
+        </p:spPr>
+        <p:txBody>
+          <a:bodyPr wrap="square" rtlCol="0" anchor="ctr"/>
+          <a:lstStyle/>
+          <a:p>
+            <a:pPr marL="0" indent="0">
+              <a:buNone/>
+            </a:pPr>
+            <a:r>
+              <a:rPr lang="en-US" sz="1000" dirty="0">
+                <a:solidFill>
+                  <a:srgbClr val="C8D4F0"/>
+                </a:solidFill>
+                <a:latin typeface="Calibri" pitchFamily="34" charset="0"/>
+                <a:ea typeface="Calibri" pitchFamily="34" charset="-122"/>
+                <a:cs typeface="Calibri" pitchFamily="34" charset="-120"/>
+              </a:rPr>
+              <a:t>.pkt fájlok  •  Konfigurációk  •  Dokumentációk  •  Tesztek  •  Prezentáció</a:t>
+            </a:r>
+            <a:endParaRPr lang="en-US" sz="1000" dirty="0"/>
+          </a:p>
+        </p:txBody>
+      </p:sp>
+      <p:pic>
+        <p:nvPicPr>
+          <p:cNvPr id="24" name="Kép 23">
+            <a:extLst>
+              <a:ext uri="{FF2B5EF4-FFF2-40B4-BE49-F238E27FC236}">
+                <a16:creationId xmlns:a16="http://schemas.microsoft.com/office/drawing/2014/main" id="{1E2F977F-8D01-4067-8E0E-F7CD11448BFD}"/>
+              </a:ext>
+            </a:extLst>
+          </p:cNvPr>
+          <p:cNvPicPr>
+            <a:picLocks noChangeAspect="1"/>
+          </p:cNvPicPr>
+          <p:nvPr/>
+        </p:nvPicPr>
+        <p:blipFill>
+          <a:blip r:embed="rId3"/>
+          <a:stretch>
+            <a:fillRect/>
+          </a:stretch>
+        </p:blipFill>
+        <p:spPr>
+          <a:xfrm>
+            <a:off x="731520" y="1215179"/>
+            <a:ext cx="3132972" cy="2876761"/>
+          </a:xfrm>
+          <a:prstGeom prst="rect">
+            <a:avLst/>
+          </a:prstGeom>
+        </p:spPr>
+      </p:pic>
+    </p:spTree>
+  </p:cSld>
+  <p:clrMapOvr>
+    <a:masterClrMapping/>
+  </p:clrMapOvr>
+</p:sld>
+</file>
+
+<file path=ppt/slides/slide12.xml><?xml version="1.0" encoding="utf-8"?>
+<p:sld xmlns:a="http://schemas.openxmlformats.org/drawingml/2006/main" xmlns:r="http://schemas.openxmlformats.org/officeDocument/2006/relationships" xmlns:p="http://schemas.openxmlformats.org/presentationml/2006/main">
+  <p:cSld name="Slide 7">
+    <p:bg>
+      <p:bgPr>
+        <a:solidFill>
+          <a:srgbClr val="1A1F35"/>
+        </a:solidFill>
+        <a:effectLst/>
+      </p:bgPr>
+    </p:bg>
+    <p:spTree>
+      <p:nvGrpSpPr>
+        <p:cNvPr id="1" name=""/>
+        <p:cNvGrpSpPr/>
+        <p:nvPr/>
+      </p:nvGrpSpPr>
+      <p:grpSpPr>
+        <a:xfrm>
+          <a:off x="0" y="0"/>
+          <a:ext cx="0" cy="0"/>
+          <a:chOff x="0" y="0"/>
+          <a:chExt cx="0" cy="0"/>
+        </a:xfrm>
+      </p:grpSpPr>
+      <p:sp>
+        <p:nvSpPr>
+          <p:cNvPr id="2" name="Shape 0"/>
+          <p:cNvSpPr/>
+          <p:nvPr/>
+        </p:nvSpPr>
+        <p:spPr>
+          <a:xfrm>
+            <a:off x="0" y="0"/>
+            <a:ext cx="9144000" cy="777240"/>
+          </a:xfrm>
+          <a:prstGeom prst="rect">
+            <a:avLst/>
+          </a:prstGeom>
+          <a:solidFill>
+            <a:srgbClr val="2C3566"/>
+          </a:solidFill>
+          <a:ln w="12700">
+            <a:solidFill>
+              <a:srgbClr val="2C3566"/>
+            </a:solidFill>
+            <a:prstDash val="solid"/>
+          </a:ln>
+        </p:spPr>
+      </p:sp>
+      <p:sp>
+        <p:nvSpPr>
+          <p:cNvPr id="3" name="Shape 1"/>
+          <p:cNvSpPr/>
+          <p:nvPr/>
+        </p:nvSpPr>
+        <p:spPr>
+          <a:xfrm>
+            <a:off x="0" y="0"/>
+            <a:ext cx="9144000" cy="64008"/>
+          </a:xfrm>
+          <a:prstGeom prst="rect">
+            <a:avLst/>
+          </a:prstGeom>
+          <a:solidFill>
+            <a:srgbClr val="4F8EF7"/>
+          </a:solidFill>
+          <a:ln w="12700">
+            <a:solidFill>
+              <a:srgbClr val="4F8EF7"/>
+            </a:solidFill>
+            <a:prstDash val="solid"/>
+          </a:ln>
+        </p:spPr>
+      </p:sp>
+      <p:sp>
+        <p:nvSpPr>
+          <p:cNvPr id="4" name="Text 2"/>
+          <p:cNvSpPr/>
+          <p:nvPr/>
+        </p:nvSpPr>
+        <p:spPr>
+          <a:xfrm>
+            <a:off x="365760" y="137160"/>
+            <a:ext cx="8412480" cy="502920"/>
+          </a:xfrm>
+          <a:prstGeom prst="rect">
+            <a:avLst/>
+          </a:prstGeom>
+          <a:noFill/>
+          <a:ln/>
+        </p:spPr>
+        <p:txBody>
+          <a:bodyPr wrap="square" rtlCol="0" anchor="ctr"/>
+          <a:lstStyle/>
+          <a:p>
+            <a:pPr marL="0" indent="0">
+              <a:buNone/>
+            </a:pPr>
+            <a:r>
+              <a:rPr lang="en-US" sz="2000" b="1" dirty="0">
+                <a:solidFill>
+                  <a:srgbClr val="FFFFFF"/>
+                </a:solidFill>
+                <a:latin typeface="Calibri" pitchFamily="34" charset="0"/>
+                <a:ea typeface="Calibri" pitchFamily="34" charset="-122"/>
+                <a:cs typeface="Calibri" pitchFamily="34" charset="-120"/>
+              </a:rPr>
+              <a:t>⚡  SCRUM MÓDSZERTAN</a:t>
+            </a:r>
+            <a:endParaRPr lang="en-US" sz="2000" dirty="0"/>
+          </a:p>
+        </p:txBody>
+      </p:sp>
+      <p:sp>
+        <p:nvSpPr>
+          <p:cNvPr id="5" name="Shape 3"/>
+          <p:cNvSpPr/>
+          <p:nvPr/>
+        </p:nvSpPr>
+        <p:spPr>
+          <a:xfrm>
+            <a:off x="365760" y="960120"/>
+            <a:ext cx="2286000" cy="1097280"/>
+          </a:xfrm>
+          <a:prstGeom prst="rect">
+            <a:avLst/>
+          </a:prstGeom>
+          <a:solidFill>
+            <a:srgbClr val="242A4A"/>
+          </a:solidFill>
+          <a:ln w="12700">
+            <a:solidFill>
+              <a:srgbClr val="4F8EF7"/>
+            </a:solidFill>
+            <a:prstDash val="solid"/>
+          </a:ln>
+        </p:spPr>
+      </p:sp>
+      <p:sp>
+        <p:nvSpPr>
+          <p:cNvPr id="6" name="Text 4"/>
+          <p:cNvSpPr/>
+          <p:nvPr/>
+        </p:nvSpPr>
+        <p:spPr>
+          <a:xfrm>
+            <a:off x="365760" y="1051560"/>
+            <a:ext cx="2286000" cy="640080"/>
+          </a:xfrm>
+          <a:prstGeom prst="rect">
+            <a:avLst/>
+          </a:prstGeom>
+          <a:noFill/>
+          <a:ln/>
+        </p:spPr>
+        <p:txBody>
+          <a:bodyPr wrap="square" rtlCol="0" anchor="ctr"/>
+          <a:lstStyle/>
+          <a:p>
+            <a:pPr marL="0" indent="0" algn="ctr">
+              <a:buNone/>
+            </a:pPr>
+            <a:r>
+              <a:rPr lang="en-US" sz="4800" b="1" dirty="0">
+                <a:solidFill>
+                  <a:srgbClr val="4F8EF7"/>
+                </a:solidFill>
+                <a:latin typeface="Calibri" pitchFamily="34" charset="0"/>
+                <a:ea typeface="Calibri" pitchFamily="34" charset="-122"/>
+                <a:cs typeface="Calibri" pitchFamily="34" charset="-120"/>
+              </a:rPr>
+              <a:t>8</a:t>
+            </a:r>
+            <a:endParaRPr lang="en-US" sz="4800" dirty="0"/>
+          </a:p>
+        </p:txBody>
+      </p:sp>
+      <p:sp>
+        <p:nvSpPr>
+          <p:cNvPr id="7" name="Text 5"/>
+          <p:cNvSpPr/>
+          <p:nvPr/>
+        </p:nvSpPr>
+        <p:spPr>
+          <a:xfrm>
+            <a:off x="365760" y="1645920"/>
+            <a:ext cx="2286000" cy="274320"/>
+          </a:xfrm>
+          <a:prstGeom prst="rect">
+            <a:avLst/>
+          </a:prstGeom>
+          <a:noFill/>
+          <a:ln/>
+        </p:spPr>
+        <p:txBody>
+          <a:bodyPr wrap="square" rtlCol="0" anchor="ctr"/>
+          <a:lstStyle/>
+          <a:p>
+            <a:pPr marL="0" indent="0" algn="ctr">
+              <a:buNone/>
+            </a:pPr>
+            <a:r>
+              <a:rPr lang="en-US" sz="1100" b="1" dirty="0">
+                <a:solidFill>
+                  <a:srgbClr val="FFFFFF"/>
+                </a:solidFill>
+                <a:latin typeface="Calibri" pitchFamily="34" charset="0"/>
+                <a:ea typeface="Calibri" pitchFamily="34" charset="-122"/>
+                <a:cs typeface="Calibri" pitchFamily="34" charset="-120"/>
+              </a:rPr>
+              <a:t>Sprint összesen</a:t>
+            </a:r>
+            <a:endParaRPr lang="en-US" sz="1100" dirty="0"/>
+          </a:p>
+        </p:txBody>
+      </p:sp>
+      <p:sp>
+        <p:nvSpPr>
+          <p:cNvPr id="8" name="Shape 6"/>
+          <p:cNvSpPr/>
+          <p:nvPr/>
+        </p:nvSpPr>
+        <p:spPr>
+          <a:xfrm>
+            <a:off x="365760" y="2194560"/>
+            <a:ext cx="2286000" cy="1097280"/>
+          </a:xfrm>
+          <a:prstGeom prst="rect">
+            <a:avLst/>
+          </a:prstGeom>
+          <a:solidFill>
+            <a:srgbClr val="242A4A"/>
+          </a:solidFill>
+          <a:ln w="12700">
+            <a:solidFill>
+              <a:srgbClr val="4F8EF7"/>
+            </a:solidFill>
+            <a:prstDash val="solid"/>
+          </a:ln>
+        </p:spPr>
+      </p:sp>
+      <p:sp>
+        <p:nvSpPr>
+          <p:cNvPr id="9" name="Text 7"/>
+          <p:cNvSpPr/>
+          <p:nvPr/>
+        </p:nvSpPr>
+        <p:spPr>
+          <a:xfrm>
+            <a:off x="365760" y="2286000"/>
+            <a:ext cx="2286000" cy="640080"/>
+          </a:xfrm>
+          <a:prstGeom prst="rect">
+            <a:avLst/>
+          </a:prstGeom>
+          <a:noFill/>
+          <a:ln/>
+        </p:spPr>
+        <p:txBody>
+          <a:bodyPr wrap="square" rtlCol="0" anchor="ctr"/>
+          <a:lstStyle/>
+          <a:p>
+            <a:pPr marL="0" indent="0" algn="ctr">
+              <a:buNone/>
+            </a:pPr>
+            <a:r>
+              <a:rPr lang="en-US" sz="4800" b="1" dirty="0">
+                <a:solidFill>
+                  <a:srgbClr val="4F8EF7"/>
+                </a:solidFill>
+                <a:latin typeface="Calibri" pitchFamily="34" charset="0"/>
+                <a:ea typeface="Calibri" pitchFamily="34" charset="-122"/>
+                <a:cs typeface="Calibri" pitchFamily="34" charset="-120"/>
+              </a:rPr>
+              <a:t>1</a:t>
+            </a:r>
+            <a:endParaRPr lang="en-US" sz="4800" dirty="0"/>
+          </a:p>
+        </p:txBody>
+      </p:sp>
+      <p:sp>
+        <p:nvSpPr>
+          <p:cNvPr id="10" name="Text 8"/>
+          <p:cNvSpPr/>
+          <p:nvPr/>
+        </p:nvSpPr>
+        <p:spPr>
+          <a:xfrm>
+            <a:off x="365760" y="2880360"/>
+            <a:ext cx="2286000" cy="274320"/>
+          </a:xfrm>
+          <a:prstGeom prst="rect">
+            <a:avLst/>
+          </a:prstGeom>
+          <a:noFill/>
+          <a:ln/>
+        </p:spPr>
+        <p:txBody>
+          <a:bodyPr wrap="square" rtlCol="0" anchor="ctr"/>
+          <a:lstStyle/>
+          <a:p>
+            <a:pPr marL="0" indent="0" algn="ctr">
+              <a:buNone/>
+            </a:pPr>
+            <a:r>
+              <a:rPr lang="hu-HU" sz="1100" b="1" dirty="0">
+                <a:solidFill>
+                  <a:srgbClr val="FFFFFF"/>
+                </a:solidFill>
+                <a:latin typeface="Calibri" pitchFamily="34" charset="0"/>
+                <a:ea typeface="Calibri" pitchFamily="34" charset="-122"/>
+                <a:cs typeface="Calibri" pitchFamily="34" charset="-120"/>
+              </a:rPr>
+              <a:t>Havi</a:t>
+            </a:r>
+            <a:r>
+              <a:rPr lang="en-US" sz="1100" b="1" dirty="0">
+                <a:solidFill>
+                  <a:srgbClr val="FFFFFF"/>
+                </a:solidFill>
+                <a:latin typeface="Calibri" pitchFamily="34" charset="0"/>
+                <a:ea typeface="Calibri" pitchFamily="34" charset="-122"/>
+                <a:cs typeface="Calibri" pitchFamily="34" charset="-120"/>
+              </a:rPr>
+              <a:t> sprintek</a:t>
+            </a:r>
+            <a:endParaRPr lang="en-US" sz="1100" dirty="0"/>
+          </a:p>
+        </p:txBody>
+      </p:sp>
+      <p:sp>
+        <p:nvSpPr>
+          <p:cNvPr id="11" name="Shape 9"/>
+          <p:cNvSpPr/>
+          <p:nvPr/>
+        </p:nvSpPr>
+        <p:spPr>
+          <a:xfrm>
+            <a:off x="365760" y="3429000"/>
+            <a:ext cx="2286000" cy="1097280"/>
+          </a:xfrm>
+          <a:prstGeom prst="rect">
+            <a:avLst/>
+          </a:prstGeom>
+          <a:solidFill>
+            <a:srgbClr val="242A4A"/>
+          </a:solidFill>
+          <a:ln w="12700">
+            <a:solidFill>
+              <a:srgbClr val="4F8EF7"/>
+            </a:solidFill>
+            <a:prstDash val="solid"/>
+          </a:ln>
+        </p:spPr>
+      </p:sp>
+      <p:sp>
+        <p:nvSpPr>
+          <p:cNvPr id="12" name="Text 10"/>
+          <p:cNvSpPr/>
+          <p:nvPr/>
+        </p:nvSpPr>
+        <p:spPr>
+          <a:xfrm>
+            <a:off x="365760" y="3520440"/>
+            <a:ext cx="2286000" cy="640080"/>
+          </a:xfrm>
+          <a:prstGeom prst="rect">
+            <a:avLst/>
+          </a:prstGeom>
+          <a:noFill/>
+          <a:ln/>
+        </p:spPr>
+        <p:txBody>
+          <a:bodyPr wrap="square" rtlCol="0" anchor="ctr"/>
+          <a:lstStyle/>
+          <a:p>
+            <a:pPr marL="0" indent="0" algn="ctr">
+              <a:buNone/>
+            </a:pPr>
+            <a:r>
+              <a:rPr lang="en-US" sz="4800" b="1" dirty="0">
+                <a:solidFill>
+                  <a:srgbClr val="4F8EF7"/>
+                </a:solidFill>
+                <a:latin typeface="Calibri" pitchFamily="34" charset="0"/>
+                <a:ea typeface="Calibri" pitchFamily="34" charset="-122"/>
+                <a:cs typeface="Calibri" pitchFamily="34" charset="-120"/>
+              </a:rPr>
+              <a:t>15'</a:t>
+            </a:r>
+            <a:endParaRPr lang="en-US" sz="4800" dirty="0"/>
+          </a:p>
+        </p:txBody>
+      </p:sp>
+      <p:sp>
+        <p:nvSpPr>
+          <p:cNvPr id="13" name="Text 11"/>
+          <p:cNvSpPr/>
+          <p:nvPr/>
+        </p:nvSpPr>
+        <p:spPr>
+          <a:xfrm>
+            <a:off x="365760" y="4114800"/>
+            <a:ext cx="2286000" cy="274320"/>
+          </a:xfrm>
+          <a:prstGeom prst="rect">
+            <a:avLst/>
+          </a:prstGeom>
+          <a:noFill/>
+          <a:ln/>
+        </p:spPr>
+        <p:txBody>
+          <a:bodyPr wrap="square" rtlCol="0" anchor="ctr"/>
+          <a:lstStyle/>
+          <a:p>
+            <a:pPr marL="0" indent="0" algn="ctr">
+              <a:buNone/>
+            </a:pPr>
+            <a:r>
+              <a:rPr lang="en-US" sz="1100" b="1" dirty="0" err="1">
+                <a:solidFill>
+                  <a:srgbClr val="FFFFFF"/>
+                </a:solidFill>
+                <a:latin typeface="Calibri" pitchFamily="34" charset="0"/>
+                <a:ea typeface="Calibri" pitchFamily="34" charset="-122"/>
+                <a:cs typeface="Calibri" pitchFamily="34" charset="-120"/>
+              </a:rPr>
+              <a:t>Napi</a:t>
+            </a:r>
+            <a:r>
+              <a:rPr lang="en-US" sz="1100" b="1" dirty="0">
+                <a:solidFill>
+                  <a:srgbClr val="FFFFFF"/>
+                </a:solidFill>
+                <a:latin typeface="Calibri" pitchFamily="34" charset="0"/>
+                <a:ea typeface="Calibri" pitchFamily="34" charset="-122"/>
+                <a:cs typeface="Calibri" pitchFamily="34" charset="-120"/>
+              </a:rPr>
+              <a:t> </a:t>
+            </a:r>
+            <a:r>
+              <a:rPr lang="hu-HU" sz="1100" b="1" dirty="0">
+                <a:solidFill>
+                  <a:srgbClr val="FFFFFF"/>
+                </a:solidFill>
+                <a:latin typeface="Calibri" pitchFamily="34" charset="0"/>
+                <a:ea typeface="Calibri" pitchFamily="34" charset="-122"/>
+                <a:cs typeface="Calibri" pitchFamily="34" charset="-120"/>
+              </a:rPr>
+              <a:t>megbeszélés</a:t>
+            </a:r>
+            <a:endParaRPr lang="en-US" sz="1100" dirty="0"/>
+          </a:p>
+        </p:txBody>
+      </p:sp>
+      <p:sp>
+        <p:nvSpPr>
+          <p:cNvPr id="14" name="Shape 12"/>
+          <p:cNvSpPr/>
+          <p:nvPr/>
+        </p:nvSpPr>
+        <p:spPr>
+          <a:xfrm>
+            <a:off x="2926080" y="960120"/>
+            <a:ext cx="5852160" cy="777240"/>
+          </a:xfrm>
+          <a:prstGeom prst="rect">
+            <a:avLst/>
+          </a:prstGeom>
+          <a:solidFill>
+            <a:srgbClr val="242A4A"/>
+          </a:solidFill>
+          <a:ln w="12700">
+            <a:solidFill>
+              <a:srgbClr val="2C3566"/>
+            </a:solidFill>
+            <a:prstDash val="solid"/>
+          </a:ln>
+        </p:spPr>
+      </p:sp>
+      <p:sp>
+        <p:nvSpPr>
+          <p:cNvPr id="15" name="Shape 13"/>
+          <p:cNvSpPr/>
+          <p:nvPr/>
+        </p:nvSpPr>
+        <p:spPr>
+          <a:xfrm>
+            <a:off x="2926080" y="960120"/>
+            <a:ext cx="73152" cy="777240"/>
+          </a:xfrm>
+          <a:prstGeom prst="rect">
+            <a:avLst/>
+          </a:prstGeom>
+          <a:solidFill>
+            <a:srgbClr val="4F8EF7"/>
+          </a:solidFill>
+          <a:ln w="12700">
+            <a:solidFill>
+              <a:srgbClr val="4F8EF7"/>
+            </a:solidFill>
+            <a:prstDash val="solid"/>
+          </a:ln>
+        </p:spPr>
+      </p:sp>
+      <p:sp>
+        <p:nvSpPr>
+          <p:cNvPr id="16" name="Text 14"/>
+          <p:cNvSpPr/>
+          <p:nvPr/>
+        </p:nvSpPr>
+        <p:spPr>
+          <a:xfrm>
+            <a:off x="3108960" y="1033272"/>
+            <a:ext cx="2743200" cy="320040"/>
+          </a:xfrm>
+          <a:prstGeom prst="rect">
+            <a:avLst/>
+          </a:prstGeom>
+          <a:noFill/>
+          <a:ln/>
+        </p:spPr>
+        <p:txBody>
+          <a:bodyPr wrap="square" rtlCol="0" anchor="ctr"/>
+          <a:lstStyle/>
+          <a:p>
+            <a:pPr marL="0" indent="0">
+              <a:buNone/>
+            </a:pPr>
+            <a:r>
+              <a:rPr lang="en-US" sz="1300" b="1" dirty="0">
+                <a:solidFill>
+                  <a:srgbClr val="FFFFFF"/>
+                </a:solidFill>
+                <a:latin typeface="Calibri" pitchFamily="34" charset="0"/>
+                <a:ea typeface="Calibri" pitchFamily="34" charset="-122"/>
+                <a:cs typeface="Calibri" pitchFamily="34" charset="-120"/>
+              </a:rPr>
+              <a:t>📋  Sprint Planning</a:t>
+            </a:r>
+            <a:endParaRPr lang="en-US" sz="1300" dirty="0"/>
+          </a:p>
+        </p:txBody>
+      </p:sp>
+      <p:sp>
+        <p:nvSpPr>
+          <p:cNvPr id="17" name="Text 15"/>
+          <p:cNvSpPr/>
+          <p:nvPr/>
+        </p:nvSpPr>
+        <p:spPr>
+          <a:xfrm>
+            <a:off x="3108960" y="1362456"/>
+            <a:ext cx="5486400" cy="292608"/>
+          </a:xfrm>
+          <a:prstGeom prst="rect">
+            <a:avLst/>
+          </a:prstGeom>
+          <a:noFill/>
+          <a:ln/>
+        </p:spPr>
+        <p:txBody>
+          <a:bodyPr wrap="square" rtlCol="0" anchor="ctr"/>
+          <a:lstStyle/>
+          <a:p>
+            <a:pPr marL="0" indent="0">
+              <a:buNone/>
+            </a:pPr>
+            <a:r>
+              <a:rPr lang="en-US" sz="1100" dirty="0">
+                <a:solidFill>
+                  <a:srgbClr val="C8D4F0"/>
+                </a:solidFill>
+                <a:latin typeface="Calibri" pitchFamily="34" charset="0"/>
+                <a:ea typeface="Calibri" pitchFamily="34" charset="-122"/>
+                <a:cs typeface="Calibri" pitchFamily="34" charset="-120"/>
+              </a:rPr>
+              <a:t>Heti feladatok megtervezése</a:t>
+            </a:r>
+            <a:endParaRPr lang="en-US" sz="1100" dirty="0"/>
+          </a:p>
+        </p:txBody>
+      </p:sp>
+      <p:sp>
+        <p:nvSpPr>
+          <p:cNvPr id="18" name="Shape 16"/>
+          <p:cNvSpPr/>
+          <p:nvPr/>
+        </p:nvSpPr>
+        <p:spPr>
+          <a:xfrm>
+            <a:off x="2926080" y="1874520"/>
+            <a:ext cx="5852160" cy="777240"/>
+          </a:xfrm>
+          <a:prstGeom prst="rect">
+            <a:avLst/>
+          </a:prstGeom>
+          <a:solidFill>
+            <a:srgbClr val="242A4A"/>
+          </a:solidFill>
+          <a:ln w="12700">
+            <a:solidFill>
+              <a:srgbClr val="2C3566"/>
+            </a:solidFill>
+            <a:prstDash val="solid"/>
+          </a:ln>
+        </p:spPr>
+      </p:sp>
+      <p:sp>
+        <p:nvSpPr>
+          <p:cNvPr id="19" name="Shape 17"/>
+          <p:cNvSpPr/>
+          <p:nvPr/>
+        </p:nvSpPr>
+        <p:spPr>
+          <a:xfrm>
+            <a:off x="2926080" y="1874520"/>
+            <a:ext cx="73152" cy="777240"/>
+          </a:xfrm>
+          <a:prstGeom prst="rect">
+            <a:avLst/>
+          </a:prstGeom>
+          <a:solidFill>
+            <a:srgbClr val="4F8EF7"/>
+          </a:solidFill>
+          <a:ln w="12700">
+            <a:solidFill>
+              <a:srgbClr val="4F8EF7"/>
+            </a:solidFill>
+            <a:prstDash val="solid"/>
+          </a:ln>
+        </p:spPr>
+      </p:sp>
+      <p:sp>
+        <p:nvSpPr>
+          <p:cNvPr id="20" name="Text 18"/>
+          <p:cNvSpPr/>
+          <p:nvPr/>
+        </p:nvSpPr>
+        <p:spPr>
+          <a:xfrm>
+            <a:off x="3108960" y="1947672"/>
+            <a:ext cx="2743200" cy="320040"/>
+          </a:xfrm>
+          <a:prstGeom prst="rect">
+            <a:avLst/>
+          </a:prstGeom>
+          <a:noFill/>
+          <a:ln/>
+        </p:spPr>
+        <p:txBody>
+          <a:bodyPr wrap="square" rtlCol="0" anchor="ctr"/>
+          <a:lstStyle/>
+          <a:p>
+            <a:pPr marL="0" indent="0">
+              <a:buNone/>
+            </a:pPr>
+            <a:r>
+              <a:rPr lang="en-US" sz="1300" b="1" dirty="0">
+                <a:solidFill>
+                  <a:srgbClr val="FFFFFF"/>
+                </a:solidFill>
+                <a:latin typeface="Calibri" pitchFamily="34" charset="0"/>
+                <a:ea typeface="Calibri" pitchFamily="34" charset="-122"/>
+                <a:cs typeface="Calibri" pitchFamily="34" charset="-120"/>
+              </a:rPr>
+              <a:t>💬  Daily Stand-up</a:t>
+            </a:r>
+            <a:endParaRPr lang="en-US" sz="1300" dirty="0"/>
+          </a:p>
+        </p:txBody>
+      </p:sp>
+      <p:sp>
+        <p:nvSpPr>
+          <p:cNvPr id="21" name="Text 19"/>
+          <p:cNvSpPr/>
+          <p:nvPr/>
+        </p:nvSpPr>
+        <p:spPr>
+          <a:xfrm>
+            <a:off x="3108960" y="2276856"/>
+            <a:ext cx="5486400" cy="292608"/>
+          </a:xfrm>
+          <a:prstGeom prst="rect">
+            <a:avLst/>
+          </a:prstGeom>
+          <a:noFill/>
+          <a:ln/>
+        </p:spPr>
+        <p:txBody>
+          <a:bodyPr wrap="square" rtlCol="0" anchor="ctr"/>
+          <a:lstStyle/>
+          <a:p>
+            <a:pPr marL="0" indent="0">
+              <a:buNone/>
+            </a:pPr>
+            <a:r>
+              <a:rPr lang="en-US" sz="1100" dirty="0">
+                <a:solidFill>
+                  <a:srgbClr val="C8D4F0"/>
+                </a:solidFill>
+                <a:latin typeface="Calibri" pitchFamily="34" charset="0"/>
+                <a:ea typeface="Calibri" pitchFamily="34" charset="-122"/>
+                <a:cs typeface="Calibri" pitchFamily="34" charset="-120"/>
+              </a:rPr>
+              <a:t>Napi 15 perces egyeztetés Discordon</a:t>
+            </a:r>
+            <a:endParaRPr lang="en-US" sz="1100" dirty="0"/>
+          </a:p>
+        </p:txBody>
+      </p:sp>
+      <p:sp>
+        <p:nvSpPr>
+          <p:cNvPr id="22" name="Shape 20"/>
+          <p:cNvSpPr/>
+          <p:nvPr/>
+        </p:nvSpPr>
+        <p:spPr>
+          <a:xfrm>
+            <a:off x="2926080" y="2788920"/>
+            <a:ext cx="5852160" cy="777240"/>
+          </a:xfrm>
+          <a:prstGeom prst="rect">
+            <a:avLst/>
+          </a:prstGeom>
+          <a:solidFill>
+            <a:srgbClr val="242A4A"/>
+          </a:solidFill>
+          <a:ln w="12700">
+            <a:solidFill>
+              <a:srgbClr val="2C3566"/>
+            </a:solidFill>
+            <a:prstDash val="solid"/>
+          </a:ln>
+        </p:spPr>
+      </p:sp>
+      <p:sp>
+        <p:nvSpPr>
+          <p:cNvPr id="23" name="Shape 21"/>
+          <p:cNvSpPr/>
+          <p:nvPr/>
+        </p:nvSpPr>
+        <p:spPr>
+          <a:xfrm>
+            <a:off x="2926080" y="2788920"/>
+            <a:ext cx="73152" cy="777240"/>
+          </a:xfrm>
+          <a:prstGeom prst="rect">
+            <a:avLst/>
+          </a:prstGeom>
+          <a:solidFill>
+            <a:srgbClr val="4F8EF7"/>
+          </a:solidFill>
+          <a:ln w="12700">
+            <a:solidFill>
+              <a:srgbClr val="4F8EF7"/>
+            </a:solidFill>
+            <a:prstDash val="solid"/>
+          </a:ln>
+        </p:spPr>
+      </p:sp>
+      <p:sp>
+        <p:nvSpPr>
+          <p:cNvPr id="24" name="Text 22"/>
+          <p:cNvSpPr/>
+          <p:nvPr/>
+        </p:nvSpPr>
+        <p:spPr>
+          <a:xfrm>
+            <a:off x="3108960" y="2862072"/>
+            <a:ext cx="2743200" cy="320040"/>
+          </a:xfrm>
+          <a:prstGeom prst="rect">
+            <a:avLst/>
+          </a:prstGeom>
+          <a:noFill/>
+          <a:ln/>
+        </p:spPr>
+        <p:txBody>
+          <a:bodyPr wrap="square" rtlCol="0" anchor="ctr"/>
+          <a:lstStyle/>
+          <a:p>
+            <a:pPr marL="0" indent="0">
+              <a:buNone/>
+            </a:pPr>
+            <a:r>
+              <a:rPr lang="en-US" sz="1300" b="1" dirty="0">
+                <a:solidFill>
+                  <a:srgbClr val="FFFFFF"/>
+                </a:solidFill>
+                <a:latin typeface="Calibri" pitchFamily="34" charset="0"/>
+                <a:ea typeface="Calibri" pitchFamily="34" charset="-122"/>
+                <a:cs typeface="Calibri" pitchFamily="34" charset="-120"/>
+              </a:rPr>
+              <a:t>✅  Sprint Review</a:t>
+            </a:r>
+            <a:endParaRPr lang="en-US" sz="1300" dirty="0"/>
+          </a:p>
+        </p:txBody>
+      </p:sp>
+      <p:sp>
+        <p:nvSpPr>
+          <p:cNvPr id="25" name="Text 23"/>
+          <p:cNvSpPr/>
+          <p:nvPr/>
+        </p:nvSpPr>
+        <p:spPr>
+          <a:xfrm>
+            <a:off x="3108960" y="3191256"/>
+            <a:ext cx="5486400" cy="292608"/>
+          </a:xfrm>
+          <a:prstGeom prst="rect">
+            <a:avLst/>
+          </a:prstGeom>
+          <a:noFill/>
+          <a:ln/>
+        </p:spPr>
+        <p:txBody>
+          <a:bodyPr wrap="square" rtlCol="0" anchor="ctr"/>
+          <a:lstStyle/>
+          <a:p>
+            <a:pPr marL="0" indent="0">
+              <a:buNone/>
+            </a:pPr>
+            <a:r>
+              <a:rPr lang="en-US" sz="1100" dirty="0">
+                <a:solidFill>
+                  <a:srgbClr val="C8D4F0"/>
+                </a:solidFill>
+                <a:latin typeface="Calibri" pitchFamily="34" charset="0"/>
+                <a:ea typeface="Calibri" pitchFamily="34" charset="-122"/>
+                <a:cs typeface="Calibri" pitchFamily="34" charset="-120"/>
+              </a:rPr>
+              <a:t>Heti eredmények bemutatása</a:t>
+            </a:r>
+            <a:endParaRPr lang="en-US" sz="1100" dirty="0"/>
+          </a:p>
+        </p:txBody>
+      </p:sp>
+      <p:sp>
+        <p:nvSpPr>
+          <p:cNvPr id="26" name="Shape 24"/>
+          <p:cNvSpPr/>
+          <p:nvPr/>
+        </p:nvSpPr>
+        <p:spPr>
+          <a:xfrm>
+            <a:off x="2926080" y="3703320"/>
+            <a:ext cx="5852160" cy="777240"/>
+          </a:xfrm>
+          <a:prstGeom prst="rect">
+            <a:avLst/>
+          </a:prstGeom>
+          <a:solidFill>
+            <a:srgbClr val="242A4A"/>
+          </a:solidFill>
+          <a:ln w="12700">
+            <a:solidFill>
+              <a:srgbClr val="2C3566"/>
+            </a:solidFill>
+            <a:prstDash val="solid"/>
+          </a:ln>
+        </p:spPr>
+      </p:sp>
+      <p:sp>
+        <p:nvSpPr>
+          <p:cNvPr id="27" name="Shape 25"/>
+          <p:cNvSpPr/>
+          <p:nvPr/>
+        </p:nvSpPr>
+        <p:spPr>
+          <a:xfrm>
+            <a:off x="2926080" y="3703320"/>
+            <a:ext cx="73152" cy="777240"/>
+          </a:xfrm>
+          <a:prstGeom prst="rect">
+            <a:avLst/>
+          </a:prstGeom>
+          <a:solidFill>
+            <a:srgbClr val="4F8EF7"/>
+          </a:solidFill>
+          <a:ln w="12700">
+            <a:solidFill>
+              <a:srgbClr val="4F8EF7"/>
+            </a:solidFill>
+            <a:prstDash val="solid"/>
+          </a:ln>
+        </p:spPr>
+      </p:sp>
+      <p:sp>
+        <p:nvSpPr>
+          <p:cNvPr id="28" name="Text 26"/>
+          <p:cNvSpPr/>
+          <p:nvPr/>
+        </p:nvSpPr>
+        <p:spPr>
+          <a:xfrm>
+            <a:off x="3108960" y="3776472"/>
+            <a:ext cx="2743200" cy="320040"/>
+          </a:xfrm>
+          <a:prstGeom prst="rect">
+            <a:avLst/>
+          </a:prstGeom>
+          <a:noFill/>
+          <a:ln/>
+        </p:spPr>
+        <p:txBody>
+          <a:bodyPr wrap="square" rtlCol="0" anchor="ctr"/>
+          <a:lstStyle/>
+          <a:p>
+            <a:pPr marL="0" indent="0">
+              <a:buNone/>
+            </a:pPr>
+            <a:r>
+              <a:rPr lang="en-US" sz="1300" b="1" dirty="0">
+                <a:solidFill>
+                  <a:srgbClr val="FFFFFF"/>
+                </a:solidFill>
+                <a:latin typeface="Calibri" pitchFamily="34" charset="0"/>
+                <a:ea typeface="Calibri" pitchFamily="34" charset="-122"/>
+                <a:cs typeface="Calibri" pitchFamily="34" charset="-120"/>
+              </a:rPr>
+              <a:t>🔄  Retrospective</a:t>
+            </a:r>
+            <a:endParaRPr lang="en-US" sz="1300" dirty="0"/>
+          </a:p>
+        </p:txBody>
+      </p:sp>
+      <p:sp>
+        <p:nvSpPr>
+          <p:cNvPr id="29" name="Text 27"/>
+          <p:cNvSpPr/>
+          <p:nvPr/>
+        </p:nvSpPr>
+        <p:spPr>
+          <a:xfrm>
+            <a:off x="3108960" y="4105656"/>
+            <a:ext cx="5486400" cy="292608"/>
+          </a:xfrm>
+          <a:prstGeom prst="rect">
+            <a:avLst/>
+          </a:prstGeom>
+          <a:noFill/>
+          <a:ln/>
+        </p:spPr>
+        <p:txBody>
+          <a:bodyPr wrap="square" rtlCol="0" anchor="ctr"/>
+          <a:lstStyle/>
+          <a:p>
+            <a:pPr marL="0" indent="0">
+              <a:buNone/>
+            </a:pPr>
+            <a:r>
+              <a:rPr lang="en-US" sz="1100" dirty="0">
+                <a:solidFill>
+                  <a:srgbClr val="C8D4F0"/>
+                </a:solidFill>
+                <a:latin typeface="Calibri" pitchFamily="34" charset="0"/>
+                <a:ea typeface="Calibri" pitchFamily="34" charset="-122"/>
+                <a:cs typeface="Calibri" pitchFamily="34" charset="-120"/>
+              </a:rPr>
+              <a:t>Mit csináltunk jól? Mit javítsunk?</a:t>
+            </a:r>
+            <a:endParaRPr lang="en-US" sz="1100" dirty="0"/>
+          </a:p>
+        </p:txBody>
+      </p:sp>
+      <p:sp>
+        <p:nvSpPr>
+          <p:cNvPr id="31" name="Text 29"/>
+          <p:cNvSpPr/>
+          <p:nvPr/>
+        </p:nvSpPr>
+        <p:spPr>
+          <a:xfrm>
+            <a:off x="3108960" y="4690872"/>
+            <a:ext cx="5486400" cy="320040"/>
+          </a:xfrm>
+          <a:prstGeom prst="rect">
+            <a:avLst/>
+          </a:prstGeom>
+          <a:noFill/>
+          <a:ln/>
+        </p:spPr>
+        <p:txBody>
+          <a:bodyPr wrap="square" rtlCol="0" anchor="ctr"/>
+          <a:lstStyle/>
+          <a:p>
+            <a:pPr marL="0" indent="0">
+              <a:buNone/>
+            </a:pPr>
+            <a:endParaRPr lang="en-US" sz="1100" dirty="0"/>
+          </a:p>
+        </p:txBody>
+      </p:sp>
+    </p:spTree>
+  </p:cSld>
+  <p:clrMapOvr>
+    <a:masterClrMapping/>
+  </p:clrMapOvr>
+</p:sld>
+</file>
+
+<file path=ppt/slides/slide13.xml><?xml version="1.0" encoding="utf-8"?>
+<p:sld xmlns:a="http://schemas.openxmlformats.org/drawingml/2006/main" xmlns:r="http://schemas.openxmlformats.org/officeDocument/2006/relationships" xmlns:p="http://schemas.openxmlformats.org/presentationml/2006/main">
   <p:cSld name="Slide 10">
     <p:bg>
       <p:bgPr>
@@ -2080,7 +5075,7 @@
               <a:buNone/>
             </a:pPr>
             <a:r>
-              <a:rPr lang="en-US" sz="6400" b="1" dirty="0">
+              <a:rPr lang="hu-HU" sz="6400" b="1" dirty="0">
                 <a:solidFill>
                   <a:srgbClr val="22C55E"/>
                 </a:solidFill>
@@ -2088,7 +5083,7 @@
                 <a:ea typeface="Calibri" pitchFamily="34" charset="-122"/>
                 <a:cs typeface="Calibri" pitchFamily="34" charset="-120"/>
               </a:rPr>
-              <a:t>54</a:t>
+              <a:t>100</a:t>
             </a:r>
             <a:endParaRPr lang="en-US" sz="6400" dirty="0"/>
           </a:p>
@@ -2158,6 +5153,17 @@
               <a:buNone/>
             </a:pPr>
             <a:r>
+              <a:rPr lang="hu-HU" b="1" dirty="0">
+                <a:solidFill>
+                  <a:srgbClr val="22C55E"/>
+                </a:solidFill>
+                <a:latin typeface="Calibri" pitchFamily="34" charset="0"/>
+                <a:ea typeface="Calibri" pitchFamily="34" charset="-122"/>
+                <a:cs typeface="Calibri" pitchFamily="34" charset="-120"/>
+              </a:rPr>
+              <a:t>88</a:t>
+            </a:r>
+            <a:r>
               <a:rPr lang="en-US" sz="1800" b="1" dirty="0">
                 <a:solidFill>
                   <a:srgbClr val="22C55E"/>
@@ -2166,7 +5172,7 @@
                 <a:ea typeface="Calibri" pitchFamily="34" charset="-122"/>
                 <a:cs typeface="Calibri" pitchFamily="34" charset="-120"/>
               </a:rPr>
-              <a:t>100%  ✅</a:t>
+              <a:t>%  ✅</a:t>
             </a:r>
             <a:endParaRPr lang="en-US" sz="1800" dirty="0"/>
           </a:p>
@@ -2578,7 +5584,40 @@
                 <a:ea typeface="Calibri" pitchFamily="34" charset="-122"/>
                 <a:cs typeface="Calibri" pitchFamily="34" charset="-120"/>
               </a:rPr>
-              <a:t>ACL szabályok, tűzfal</a:t>
+              <a:t>ACL szabályok, </a:t>
+            </a:r>
+            <a:r>
+              <a:rPr lang="en-US" sz="1000" dirty="0" err="1">
+                <a:solidFill>
+                  <a:srgbClr val="C8D4F0"/>
+                </a:solidFill>
+                <a:latin typeface="Calibri" pitchFamily="34" charset="0"/>
+                <a:ea typeface="Calibri" pitchFamily="34" charset="-122"/>
+                <a:cs typeface="Calibri" pitchFamily="34" charset="-120"/>
+              </a:rPr>
+              <a:t>tűzfal</a:t>
+            </a:r>
+            <a:r>
+              <a:rPr lang="hu-HU" sz="1000" dirty="0">
+                <a:solidFill>
+                  <a:srgbClr val="C8D4F0"/>
+                </a:solidFill>
+                <a:latin typeface="Calibri" pitchFamily="34" charset="0"/>
+                <a:ea typeface="Calibri" pitchFamily="34" charset="-122"/>
+                <a:cs typeface="Calibri" pitchFamily="34" charset="-120"/>
+              </a:rPr>
+              <a:t>, ipv6, </a:t>
+            </a:r>
+            <a:r>
+              <a:rPr lang="hu-HU" sz="1000" dirty="0" err="1">
+                <a:solidFill>
+                  <a:srgbClr val="C8D4F0"/>
+                </a:solidFill>
+                <a:latin typeface="Calibri" pitchFamily="34" charset="0"/>
+                <a:ea typeface="Calibri" pitchFamily="34" charset="-122"/>
+                <a:cs typeface="Calibri" pitchFamily="34" charset="-120"/>
+              </a:rPr>
+              <a:t>vlan</a:t>
             </a:r>
             <a:endParaRPr lang="en-US" sz="1000" dirty="0"/>
           </a:p>
@@ -2815,1011 +5854,7 @@
 </p:sld>
 </file>
 
-<file path=ppt/slides/slide11.xml><?xml version="1.0" encoding="utf-8"?>
-<p:sld xmlns:a="http://schemas.openxmlformats.org/drawingml/2006/main" xmlns:r="http://schemas.openxmlformats.org/officeDocument/2006/relationships" xmlns:p="http://schemas.openxmlformats.org/presentationml/2006/main">
-  <p:cSld name="Slide 11">
-    <p:bg>
-      <p:bgPr>
-        <a:solidFill>
-          <a:srgbClr val="1A1F35"/>
-        </a:solidFill>
-        <a:effectLst/>
-      </p:bgPr>
-    </p:bg>
-    <p:spTree>
-      <p:nvGrpSpPr>
-        <p:cNvPr id="1" name=""/>
-        <p:cNvGrpSpPr/>
-        <p:nvPr/>
-      </p:nvGrpSpPr>
-      <p:grpSpPr>
-        <a:xfrm>
-          <a:off x="0" y="0"/>
-          <a:ext cx="0" cy="0"/>
-          <a:chOff x="0" y="0"/>
-          <a:chExt cx="0" cy="0"/>
-        </a:xfrm>
-      </p:grpSpPr>
-      <p:sp>
-        <p:nvSpPr>
-          <p:cNvPr id="2" name="Shape 0"/>
-          <p:cNvSpPr/>
-          <p:nvPr/>
-        </p:nvSpPr>
-        <p:spPr>
-          <a:xfrm>
-            <a:off x="0" y="0"/>
-            <a:ext cx="9144000" cy="777240"/>
-          </a:xfrm>
-          <a:prstGeom prst="rect">
-            <a:avLst/>
-          </a:prstGeom>
-          <a:solidFill>
-            <a:srgbClr val="2C3566"/>
-          </a:solidFill>
-          <a:ln w="12700">
-            <a:solidFill>
-              <a:srgbClr val="2C3566"/>
-            </a:solidFill>
-            <a:prstDash val="solid"/>
-          </a:ln>
-        </p:spPr>
-      </p:sp>
-      <p:sp>
-        <p:nvSpPr>
-          <p:cNvPr id="3" name="Shape 1"/>
-          <p:cNvSpPr/>
-          <p:nvPr/>
-        </p:nvSpPr>
-        <p:spPr>
-          <a:xfrm>
-            <a:off x="0" y="0"/>
-            <a:ext cx="9144000" cy="64008"/>
-          </a:xfrm>
-          <a:prstGeom prst="rect">
-            <a:avLst/>
-          </a:prstGeom>
-          <a:solidFill>
-            <a:srgbClr val="4F8EF7"/>
-          </a:solidFill>
-          <a:ln w="12700">
-            <a:solidFill>
-              <a:srgbClr val="4F8EF7"/>
-            </a:solidFill>
-            <a:prstDash val="solid"/>
-          </a:ln>
-        </p:spPr>
-      </p:sp>
-      <p:sp>
-        <p:nvSpPr>
-          <p:cNvPr id="4" name="Text 2"/>
-          <p:cNvSpPr/>
-          <p:nvPr/>
-        </p:nvSpPr>
-        <p:spPr>
-          <a:xfrm>
-            <a:off x="365760" y="137160"/>
-            <a:ext cx="8412480" cy="502920"/>
-          </a:xfrm>
-          <a:prstGeom prst="rect">
-            <a:avLst/>
-          </a:prstGeom>
-          <a:noFill/>
-          <a:ln/>
-        </p:spPr>
-        <p:txBody>
-          <a:bodyPr wrap="square" rtlCol="0" anchor="ctr"/>
-          <a:lstStyle/>
-          <a:p>
-            <a:pPr marL="0" indent="0">
-              <a:buNone/>
-            </a:pPr>
-            <a:r>
-              <a:rPr lang="en-US" sz="2000" b="1" dirty="0">
-                <a:solidFill>
-                  <a:srgbClr val="FFFFFF"/>
-                </a:solidFill>
-                <a:latin typeface="Calibri" pitchFamily="34" charset="0"/>
-                <a:ea typeface="Calibri" pitchFamily="34" charset="-122"/>
-                <a:cs typeface="Calibri" pitchFamily="34" charset="-120"/>
-              </a:rPr>
-              <a:t>📊  PROJEKT STATISZTIKÁK</a:t>
-            </a:r>
-            <a:endParaRPr lang="en-US" sz="2000" dirty="0"/>
-          </a:p>
-        </p:txBody>
-      </p:sp>
-      <p:sp>
-        <p:nvSpPr>
-          <p:cNvPr id="5" name="Text 3"/>
-          <p:cNvSpPr/>
-          <p:nvPr/>
-        </p:nvSpPr>
-        <p:spPr>
-          <a:xfrm>
-            <a:off x="365760" y="914400"/>
-            <a:ext cx="4114800" cy="365760"/>
-          </a:xfrm>
-          <a:prstGeom prst="rect">
-            <a:avLst/>
-          </a:prstGeom>
-          <a:noFill/>
-          <a:ln/>
-        </p:spPr>
-        <p:txBody>
-          <a:bodyPr wrap="square" rtlCol="0" anchor="ctr"/>
-          <a:lstStyle/>
-          <a:p>
-            <a:pPr marL="0" indent="0">
-              <a:buNone/>
-            </a:pPr>
-            <a:r>
-              <a:rPr lang="en-US" sz="1400" b="1" dirty="0">
-                <a:solidFill>
-                  <a:srgbClr val="FFFFFF"/>
-                </a:solidFill>
-                <a:latin typeface="Calibri" pitchFamily="34" charset="0"/>
-                <a:ea typeface="Calibri" pitchFamily="34" charset="-122"/>
-                <a:cs typeface="Calibri" pitchFamily="34" charset="-120"/>
-              </a:rPr>
-              <a:t>⏱️  Időráfordítás megoszlása</a:t>
-            </a:r>
-            <a:endParaRPr lang="en-US" sz="1400" dirty="0"/>
-          </a:p>
-        </p:txBody>
-      </p:sp>
-      <p:sp>
-        <p:nvSpPr>
-          <p:cNvPr id="6" name="Shape 4"/>
-          <p:cNvSpPr/>
-          <p:nvPr/>
-        </p:nvSpPr>
-        <p:spPr>
-          <a:xfrm>
-            <a:off x="365760" y="1371600"/>
-            <a:ext cx="4114800" cy="475488"/>
-          </a:xfrm>
-          <a:prstGeom prst="rect">
-            <a:avLst/>
-          </a:prstGeom>
-          <a:solidFill>
-            <a:srgbClr val="242A4A"/>
-          </a:solidFill>
-          <a:ln w="12700">
-            <a:solidFill>
-              <a:srgbClr val="2C3566"/>
-            </a:solidFill>
-            <a:prstDash val="solid"/>
-          </a:ln>
-        </p:spPr>
-      </p:sp>
-      <p:sp>
-        <p:nvSpPr>
-          <p:cNvPr id="7" name="Shape 5"/>
-          <p:cNvSpPr/>
-          <p:nvPr/>
-        </p:nvSpPr>
-        <p:spPr>
-          <a:xfrm>
-            <a:off x="365760" y="1371600"/>
-            <a:ext cx="1645920" cy="475488"/>
-          </a:xfrm>
-          <a:prstGeom prst="rect">
-            <a:avLst/>
-          </a:prstGeom>
-          <a:solidFill>
-            <a:srgbClr val="4F8EF7">
-              <a:alpha val="80000"/>
-            </a:srgbClr>
-          </a:solidFill>
-          <a:ln w="12700">
-            <a:solidFill>
-              <a:srgbClr val="4F8EF7"/>
-            </a:solidFill>
-            <a:prstDash val="solid"/>
-          </a:ln>
-        </p:spPr>
-      </p:sp>
-      <p:sp>
-        <p:nvSpPr>
-          <p:cNvPr id="8" name="Text 6"/>
-          <p:cNvSpPr/>
-          <p:nvPr/>
-        </p:nvSpPr>
-        <p:spPr>
-          <a:xfrm>
-            <a:off x="502920" y="1463040"/>
-            <a:ext cx="3840480" cy="292608"/>
-          </a:xfrm>
-          <a:prstGeom prst="rect">
-            <a:avLst/>
-          </a:prstGeom>
-          <a:noFill/>
-          <a:ln/>
-        </p:spPr>
-        <p:txBody>
-          <a:bodyPr wrap="square" lIns="0" tIns="0" rIns="0" bIns="0" rtlCol="0" anchor="ctr"/>
-          <a:lstStyle/>
-          <a:p>
-            <a:pPr marL="0" indent="0">
-              <a:buNone/>
-            </a:pPr>
-            <a:r>
-              <a:rPr lang="en-US" sz="1200" b="1" dirty="0">
-                <a:solidFill>
-                  <a:srgbClr val="FFFFFF"/>
-                </a:solidFill>
-                <a:latin typeface="Calibri" pitchFamily="34" charset="0"/>
-                <a:ea typeface="Calibri" pitchFamily="34" charset="-122"/>
-                <a:cs typeface="Calibri" pitchFamily="34" charset="-120"/>
-              </a:rPr>
-              <a:t>40%  Implementáció</a:t>
-            </a:r>
-            <a:endParaRPr lang="en-US" sz="1200" dirty="0"/>
-          </a:p>
-        </p:txBody>
-      </p:sp>
-      <p:sp>
-        <p:nvSpPr>
-          <p:cNvPr id="9" name="Shape 7"/>
-          <p:cNvSpPr/>
-          <p:nvPr/>
-        </p:nvSpPr>
-        <p:spPr>
-          <a:xfrm>
-            <a:off x="365760" y="1938528"/>
-            <a:ext cx="4114800" cy="475488"/>
-          </a:xfrm>
-          <a:prstGeom prst="rect">
-            <a:avLst/>
-          </a:prstGeom>
-          <a:solidFill>
-            <a:srgbClr val="242A4A"/>
-          </a:solidFill>
-          <a:ln w="12700">
-            <a:solidFill>
-              <a:srgbClr val="2C3566"/>
-            </a:solidFill>
-            <a:prstDash val="solid"/>
-          </a:ln>
-        </p:spPr>
-      </p:sp>
-      <p:sp>
-        <p:nvSpPr>
-          <p:cNvPr id="10" name="Shape 8"/>
-          <p:cNvSpPr/>
-          <p:nvPr/>
-        </p:nvSpPr>
-        <p:spPr>
-          <a:xfrm>
-            <a:off x="365760" y="1938528"/>
-            <a:ext cx="1234440" cy="475488"/>
-          </a:xfrm>
-          <a:prstGeom prst="rect">
-            <a:avLst/>
-          </a:prstGeom>
-          <a:solidFill>
-            <a:srgbClr val="22C55E">
-              <a:alpha val="80000"/>
-            </a:srgbClr>
-          </a:solidFill>
-          <a:ln w="12700">
-            <a:solidFill>
-              <a:srgbClr val="22C55E"/>
-            </a:solidFill>
-            <a:prstDash val="solid"/>
-          </a:ln>
-        </p:spPr>
-      </p:sp>
-      <p:sp>
-        <p:nvSpPr>
-          <p:cNvPr id="11" name="Text 9"/>
-          <p:cNvSpPr/>
-          <p:nvPr/>
-        </p:nvSpPr>
-        <p:spPr>
-          <a:xfrm>
-            <a:off x="502920" y="2029968"/>
-            <a:ext cx="3840480" cy="292608"/>
-          </a:xfrm>
-          <a:prstGeom prst="rect">
-            <a:avLst/>
-          </a:prstGeom>
-          <a:noFill/>
-          <a:ln/>
-        </p:spPr>
-        <p:txBody>
-          <a:bodyPr wrap="square" lIns="0" tIns="0" rIns="0" bIns="0" rtlCol="0" anchor="ctr"/>
-          <a:lstStyle/>
-          <a:p>
-            <a:pPr marL="0" indent="0">
-              <a:buNone/>
-            </a:pPr>
-            <a:r>
-              <a:rPr lang="en-US" sz="1200" b="1" dirty="0">
-                <a:solidFill>
-                  <a:srgbClr val="FFFFFF"/>
-                </a:solidFill>
-                <a:latin typeface="Calibri" pitchFamily="34" charset="0"/>
-                <a:ea typeface="Calibri" pitchFamily="34" charset="-122"/>
-                <a:cs typeface="Calibri" pitchFamily="34" charset="-120"/>
-              </a:rPr>
-              <a:t>30%  Tervezés</a:t>
-            </a:r>
-            <a:endParaRPr lang="en-US" sz="1200" dirty="0"/>
-          </a:p>
-        </p:txBody>
-      </p:sp>
-      <p:sp>
-        <p:nvSpPr>
-          <p:cNvPr id="12" name="Shape 10"/>
-          <p:cNvSpPr/>
-          <p:nvPr/>
-        </p:nvSpPr>
-        <p:spPr>
-          <a:xfrm>
-            <a:off x="365760" y="2505456"/>
-            <a:ext cx="4114800" cy="475488"/>
-          </a:xfrm>
-          <a:prstGeom prst="rect">
-            <a:avLst/>
-          </a:prstGeom>
-          <a:solidFill>
-            <a:srgbClr val="242A4A"/>
-          </a:solidFill>
-          <a:ln w="12700">
-            <a:solidFill>
-              <a:srgbClr val="2C3566"/>
-            </a:solidFill>
-            <a:prstDash val="solid"/>
-          </a:ln>
-        </p:spPr>
-      </p:sp>
-      <p:sp>
-        <p:nvSpPr>
-          <p:cNvPr id="13" name="Shape 11"/>
-          <p:cNvSpPr/>
-          <p:nvPr/>
-        </p:nvSpPr>
-        <p:spPr>
-          <a:xfrm>
-            <a:off x="365760" y="2505456"/>
-            <a:ext cx="822960" cy="475488"/>
-          </a:xfrm>
-          <a:prstGeom prst="rect">
-            <a:avLst/>
-          </a:prstGeom>
-          <a:solidFill>
-            <a:srgbClr val="F59E0B">
-              <a:alpha val="80000"/>
-            </a:srgbClr>
-          </a:solidFill>
-          <a:ln w="12700">
-            <a:solidFill>
-              <a:srgbClr val="F59E0B"/>
-            </a:solidFill>
-            <a:prstDash val="solid"/>
-          </a:ln>
-        </p:spPr>
-      </p:sp>
-      <p:sp>
-        <p:nvSpPr>
-          <p:cNvPr id="14" name="Text 12"/>
-          <p:cNvSpPr/>
-          <p:nvPr/>
-        </p:nvSpPr>
-        <p:spPr>
-          <a:xfrm>
-            <a:off x="502920" y="2596896"/>
-            <a:ext cx="3840480" cy="292608"/>
-          </a:xfrm>
-          <a:prstGeom prst="rect">
-            <a:avLst/>
-          </a:prstGeom>
-          <a:noFill/>
-          <a:ln/>
-        </p:spPr>
-        <p:txBody>
-          <a:bodyPr wrap="square" lIns="0" tIns="0" rIns="0" bIns="0" rtlCol="0" anchor="ctr"/>
-          <a:lstStyle/>
-          <a:p>
-            <a:pPr marL="0" indent="0">
-              <a:buNone/>
-            </a:pPr>
-            <a:r>
-              <a:rPr lang="en-US" sz="1200" b="1" dirty="0">
-                <a:solidFill>
-                  <a:srgbClr val="FFFFFF"/>
-                </a:solidFill>
-                <a:latin typeface="Calibri" pitchFamily="34" charset="0"/>
-                <a:ea typeface="Calibri" pitchFamily="34" charset="-122"/>
-                <a:cs typeface="Calibri" pitchFamily="34" charset="-120"/>
-              </a:rPr>
-              <a:t>20%  Tesztelés</a:t>
-            </a:r>
-            <a:endParaRPr lang="en-US" sz="1200" dirty="0"/>
-          </a:p>
-        </p:txBody>
-      </p:sp>
-      <p:sp>
-        <p:nvSpPr>
-          <p:cNvPr id="15" name="Shape 13"/>
-          <p:cNvSpPr/>
-          <p:nvPr/>
-        </p:nvSpPr>
-        <p:spPr>
-          <a:xfrm>
-            <a:off x="365760" y="3072384"/>
-            <a:ext cx="4114800" cy="475488"/>
-          </a:xfrm>
-          <a:prstGeom prst="rect">
-            <a:avLst/>
-          </a:prstGeom>
-          <a:solidFill>
-            <a:srgbClr val="242A4A"/>
-          </a:solidFill>
-          <a:ln w="12700">
-            <a:solidFill>
-              <a:srgbClr val="2C3566"/>
-            </a:solidFill>
-            <a:prstDash val="solid"/>
-          </a:ln>
-        </p:spPr>
-      </p:sp>
-      <p:sp>
-        <p:nvSpPr>
-          <p:cNvPr id="16" name="Shape 14"/>
-          <p:cNvSpPr/>
-          <p:nvPr/>
-        </p:nvSpPr>
-        <p:spPr>
-          <a:xfrm>
-            <a:off x="365760" y="3072384"/>
-            <a:ext cx="411480" cy="475488"/>
-          </a:xfrm>
-          <a:prstGeom prst="rect">
-            <a:avLst/>
-          </a:prstGeom>
-          <a:solidFill>
-            <a:srgbClr val="A78BFA">
-              <a:alpha val="80000"/>
-            </a:srgbClr>
-          </a:solidFill>
-          <a:ln w="12700">
-            <a:solidFill>
-              <a:srgbClr val="A78BFA"/>
-            </a:solidFill>
-            <a:prstDash val="solid"/>
-          </a:ln>
-        </p:spPr>
-      </p:sp>
-      <p:sp>
-        <p:nvSpPr>
-          <p:cNvPr id="17" name="Text 15"/>
-          <p:cNvSpPr/>
-          <p:nvPr/>
-        </p:nvSpPr>
-        <p:spPr>
-          <a:xfrm>
-            <a:off x="502920" y="3163824"/>
-            <a:ext cx="3840480" cy="292608"/>
-          </a:xfrm>
-          <a:prstGeom prst="rect">
-            <a:avLst/>
-          </a:prstGeom>
-          <a:noFill/>
-          <a:ln/>
-        </p:spPr>
-        <p:txBody>
-          <a:bodyPr wrap="square" lIns="0" tIns="0" rIns="0" bIns="0" rtlCol="0" anchor="ctr"/>
-          <a:lstStyle/>
-          <a:p>
-            <a:pPr marL="0" indent="0">
-              <a:buNone/>
-            </a:pPr>
-            <a:r>
-              <a:rPr lang="en-US" sz="1200" b="1" dirty="0">
-                <a:solidFill>
-                  <a:srgbClr val="FFFFFF"/>
-                </a:solidFill>
-                <a:latin typeface="Calibri" pitchFamily="34" charset="0"/>
-                <a:ea typeface="Calibri" pitchFamily="34" charset="-122"/>
-                <a:cs typeface="Calibri" pitchFamily="34" charset="-120"/>
-              </a:rPr>
-              <a:t>10%  Dokumentáció</a:t>
-            </a:r>
-            <a:endParaRPr lang="en-US" sz="1200" dirty="0"/>
-          </a:p>
-        </p:txBody>
-      </p:sp>
-      <p:sp>
-        <p:nvSpPr>
-          <p:cNvPr id="18" name="Text 16"/>
-          <p:cNvSpPr/>
-          <p:nvPr/>
-        </p:nvSpPr>
-        <p:spPr>
-          <a:xfrm>
-            <a:off x="4754880" y="914400"/>
-            <a:ext cx="4114800" cy="365760"/>
-          </a:xfrm>
-          <a:prstGeom prst="rect">
-            <a:avLst/>
-          </a:prstGeom>
-          <a:noFill/>
-          <a:ln/>
-        </p:spPr>
-        <p:txBody>
-          <a:bodyPr wrap="square" rtlCol="0" anchor="ctr"/>
-          <a:lstStyle/>
-          <a:p>
-            <a:pPr marL="0" indent="0">
-              <a:buNone/>
-            </a:pPr>
-            <a:r>
-              <a:rPr lang="en-US" sz="1400" b="1" dirty="0">
-                <a:solidFill>
-                  <a:srgbClr val="FFFFFF"/>
-                </a:solidFill>
-                <a:latin typeface="Calibri" pitchFamily="34" charset="0"/>
-                <a:ea typeface="Calibri" pitchFamily="34" charset="-122"/>
-                <a:cs typeface="Calibri" pitchFamily="34" charset="-120"/>
-              </a:rPr>
-              <a:t>🖥️  Eszközök megoszlása</a:t>
-            </a:r>
-            <a:endParaRPr lang="en-US" sz="1400" dirty="0"/>
-          </a:p>
-        </p:txBody>
-      </p:sp>
-      <p:sp>
-        <p:nvSpPr>
-          <p:cNvPr id="19" name="Shape 17"/>
-          <p:cNvSpPr/>
-          <p:nvPr/>
-        </p:nvSpPr>
-        <p:spPr>
-          <a:xfrm>
-            <a:off x="4754880" y="1371600"/>
-            <a:ext cx="1920240" cy="1097280"/>
-          </a:xfrm>
-          <a:prstGeom prst="rect">
-            <a:avLst/>
-          </a:prstGeom>
-          <a:solidFill>
-            <a:srgbClr val="242A4A"/>
-          </a:solidFill>
-          <a:ln w="19050">
-            <a:solidFill>
-              <a:srgbClr val="4F8EF7"/>
-            </a:solidFill>
-            <a:prstDash val="solid"/>
-          </a:ln>
-        </p:spPr>
-      </p:sp>
-      <p:sp>
-        <p:nvSpPr>
-          <p:cNvPr id="20" name="Text 18"/>
-          <p:cNvSpPr/>
-          <p:nvPr/>
-        </p:nvSpPr>
-        <p:spPr>
-          <a:xfrm>
-            <a:off x="4754880" y="1463040"/>
-            <a:ext cx="1920240" cy="502920"/>
-          </a:xfrm>
-          <a:prstGeom prst="rect">
-            <a:avLst/>
-          </a:prstGeom>
-          <a:noFill/>
-          <a:ln/>
-        </p:spPr>
-        <p:txBody>
-          <a:bodyPr wrap="square" rtlCol="0" anchor="ctr"/>
-          <a:lstStyle/>
-          <a:p>
-            <a:pPr marL="0" indent="0" algn="ctr">
-              <a:buNone/>
-            </a:pPr>
-            <a:r>
-              <a:rPr lang="en-US" sz="2800" b="1" dirty="0">
-                <a:solidFill>
-                  <a:srgbClr val="4F8EF7"/>
-                </a:solidFill>
-                <a:latin typeface="Calibri" pitchFamily="34" charset="0"/>
-                <a:ea typeface="Calibri" pitchFamily="34" charset="-122"/>
-                <a:cs typeface="Calibri" pitchFamily="34" charset="-120"/>
-              </a:rPr>
-              <a:t>75%</a:t>
-            </a:r>
-            <a:endParaRPr lang="en-US" sz="2800" dirty="0"/>
-          </a:p>
-        </p:txBody>
-      </p:sp>
-      <p:sp>
-        <p:nvSpPr>
-          <p:cNvPr id="21" name="Text 19"/>
-          <p:cNvSpPr/>
-          <p:nvPr/>
-        </p:nvSpPr>
-        <p:spPr>
-          <a:xfrm>
-            <a:off x="4754880" y="2011680"/>
-            <a:ext cx="1920240" cy="365760"/>
-          </a:xfrm>
-          <a:prstGeom prst="rect">
-            <a:avLst/>
-          </a:prstGeom>
-          <a:noFill/>
-          <a:ln/>
-        </p:spPr>
-        <p:txBody>
-          <a:bodyPr wrap="square" rtlCol="0" anchor="ctr"/>
-          <a:lstStyle/>
-          <a:p>
-            <a:pPr marL="0" indent="0" algn="ctr">
-              <a:buNone/>
-            </a:pPr>
-            <a:r>
-              <a:rPr lang="en-US" sz="1100" dirty="0">
-                <a:solidFill>
-                  <a:srgbClr val="C8D4F0"/>
-                </a:solidFill>
-                <a:latin typeface="Calibri" pitchFamily="34" charset="0"/>
-                <a:ea typeface="Calibri" pitchFamily="34" charset="-122"/>
-                <a:cs typeface="Calibri" pitchFamily="34" charset="-120"/>
-              </a:rPr>
-              <a:t>PC  –  45 db</a:t>
-            </a:r>
-            <a:endParaRPr lang="en-US" sz="1100" dirty="0"/>
-          </a:p>
-        </p:txBody>
-      </p:sp>
-      <p:sp>
-        <p:nvSpPr>
-          <p:cNvPr id="22" name="Shape 20"/>
-          <p:cNvSpPr/>
-          <p:nvPr/>
-        </p:nvSpPr>
-        <p:spPr>
-          <a:xfrm>
-            <a:off x="6858000" y="1371600"/>
-            <a:ext cx="1920240" cy="1097280"/>
-          </a:xfrm>
-          <a:prstGeom prst="rect">
-            <a:avLst/>
-          </a:prstGeom>
-          <a:solidFill>
-            <a:srgbClr val="242A4A"/>
-          </a:solidFill>
-          <a:ln w="19050">
-            <a:solidFill>
-              <a:srgbClr val="22C55E"/>
-            </a:solidFill>
-            <a:prstDash val="solid"/>
-          </a:ln>
-        </p:spPr>
-      </p:sp>
-      <p:sp>
-        <p:nvSpPr>
-          <p:cNvPr id="23" name="Text 21"/>
-          <p:cNvSpPr/>
-          <p:nvPr/>
-        </p:nvSpPr>
-        <p:spPr>
-          <a:xfrm>
-            <a:off x="6858000" y="1463040"/>
-            <a:ext cx="1920240" cy="502920"/>
-          </a:xfrm>
-          <a:prstGeom prst="rect">
-            <a:avLst/>
-          </a:prstGeom>
-          <a:noFill/>
-          <a:ln/>
-        </p:spPr>
-        <p:txBody>
-          <a:bodyPr wrap="square" rtlCol="0" anchor="ctr"/>
-          <a:lstStyle/>
-          <a:p>
-            <a:pPr marL="0" indent="0" algn="ctr">
-              <a:buNone/>
-            </a:pPr>
-            <a:r>
-              <a:rPr lang="en-US" sz="2800" b="1" dirty="0">
-                <a:solidFill>
-                  <a:srgbClr val="22C55E"/>
-                </a:solidFill>
-                <a:latin typeface="Calibri" pitchFamily="34" charset="0"/>
-                <a:ea typeface="Calibri" pitchFamily="34" charset="-122"/>
-                <a:cs typeface="Calibri" pitchFamily="34" charset="-120"/>
-              </a:rPr>
-              <a:t>12%</a:t>
-            </a:r>
-            <a:endParaRPr lang="en-US" sz="2800" dirty="0"/>
-          </a:p>
-        </p:txBody>
-      </p:sp>
-      <p:sp>
-        <p:nvSpPr>
-          <p:cNvPr id="24" name="Text 22"/>
-          <p:cNvSpPr/>
-          <p:nvPr/>
-        </p:nvSpPr>
-        <p:spPr>
-          <a:xfrm>
-            <a:off x="6858000" y="2011680"/>
-            <a:ext cx="1920240" cy="365760"/>
-          </a:xfrm>
-          <a:prstGeom prst="rect">
-            <a:avLst/>
-          </a:prstGeom>
-          <a:noFill/>
-          <a:ln/>
-        </p:spPr>
-        <p:txBody>
-          <a:bodyPr wrap="square" rtlCol="0" anchor="ctr"/>
-          <a:lstStyle/>
-          <a:p>
-            <a:pPr marL="0" indent="0" algn="ctr">
-              <a:buNone/>
-            </a:pPr>
-            <a:r>
-              <a:rPr lang="en-US" sz="1100" dirty="0">
-                <a:solidFill>
-                  <a:srgbClr val="C8D4F0"/>
-                </a:solidFill>
-                <a:latin typeface="Calibri" pitchFamily="34" charset="0"/>
-                <a:ea typeface="Calibri" pitchFamily="34" charset="-122"/>
-                <a:cs typeface="Calibri" pitchFamily="34" charset="-120"/>
-              </a:rPr>
-              <a:t>Switch  –  7 db</a:t>
-            </a:r>
-            <a:endParaRPr lang="en-US" sz="1100" dirty="0"/>
-          </a:p>
-        </p:txBody>
-      </p:sp>
-      <p:sp>
-        <p:nvSpPr>
-          <p:cNvPr id="25" name="Shape 23"/>
-          <p:cNvSpPr/>
-          <p:nvPr/>
-        </p:nvSpPr>
-        <p:spPr>
-          <a:xfrm>
-            <a:off x="4754880" y="2651760"/>
-            <a:ext cx="1920240" cy="1097280"/>
-          </a:xfrm>
-          <a:prstGeom prst="rect">
-            <a:avLst/>
-          </a:prstGeom>
-          <a:solidFill>
-            <a:srgbClr val="242A4A"/>
-          </a:solidFill>
-          <a:ln w="19050">
-            <a:solidFill>
-              <a:srgbClr val="F59E0B"/>
-            </a:solidFill>
-            <a:prstDash val="solid"/>
-          </a:ln>
-        </p:spPr>
-      </p:sp>
-      <p:sp>
-        <p:nvSpPr>
-          <p:cNvPr id="26" name="Text 24"/>
-          <p:cNvSpPr/>
-          <p:nvPr/>
-        </p:nvSpPr>
-        <p:spPr>
-          <a:xfrm>
-            <a:off x="4754880" y="2743200"/>
-            <a:ext cx="1920240" cy="502920"/>
-          </a:xfrm>
-          <a:prstGeom prst="rect">
-            <a:avLst/>
-          </a:prstGeom>
-          <a:noFill/>
-          <a:ln/>
-        </p:spPr>
-        <p:txBody>
-          <a:bodyPr wrap="square" rtlCol="0" anchor="ctr"/>
-          <a:lstStyle/>
-          <a:p>
-            <a:pPr marL="0" indent="0" algn="ctr">
-              <a:buNone/>
-            </a:pPr>
-            <a:r>
-              <a:rPr lang="en-US" sz="2800" b="1" dirty="0">
-                <a:solidFill>
-                  <a:srgbClr val="F59E0B"/>
-                </a:solidFill>
-                <a:latin typeface="Calibri" pitchFamily="34" charset="0"/>
-                <a:ea typeface="Calibri" pitchFamily="34" charset="-122"/>
-                <a:cs typeface="Calibri" pitchFamily="34" charset="-120"/>
-              </a:rPr>
-              <a:t>7%</a:t>
-            </a:r>
-            <a:endParaRPr lang="en-US" sz="2800" dirty="0"/>
-          </a:p>
-        </p:txBody>
-      </p:sp>
-      <p:sp>
-        <p:nvSpPr>
-          <p:cNvPr id="27" name="Text 25"/>
-          <p:cNvSpPr/>
-          <p:nvPr/>
-        </p:nvSpPr>
-        <p:spPr>
-          <a:xfrm>
-            <a:off x="4754880" y="3291840"/>
-            <a:ext cx="1920240" cy="365760"/>
-          </a:xfrm>
-          <a:prstGeom prst="rect">
-            <a:avLst/>
-          </a:prstGeom>
-          <a:noFill/>
-          <a:ln/>
-        </p:spPr>
-        <p:txBody>
-          <a:bodyPr wrap="square" rtlCol="0" anchor="ctr"/>
-          <a:lstStyle/>
-          <a:p>
-            <a:pPr marL="0" indent="0" algn="ctr">
-              <a:buNone/>
-            </a:pPr>
-            <a:r>
-              <a:rPr lang="en-US" sz="1100" dirty="0">
-                <a:solidFill>
-                  <a:srgbClr val="C8D4F0"/>
-                </a:solidFill>
-                <a:latin typeface="Calibri" pitchFamily="34" charset="0"/>
-                <a:ea typeface="Calibri" pitchFamily="34" charset="-122"/>
-                <a:cs typeface="Calibri" pitchFamily="34" charset="-120"/>
-              </a:rPr>
-              <a:t>Router  –  6 db</a:t>
-            </a:r>
-            <a:endParaRPr lang="en-US" sz="1100" dirty="0"/>
-          </a:p>
-        </p:txBody>
-      </p:sp>
-      <p:sp>
-        <p:nvSpPr>
-          <p:cNvPr id="28" name="Shape 26"/>
-          <p:cNvSpPr/>
-          <p:nvPr/>
-        </p:nvSpPr>
-        <p:spPr>
-          <a:xfrm>
-            <a:off x="6858000" y="2651760"/>
-            <a:ext cx="1920240" cy="1097280"/>
-          </a:xfrm>
-          <a:prstGeom prst="rect">
-            <a:avLst/>
-          </a:prstGeom>
-          <a:solidFill>
-            <a:srgbClr val="242A4A"/>
-          </a:solidFill>
-          <a:ln w="19050">
-            <a:solidFill>
-              <a:srgbClr val="EF4444"/>
-            </a:solidFill>
-            <a:prstDash val="solid"/>
-          </a:ln>
-        </p:spPr>
-      </p:sp>
-      <p:sp>
-        <p:nvSpPr>
-          <p:cNvPr id="29" name="Text 27"/>
-          <p:cNvSpPr/>
-          <p:nvPr/>
-        </p:nvSpPr>
-        <p:spPr>
-          <a:xfrm>
-            <a:off x="6858000" y="2743200"/>
-            <a:ext cx="1920240" cy="502920"/>
-          </a:xfrm>
-          <a:prstGeom prst="rect">
-            <a:avLst/>
-          </a:prstGeom>
-          <a:noFill/>
-          <a:ln/>
-        </p:spPr>
-        <p:txBody>
-          <a:bodyPr wrap="square" rtlCol="0" anchor="ctr"/>
-          <a:lstStyle/>
-          <a:p>
-            <a:pPr marL="0" indent="0" algn="ctr">
-              <a:buNone/>
-            </a:pPr>
-            <a:r>
-              <a:rPr lang="en-US" sz="2800" b="1" dirty="0">
-                <a:solidFill>
-                  <a:srgbClr val="EF4444"/>
-                </a:solidFill>
-                <a:latin typeface="Calibri" pitchFamily="34" charset="0"/>
-                <a:ea typeface="Calibri" pitchFamily="34" charset="-122"/>
-                <a:cs typeface="Calibri" pitchFamily="34" charset="-120"/>
-              </a:rPr>
-              <a:t>5%</a:t>
-            </a:r>
-            <a:endParaRPr lang="en-US" sz="2800" dirty="0"/>
-          </a:p>
-        </p:txBody>
-      </p:sp>
-      <p:sp>
-        <p:nvSpPr>
-          <p:cNvPr id="30" name="Text 28"/>
-          <p:cNvSpPr/>
-          <p:nvPr/>
-        </p:nvSpPr>
-        <p:spPr>
-          <a:xfrm>
-            <a:off x="6858000" y="3291840"/>
-            <a:ext cx="1920240" cy="365760"/>
-          </a:xfrm>
-          <a:prstGeom prst="rect">
-            <a:avLst/>
-          </a:prstGeom>
-          <a:noFill/>
-          <a:ln/>
-        </p:spPr>
-        <p:txBody>
-          <a:bodyPr wrap="square" rtlCol="0" anchor="ctr"/>
-          <a:lstStyle/>
-          <a:p>
-            <a:pPr marL="0" indent="0" algn="ctr">
-              <a:buNone/>
-            </a:pPr>
-            <a:r>
-              <a:rPr lang="en-US" sz="1100" dirty="0">
-                <a:solidFill>
-                  <a:srgbClr val="C8D4F0"/>
-                </a:solidFill>
-                <a:latin typeface="Calibri" pitchFamily="34" charset="0"/>
-                <a:ea typeface="Calibri" pitchFamily="34" charset="-122"/>
-                <a:cs typeface="Calibri" pitchFamily="34" charset="-120"/>
-              </a:rPr>
-              <a:t>Szerver  –  3 db</a:t>
-            </a:r>
-            <a:endParaRPr lang="en-US" sz="1100" dirty="0"/>
-          </a:p>
-        </p:txBody>
-      </p:sp>
-      <p:sp>
-        <p:nvSpPr>
-          <p:cNvPr id="32" name="Text 30"/>
-          <p:cNvSpPr/>
-          <p:nvPr/>
-        </p:nvSpPr>
-        <p:spPr>
-          <a:xfrm>
-            <a:off x="548640" y="4535424"/>
-            <a:ext cx="8046720" cy="411480"/>
-          </a:xfrm>
-          <a:prstGeom prst="rect">
-            <a:avLst/>
-          </a:prstGeom>
-          <a:noFill/>
-          <a:ln/>
-        </p:spPr>
-        <p:txBody>
-          <a:bodyPr wrap="square" rtlCol="0" anchor="ctr"/>
-          <a:lstStyle/>
-          <a:p>
-            <a:pPr marL="0" indent="0">
-              <a:buNone/>
-            </a:pPr>
-            <a:endParaRPr lang="en-US" sz="1200" dirty="0"/>
-          </a:p>
-        </p:txBody>
-      </p:sp>
-    </p:spTree>
-  </p:cSld>
-  <p:clrMapOvr>
-    <a:masterClrMapping/>
-  </p:clrMapOvr>
-</p:sld>
-</file>
-
-<file path=ppt/slides/slide12.xml><?xml version="1.0" encoding="utf-8"?>
+<file path=ppt/slides/slide14.xml><?xml version="1.0" encoding="utf-8"?>
 <p:sld xmlns:a="http://schemas.openxmlformats.org/drawingml/2006/main" xmlns:r="http://schemas.openxmlformats.org/officeDocument/2006/relationships" xmlns:p="http://schemas.openxmlformats.org/presentationml/2006/main">
   <p:cSld name="Slide 12">
     <p:bg>
@@ -4704,6 +6739,13 @@
             </a:outerShdw>
           </a:effectLst>
         </p:spPr>
+        <p:txBody>
+          <a:bodyPr/>
+          <a:lstStyle/>
+          <a:p>
+            <a:endParaRPr lang="hu-HU" dirty="0"/>
+          </a:p>
+        </p:txBody>
       </p:sp>
       <p:sp>
         <p:nvSpPr>
@@ -4857,6 +6899,17 @@
               <a:buNone/>
             </a:pPr>
             <a:r>
+              <a:rPr lang="en-US" sz="1100" dirty="0" err="1">
+                <a:solidFill>
+                  <a:srgbClr val="C8D4F0"/>
+                </a:solidFill>
+                <a:latin typeface="Calibri" pitchFamily="34" charset="0"/>
+                <a:ea typeface="Calibri" pitchFamily="34" charset="-122"/>
+                <a:cs typeface="Calibri" pitchFamily="34" charset="-120"/>
+              </a:rPr>
+              <a:t>Infrastruktúra</a:t>
+            </a:r>
+            <a:r>
               <a:rPr lang="en-US" sz="1100" dirty="0">
                 <a:solidFill>
                   <a:srgbClr val="C8D4F0"/>
@@ -4865,7 +6918,7 @@
                 <a:ea typeface="Calibri" pitchFamily="34" charset="-122"/>
                 <a:cs typeface="Calibri" pitchFamily="34" charset="-120"/>
               </a:rPr>
-              <a:t>Project Manager  •  Infrastruktúra Specialista  •  Hálózati Architekt</a:t>
+              <a:t> Specialista  •  Hálózati Architekt</a:t>
             </a:r>
             <a:endParaRPr lang="en-US" sz="1100" dirty="0"/>
           </a:p>
@@ -4918,7 +6971,7 @@
         </p:nvSpPr>
         <p:spPr>
           <a:xfrm>
-            <a:off x="548640" y="2697480"/>
+            <a:off x="440267" y="2834640"/>
             <a:ext cx="3566160" cy="1463040"/>
           </a:xfrm>
           <a:prstGeom prst="rect">
@@ -5002,28 +7055,6 @@
               </a:rPr>
               <a:t>Tűzfal &amp; ACL szabályok
 </a:t>
-            </a:r>
-            <a:r>
-              <a:rPr lang="en-US" sz="1200" dirty="0">
-                <a:solidFill>
-                  <a:srgbClr val="22C55E"/>
-                </a:solidFill>
-                <a:latin typeface="Calibri" pitchFamily="34" charset="0"/>
-                <a:ea typeface="Calibri" pitchFamily="34" charset="-122"/>
-                <a:cs typeface="Calibri" pitchFamily="34" charset="-120"/>
-              </a:rPr>
-              <a:t>✔ </a:t>
-            </a:r>
-            <a:r>
-              <a:rPr lang="en-US" sz="1200" dirty="0">
-                <a:solidFill>
-                  <a:srgbClr val="C8D4F0"/>
-                </a:solidFill>
-                <a:latin typeface="Calibri" pitchFamily="34" charset="0"/>
-                <a:ea typeface="Calibri" pitchFamily="34" charset="-122"/>
-                <a:cs typeface="Calibri" pitchFamily="34" charset="-120"/>
-              </a:rPr>
-              <a:t>Scrum koordináció</a:t>
             </a:r>
             <a:endParaRPr lang="en-US" sz="1200" dirty="0"/>
           </a:p>
@@ -5293,24 +7324,13 @@
             <a:r>
               <a:rPr lang="en-US" sz="1200" dirty="0">
                 <a:solidFill>
-                  <a:srgbClr val="22C55E"/>
-                </a:solidFill>
-                <a:latin typeface="Calibri" pitchFamily="34" charset="0"/>
-                <a:ea typeface="Calibri" pitchFamily="34" charset="-122"/>
-                <a:cs typeface="Calibri" pitchFamily="34" charset="-120"/>
-              </a:rPr>
-              <a:t>✔ </a:t>
-            </a:r>
-            <a:r>
-              <a:rPr lang="en-US" sz="1200" dirty="0">
-                <a:solidFill>
                   <a:srgbClr val="C8D4F0"/>
                 </a:solidFill>
                 <a:latin typeface="Calibri" pitchFamily="34" charset="0"/>
                 <a:ea typeface="Calibri" pitchFamily="34" charset="-122"/>
                 <a:cs typeface="Calibri" pitchFamily="34" charset="-120"/>
               </a:rPr>
-              <a:t>VLAN konfiguráció
+              <a:t>
 </a:t>
             </a:r>
             <a:r>
@@ -6660,6 +8680,17 @@
               <a:buNone/>
             </a:pPr>
             <a:r>
+              <a:rPr lang="hu-HU" sz="1100" dirty="0">
+                <a:solidFill>
+                  <a:srgbClr val="C8D4F0"/>
+                </a:solidFill>
+                <a:latin typeface="Calibri" pitchFamily="34" charset="0"/>
+                <a:ea typeface="Calibri" pitchFamily="34" charset="-122"/>
+                <a:cs typeface="Calibri" pitchFamily="34" charset="-120"/>
+              </a:rPr>
+              <a:t>7</a:t>
+            </a:r>
+            <a:r>
               <a:rPr lang="en-US" sz="1100" dirty="0">
                 <a:solidFill>
                   <a:srgbClr val="C8D4F0"/>
@@ -6668,7 +8699,7 @@
                 <a:ea typeface="Calibri" pitchFamily="34" charset="-122"/>
                 <a:cs typeface="Calibri" pitchFamily="34" charset="-120"/>
               </a:rPr>
-              <a:t>6 db Cisco 2911 router</a:t>
+              <a:t> db Cisco 2911 router</a:t>
             </a:r>
             <a:endParaRPr lang="en-US" sz="1100" dirty="0"/>
           </a:p>
@@ -6788,6 +8819,17 @@
               <a:buNone/>
             </a:pPr>
             <a:r>
+              <a:rPr lang="hu-HU" sz="1100" dirty="0">
+                <a:solidFill>
+                  <a:srgbClr val="C8D4F0"/>
+                </a:solidFill>
+                <a:latin typeface="Calibri" pitchFamily="34" charset="0"/>
+                <a:ea typeface="Calibri" pitchFamily="34" charset="-122"/>
+                <a:cs typeface="Calibri" pitchFamily="34" charset="-120"/>
+              </a:rPr>
+              <a:t>6</a:t>
+            </a:r>
+            <a:r>
               <a:rPr lang="en-US" sz="1100" dirty="0">
                 <a:solidFill>
                   <a:srgbClr val="C8D4F0"/>
@@ -6796,7 +8838,7 @@
                 <a:ea typeface="Calibri" pitchFamily="34" charset="-122"/>
                 <a:cs typeface="Calibri" pitchFamily="34" charset="-120"/>
               </a:rPr>
-              <a:t>7 db Cisco 2960-24TT switch</a:t>
+              <a:t> db Cisco 2960-24TT switch</a:t>
             </a:r>
             <a:endParaRPr lang="en-US" sz="1100" dirty="0"/>
           </a:p>
@@ -6916,6 +8958,17 @@
               <a:buNone/>
             </a:pPr>
             <a:r>
+              <a:rPr lang="hu-HU" sz="1100" dirty="0">
+                <a:solidFill>
+                  <a:srgbClr val="C8D4F0"/>
+                </a:solidFill>
+                <a:latin typeface="Calibri" pitchFamily="34" charset="0"/>
+                <a:ea typeface="Calibri" pitchFamily="34" charset="-122"/>
+                <a:cs typeface="Calibri" pitchFamily="34" charset="-120"/>
+              </a:rPr>
+              <a:t>33</a:t>
+            </a:r>
+            <a:r>
               <a:rPr lang="en-US" sz="1100" dirty="0">
                 <a:solidFill>
                   <a:srgbClr val="C8D4F0"/>
@@ -6924,7 +8977,7 @@
                 <a:ea typeface="Calibri" pitchFamily="34" charset="-122"/>
                 <a:cs typeface="Calibri" pitchFamily="34" charset="-120"/>
               </a:rPr>
-              <a:t>60+ végberendezés (PC, szerver, nyomtató)</a:t>
+              <a:t> végberendezés (PC, szerver, nyomtató)</a:t>
             </a:r>
             <a:endParaRPr lang="en-US" sz="1100" dirty="0"/>
           </a:p>
@@ -7027,10 +9080,10 @@
       </p:sp>
       <p:pic>
         <p:nvPicPr>
-          <p:cNvPr id="23" name="Kép 22">
+          <p:cNvPr id="22" name="Kép 21">
             <a:extLst>
               <a:ext uri="{FF2B5EF4-FFF2-40B4-BE49-F238E27FC236}">
-                <a16:creationId xmlns:a16="http://schemas.microsoft.com/office/drawing/2014/main" id="{446E555A-FA14-40C4-9EFF-C44750DBDC22}"/>
+                <a16:creationId xmlns:a16="http://schemas.microsoft.com/office/drawing/2014/main" id="{FE3178A1-2138-415E-AE59-3297B51B9CD8}"/>
               </a:ext>
             </a:extLst>
           </p:cNvPr>
@@ -7039,16 +9092,15 @@
           </p:cNvPicPr>
           <p:nvPr/>
         </p:nvPicPr>
-        <p:blipFill>
+        <p:blipFill rotWithShape="1">
           <a:blip r:embed="rId3"/>
-          <a:stretch>
-            <a:fillRect/>
-          </a:stretch>
+          <a:srcRect l="2425" t="5916"/>
+          <a:stretch/>
         </p:blipFill>
         <p:spPr>
           <a:xfrm>
-            <a:off x="4572000" y="1814203"/>
-            <a:ext cx="3987602" cy="1891928"/>
+            <a:off x="4645441" y="1850814"/>
+            <a:ext cx="3844398" cy="1673868"/>
           </a:xfrm>
           <a:prstGeom prst="rect">
             <a:avLst/>
@@ -7588,9 +9640,239 @@
           </a:ln>
         </p:spPr>
       </p:sp>
+      <p:sp>
+        <p:nvSpPr>
+          <p:cNvPr id="18" name="Text 14"/>
+          <p:cNvSpPr/>
+          <p:nvPr/>
+        </p:nvSpPr>
+        <p:spPr>
+          <a:xfrm>
+            <a:off x="5715000" y="1024128"/>
+            <a:ext cx="2834640" cy="548640"/>
+          </a:xfrm>
+          <a:prstGeom prst="rect">
+            <a:avLst/>
+          </a:prstGeom>
+          <a:noFill/>
+          <a:ln/>
+        </p:spPr>
+        <p:txBody>
+          <a:bodyPr wrap="square" rtlCol="0" anchor="ctr"/>
+          <a:lstStyle/>
+          <a:p>
+            <a:pPr marL="0" indent="0">
+              <a:buNone/>
+            </a:pPr>
+            <a:endParaRPr lang="en-US" sz="1400" dirty="0"/>
+          </a:p>
+        </p:txBody>
+      </p:sp>
+      <p:sp>
+        <p:nvSpPr>
+          <p:cNvPr id="19" name="Text 15"/>
+          <p:cNvSpPr/>
+          <p:nvPr/>
+        </p:nvSpPr>
+        <p:spPr>
+          <a:xfrm>
+            <a:off x="5029200" y="1691640"/>
+            <a:ext cx="3566160" cy="274320"/>
+          </a:xfrm>
+          <a:prstGeom prst="rect">
+            <a:avLst/>
+          </a:prstGeom>
+          <a:noFill/>
+          <a:ln/>
+        </p:spPr>
+        <p:txBody>
+          <a:bodyPr wrap="square" rtlCol="0" anchor="ctr"/>
+          <a:lstStyle/>
+          <a:p>
+            <a:pPr marL="0" indent="0">
+              <a:buNone/>
+            </a:pPr>
+            <a:endParaRPr lang="en-US" sz="1100" dirty="0"/>
+          </a:p>
+        </p:txBody>
+      </p:sp>
+      <p:sp>
+        <p:nvSpPr>
+          <p:cNvPr id="20" name="Text 16"/>
+          <p:cNvSpPr/>
+          <p:nvPr/>
+        </p:nvSpPr>
+        <p:spPr>
+          <a:xfrm>
+            <a:off x="5029200" y="1938528"/>
+            <a:ext cx="3566160" cy="411480"/>
+          </a:xfrm>
+          <a:prstGeom prst="rect">
+            <a:avLst/>
+          </a:prstGeom>
+          <a:noFill/>
+          <a:ln/>
+        </p:spPr>
+        <p:txBody>
+          <a:bodyPr wrap="square" rtlCol="0" anchor="ctr"/>
+          <a:lstStyle/>
+          <a:p>
+            <a:pPr marL="0" indent="0">
+              <a:buNone/>
+            </a:pPr>
+            <a:endParaRPr lang="en-US" sz="1100" dirty="0"/>
+          </a:p>
+        </p:txBody>
+      </p:sp>
+      <p:sp>
+        <p:nvSpPr>
+          <p:cNvPr id="21" name="Text 17"/>
+          <p:cNvSpPr/>
+          <p:nvPr/>
+        </p:nvSpPr>
+        <p:spPr>
+          <a:xfrm>
+            <a:off x="5029200" y="2468880"/>
+            <a:ext cx="3566160" cy="274320"/>
+          </a:xfrm>
+          <a:prstGeom prst="rect">
+            <a:avLst/>
+          </a:prstGeom>
+          <a:noFill/>
+          <a:ln/>
+        </p:spPr>
+        <p:txBody>
+          <a:bodyPr wrap="square" rtlCol="0" anchor="ctr"/>
+          <a:lstStyle/>
+          <a:p>
+            <a:pPr marL="0" indent="0">
+              <a:buNone/>
+            </a:pPr>
+            <a:endParaRPr lang="en-US" sz="1100" dirty="0"/>
+          </a:p>
+        </p:txBody>
+      </p:sp>
+      <p:sp>
+        <p:nvSpPr>
+          <p:cNvPr id="22" name="Text 18"/>
+          <p:cNvSpPr/>
+          <p:nvPr/>
+        </p:nvSpPr>
+        <p:spPr>
+          <a:xfrm>
+            <a:off x="5029200" y="2715768"/>
+            <a:ext cx="3566160" cy="411480"/>
+          </a:xfrm>
+          <a:prstGeom prst="rect">
+            <a:avLst/>
+          </a:prstGeom>
+          <a:noFill/>
+          <a:ln/>
+        </p:spPr>
+        <p:txBody>
+          <a:bodyPr wrap="square" rtlCol="0" anchor="ctr"/>
+          <a:lstStyle/>
+          <a:p>
+            <a:pPr marL="0" indent="0">
+              <a:buNone/>
+            </a:pPr>
+            <a:endParaRPr lang="en-US" sz="1100" dirty="0"/>
+          </a:p>
+        </p:txBody>
+      </p:sp>
+      <p:sp>
+        <p:nvSpPr>
+          <p:cNvPr id="23" name="Text 19"/>
+          <p:cNvSpPr/>
+          <p:nvPr/>
+        </p:nvSpPr>
+        <p:spPr>
+          <a:xfrm>
+            <a:off x="5029200" y="3246120"/>
+            <a:ext cx="3566160" cy="274320"/>
+          </a:xfrm>
+          <a:prstGeom prst="rect">
+            <a:avLst/>
+          </a:prstGeom>
+          <a:noFill/>
+          <a:ln/>
+        </p:spPr>
+        <p:txBody>
+          <a:bodyPr wrap="square" rtlCol="0" anchor="ctr"/>
+          <a:lstStyle/>
+          <a:p>
+            <a:pPr marL="0" indent="0">
+              <a:buNone/>
+            </a:pPr>
+            <a:endParaRPr lang="en-US" sz="1100" dirty="0"/>
+          </a:p>
+        </p:txBody>
+      </p:sp>
+      <p:sp>
+        <p:nvSpPr>
+          <p:cNvPr id="24" name="Text 20"/>
+          <p:cNvSpPr/>
+          <p:nvPr/>
+        </p:nvSpPr>
+        <p:spPr>
+          <a:xfrm>
+            <a:off x="5029200" y="3493008"/>
+            <a:ext cx="3566160" cy="411480"/>
+          </a:xfrm>
+          <a:prstGeom prst="rect">
+            <a:avLst/>
+          </a:prstGeom>
+          <a:noFill/>
+          <a:ln/>
+        </p:spPr>
+        <p:txBody>
+          <a:bodyPr wrap="square" rtlCol="0" anchor="ctr"/>
+          <a:lstStyle/>
+          <a:p>
+            <a:pPr marL="0" indent="0">
+              <a:buNone/>
+            </a:pPr>
+            <a:endParaRPr lang="en-US" sz="1100" dirty="0"/>
+          </a:p>
+        </p:txBody>
+      </p:sp>
+      <p:sp>
+        <p:nvSpPr>
+          <p:cNvPr id="26" name="Text 22"/>
+          <p:cNvSpPr/>
+          <p:nvPr/>
+        </p:nvSpPr>
+        <p:spPr>
+          <a:xfrm>
+            <a:off x="548640" y="4608576"/>
+            <a:ext cx="8046720" cy="338328"/>
+          </a:xfrm>
+          <a:prstGeom prst="rect">
+            <a:avLst/>
+          </a:prstGeom>
+          <a:noFill/>
+          <a:ln/>
+        </p:spPr>
+        <p:txBody>
+          <a:bodyPr wrap="square" rtlCol="0" anchor="ctr"/>
+          <a:lstStyle/>
+          <a:p>
+            <a:pPr marL="0" indent="0">
+              <a:buNone/>
+            </a:pPr>
+            <a:endParaRPr lang="en-US" sz="1100" dirty="0"/>
+          </a:p>
+        </p:txBody>
+      </p:sp>
       <p:pic>
         <p:nvPicPr>
-          <p:cNvPr id="17" name="Image 1" descr="preencoded.png"/>
+          <p:cNvPr id="27" name="Kép 26">
+            <a:extLst>
+              <a:ext uri="{FF2B5EF4-FFF2-40B4-BE49-F238E27FC236}">
+                <a16:creationId xmlns:a16="http://schemas.microsoft.com/office/drawing/2014/main" id="{9181BADB-1724-4418-9124-F86B4F001943}"/>
+              </a:ext>
+            </a:extLst>
+          </p:cNvPr>
           <p:cNvPicPr>
             <a:picLocks noChangeAspect="1"/>
           </p:cNvPicPr>
@@ -7604,332 +9886,44 @@
         </p:blipFill>
         <p:spPr>
           <a:xfrm>
-            <a:off x="5074920" y="1051560"/>
-            <a:ext cx="548640" cy="548640"/>
+            <a:off x="6880822" y="1736074"/>
+            <a:ext cx="1577378" cy="1867948"/>
           </a:xfrm>
           <a:prstGeom prst="rect">
             <a:avLst/>
           </a:prstGeom>
         </p:spPr>
       </p:pic>
-      <p:sp>
-        <p:nvSpPr>
-          <p:cNvPr id="18" name="Text 14"/>
-          <p:cNvSpPr/>
-          <p:nvPr/>
-        </p:nvSpPr>
-        <p:spPr>
-          <a:xfrm>
-            <a:off x="5715000" y="1024128"/>
-            <a:ext cx="2834640" cy="548640"/>
-          </a:xfrm>
-          <a:prstGeom prst="rect">
-            <a:avLst/>
-          </a:prstGeom>
-          <a:noFill/>
-          <a:ln/>
-        </p:spPr>
-        <p:txBody>
-          <a:bodyPr wrap="square" rtlCol="0" anchor="ctr"/>
-          <a:lstStyle/>
-          <a:p>
-            <a:pPr marL="0" indent="0">
-              <a:buNone/>
-            </a:pPr>
-            <a:r>
-              <a:rPr lang="en-US" sz="1400" b="1" dirty="0">
-                <a:solidFill>
-                  <a:srgbClr val="FFFFFF"/>
-                </a:solidFill>
-                <a:latin typeface="Calibri" pitchFamily="34" charset="0"/>
-                <a:ea typeface="Calibri" pitchFamily="34" charset="-122"/>
-                <a:cs typeface="Calibri" pitchFamily="34" charset="-120"/>
-              </a:rPr>
-              <a:t>VPN – Virtual Private Network</a:t>
-            </a:r>
-            <a:endParaRPr lang="en-US" sz="1400" dirty="0"/>
-          </a:p>
-        </p:txBody>
-      </p:sp>
-      <p:sp>
-        <p:nvSpPr>
-          <p:cNvPr id="19" name="Text 15"/>
-          <p:cNvSpPr/>
-          <p:nvPr/>
-        </p:nvSpPr>
-        <p:spPr>
-          <a:xfrm>
-            <a:off x="5029200" y="1691640"/>
-            <a:ext cx="3566160" cy="274320"/>
-          </a:xfrm>
-          <a:prstGeom prst="rect">
-            <a:avLst/>
-          </a:prstGeom>
-          <a:noFill/>
-          <a:ln/>
-        </p:spPr>
-        <p:txBody>
-          <a:bodyPr wrap="square" rtlCol="0" anchor="ctr"/>
-          <a:lstStyle/>
-          <a:p>
-            <a:pPr marL="0" indent="0">
-              <a:buNone/>
-            </a:pPr>
-            <a:r>
-              <a:rPr lang="en-US" sz="1100" b="1" dirty="0">
-                <a:solidFill>
-                  <a:srgbClr val="F59E0B"/>
-                </a:solidFill>
-                <a:latin typeface="Calibri" pitchFamily="34" charset="0"/>
-                <a:ea typeface="Calibri" pitchFamily="34" charset="-122"/>
-                <a:cs typeface="Calibri" pitchFamily="34" charset="-120"/>
-              </a:rPr>
-              <a:t>Mit csinál:</a:t>
-            </a:r>
-            <a:endParaRPr lang="en-US" sz="1100" dirty="0"/>
-          </a:p>
-        </p:txBody>
-      </p:sp>
-      <p:sp>
-        <p:nvSpPr>
-          <p:cNvPr id="20" name="Text 16"/>
-          <p:cNvSpPr/>
-          <p:nvPr/>
-        </p:nvSpPr>
-        <p:spPr>
-          <a:xfrm>
-            <a:off x="5029200" y="1938528"/>
-            <a:ext cx="3566160" cy="411480"/>
-          </a:xfrm>
-          <a:prstGeom prst="rect">
-            <a:avLst/>
-          </a:prstGeom>
-          <a:noFill/>
-          <a:ln/>
-        </p:spPr>
-        <p:txBody>
-          <a:bodyPr wrap="square" rtlCol="0" anchor="ctr"/>
-          <a:lstStyle/>
-          <a:p>
-            <a:pPr marL="0" indent="0">
-              <a:buNone/>
-            </a:pPr>
-            <a:r>
-              <a:rPr lang="en-US" sz="1100" dirty="0">
-                <a:solidFill>
-                  <a:srgbClr val="C8D4F0"/>
-                </a:solidFill>
-                <a:latin typeface="Calibri" pitchFamily="34" charset="0"/>
-                <a:ea typeface="Calibri" pitchFamily="34" charset="-122"/>
-                <a:cs typeface="Calibri" pitchFamily="34" charset="-120"/>
-              </a:rPr>
-              <a:t>Biztonságos távoli kapcsolat a vállalati hálózathoz</a:t>
-            </a:r>
-            <a:endParaRPr lang="en-US" sz="1100" dirty="0"/>
-          </a:p>
-        </p:txBody>
-      </p:sp>
-      <p:sp>
-        <p:nvSpPr>
-          <p:cNvPr id="21" name="Text 17"/>
-          <p:cNvSpPr/>
-          <p:nvPr/>
-        </p:nvSpPr>
-        <p:spPr>
-          <a:xfrm>
-            <a:off x="5029200" y="2468880"/>
-            <a:ext cx="3566160" cy="274320"/>
-          </a:xfrm>
-          <a:prstGeom prst="rect">
-            <a:avLst/>
-          </a:prstGeom>
-          <a:noFill/>
-          <a:ln/>
-        </p:spPr>
-        <p:txBody>
-          <a:bodyPr wrap="square" rtlCol="0" anchor="ctr"/>
-          <a:lstStyle/>
-          <a:p>
-            <a:pPr marL="0" indent="0">
-              <a:buNone/>
-            </a:pPr>
-            <a:r>
-              <a:rPr lang="en-US" sz="1100" b="1" dirty="0">
-                <a:solidFill>
-                  <a:srgbClr val="F59E0B"/>
-                </a:solidFill>
-                <a:latin typeface="Calibri" pitchFamily="34" charset="0"/>
-                <a:ea typeface="Calibri" pitchFamily="34" charset="-122"/>
-                <a:cs typeface="Calibri" pitchFamily="34" charset="-120"/>
-              </a:rPr>
-              <a:t>Típusok:</a:t>
-            </a:r>
-            <a:endParaRPr lang="en-US" sz="1100" dirty="0"/>
-          </a:p>
-        </p:txBody>
-      </p:sp>
-      <p:sp>
-        <p:nvSpPr>
-          <p:cNvPr id="22" name="Text 18"/>
-          <p:cNvSpPr/>
-          <p:nvPr/>
-        </p:nvSpPr>
-        <p:spPr>
-          <a:xfrm>
-            <a:off x="5029200" y="2715768"/>
-            <a:ext cx="3566160" cy="411480"/>
-          </a:xfrm>
-          <a:prstGeom prst="rect">
-            <a:avLst/>
-          </a:prstGeom>
-          <a:noFill/>
-          <a:ln/>
-        </p:spPr>
-        <p:txBody>
-          <a:bodyPr wrap="square" rtlCol="0" anchor="ctr"/>
-          <a:lstStyle/>
-          <a:p>
-            <a:pPr marL="0" indent="0">
-              <a:buNone/>
-            </a:pPr>
-            <a:r>
-              <a:rPr lang="en-US" sz="1100" dirty="0">
-                <a:solidFill>
-                  <a:srgbClr val="C8D4F0"/>
-                </a:solidFill>
-                <a:latin typeface="Calibri" pitchFamily="34" charset="0"/>
-                <a:ea typeface="Calibri" pitchFamily="34" charset="-122"/>
-                <a:cs typeface="Calibri" pitchFamily="34" charset="-120"/>
-              </a:rPr>
-              <a:t>Site-to-site VPN (telephelyek)</a:t>
-            </a:r>
-            <a:endParaRPr lang="en-US" sz="1100" dirty="0"/>
-          </a:p>
-          <a:p>
-            <a:pPr marL="0" indent="0">
-              <a:buNone/>
-            </a:pPr>
-            <a:r>
-              <a:rPr lang="en-US" sz="1100" dirty="0">
-                <a:solidFill>
-                  <a:srgbClr val="C8D4F0"/>
-                </a:solidFill>
-                <a:latin typeface="Calibri" pitchFamily="34" charset="0"/>
-                <a:ea typeface="Calibri" pitchFamily="34" charset="-122"/>
-                <a:cs typeface="Calibri" pitchFamily="34" charset="-120"/>
-              </a:rPr>
-              <a:t>SSL VPN (távoli dolgozók)</a:t>
-            </a:r>
-            <a:endParaRPr lang="en-US" sz="1100" dirty="0"/>
-          </a:p>
-        </p:txBody>
-      </p:sp>
-      <p:sp>
-        <p:nvSpPr>
-          <p:cNvPr id="23" name="Text 19"/>
-          <p:cNvSpPr/>
-          <p:nvPr/>
-        </p:nvSpPr>
-        <p:spPr>
-          <a:xfrm>
-            <a:off x="5029200" y="3246120"/>
-            <a:ext cx="3566160" cy="274320"/>
-          </a:xfrm>
-          <a:prstGeom prst="rect">
-            <a:avLst/>
-          </a:prstGeom>
-          <a:noFill/>
-          <a:ln/>
-        </p:spPr>
-        <p:txBody>
-          <a:bodyPr wrap="square" rtlCol="0" anchor="ctr"/>
-          <a:lstStyle/>
-          <a:p>
-            <a:pPr marL="0" indent="0">
-              <a:buNone/>
-            </a:pPr>
-            <a:r>
-              <a:rPr lang="en-US" sz="1100" b="1" dirty="0">
-                <a:solidFill>
-                  <a:srgbClr val="F59E0B"/>
-                </a:solidFill>
-                <a:latin typeface="Calibri" pitchFamily="34" charset="0"/>
-                <a:ea typeface="Calibri" pitchFamily="34" charset="-122"/>
-                <a:cs typeface="Calibri" pitchFamily="34" charset="-120"/>
-              </a:rPr>
-              <a:t>Titkosítás:</a:t>
-            </a:r>
-            <a:endParaRPr lang="en-US" sz="1100" dirty="0"/>
-          </a:p>
-        </p:txBody>
-      </p:sp>
-      <p:sp>
-        <p:nvSpPr>
-          <p:cNvPr id="24" name="Text 20"/>
-          <p:cNvSpPr/>
-          <p:nvPr/>
-        </p:nvSpPr>
-        <p:spPr>
-          <a:xfrm>
-            <a:off x="5029200" y="3493008"/>
-            <a:ext cx="3566160" cy="411480"/>
-          </a:xfrm>
-          <a:prstGeom prst="rect">
-            <a:avLst/>
-          </a:prstGeom>
-          <a:noFill/>
-          <a:ln/>
-        </p:spPr>
-        <p:txBody>
-          <a:bodyPr wrap="square" rtlCol="0" anchor="ctr"/>
-          <a:lstStyle/>
-          <a:p>
-            <a:pPr marL="0" indent="0">
-              <a:buNone/>
-            </a:pPr>
-            <a:r>
-              <a:rPr lang="en-US" sz="1100" dirty="0">
-                <a:solidFill>
-                  <a:srgbClr val="C8D4F0"/>
-                </a:solidFill>
-                <a:latin typeface="Calibri" pitchFamily="34" charset="0"/>
-                <a:ea typeface="Calibri" pitchFamily="34" charset="-122"/>
-                <a:cs typeface="Calibri" pitchFamily="34" charset="-120"/>
-              </a:rPr>
-              <a:t>IPSec protokoll  •  AES-256</a:t>
-            </a:r>
-            <a:endParaRPr lang="en-US" sz="1100" dirty="0"/>
-          </a:p>
-        </p:txBody>
-      </p:sp>
-      <p:sp>
-        <p:nvSpPr>
-          <p:cNvPr id="26" name="Text 22"/>
-          <p:cNvSpPr/>
-          <p:nvPr/>
-        </p:nvSpPr>
-        <p:spPr>
-          <a:xfrm>
-            <a:off x="548640" y="4608576"/>
-            <a:ext cx="8046720" cy="338328"/>
-          </a:xfrm>
-          <a:prstGeom prst="rect">
-            <a:avLst/>
-          </a:prstGeom>
-          <a:noFill/>
-          <a:ln/>
-        </p:spPr>
-        <p:txBody>
-          <a:bodyPr wrap="square" rtlCol="0" anchor="ctr"/>
-          <a:lstStyle/>
-          <a:p>
-            <a:pPr marL="0" indent="0">
-              <a:buNone/>
-            </a:pPr>
-            <a:endParaRPr lang="en-US" sz="1100" dirty="0"/>
-          </a:p>
-        </p:txBody>
-      </p:sp>
+      <p:pic>
+        <p:nvPicPr>
+          <p:cNvPr id="29" name="Kép 28">
+            <a:extLst>
+              <a:ext uri="{FF2B5EF4-FFF2-40B4-BE49-F238E27FC236}">
+                <a16:creationId xmlns:a16="http://schemas.microsoft.com/office/drawing/2014/main" id="{27B056B6-74FF-433B-984D-765B791D6D2A}"/>
+              </a:ext>
+            </a:extLst>
+          </p:cNvPr>
+          <p:cNvPicPr>
+            <a:picLocks noChangeAspect="1"/>
+          </p:cNvPicPr>
+          <p:nvPr/>
+        </p:nvPicPr>
+        <p:blipFill>
+          <a:blip r:embed="rId5"/>
+          <a:stretch>
+            <a:fillRect/>
+          </a:stretch>
+        </p:blipFill>
+        <p:spPr>
+          <a:xfrm>
+            <a:off x="5153422" y="1736074"/>
+            <a:ext cx="1407360" cy="1867948"/>
+          </a:xfrm>
+          <a:prstGeom prst="rect">
+            <a:avLst/>
+          </a:prstGeom>
+        </p:spPr>
+      </p:pic>
     </p:spTree>
   </p:cSld>
   <p:clrMapOvr>
@@ -7939,6 +9933,1860 @@
 </file>
 
 <file path=ppt/slides/slide6.xml><?xml version="1.0" encoding="utf-8"?>
+<p:sld xmlns:a="http://schemas.openxmlformats.org/drawingml/2006/main" xmlns:r="http://schemas.openxmlformats.org/officeDocument/2006/relationships" xmlns:p="http://schemas.openxmlformats.org/presentationml/2006/main">
+  <p:cSld>
+    <p:bg>
+      <p:bgPr>
+        <a:solidFill>
+          <a:srgbClr val="1A1F35"/>
+        </a:solidFill>
+        <a:effectLst/>
+      </p:bgPr>
+    </p:bg>
+    <p:spTree>
+      <p:nvGrpSpPr>
+        <p:cNvPr id="1" name=""/>
+        <p:cNvGrpSpPr/>
+        <p:nvPr/>
+      </p:nvGrpSpPr>
+      <p:grpSpPr>
+        <a:xfrm>
+          <a:off x="0" y="0"/>
+          <a:ext cx="0" cy="0"/>
+          <a:chOff x="0" y="0"/>
+          <a:chExt cx="0" cy="0"/>
+        </a:xfrm>
+      </p:grpSpPr>
+      <p:sp>
+        <p:nvSpPr>
+          <p:cNvPr id="2" name="Shape 0"/>
+          <p:cNvSpPr/>
+          <p:nvPr/>
+        </p:nvSpPr>
+        <p:spPr>
+          <a:xfrm>
+            <a:off x="0" y="0"/>
+            <a:ext cx="9144000" cy="777240"/>
+          </a:xfrm>
+          <a:prstGeom prst="rect">
+            <a:avLst/>
+          </a:prstGeom>
+          <a:solidFill>
+            <a:srgbClr val="2C3566"/>
+          </a:solidFill>
+          <a:ln w="12700">
+            <a:solidFill>
+              <a:srgbClr val="2C3566"/>
+            </a:solidFill>
+            <a:prstDash val="solid"/>
+          </a:ln>
+        </p:spPr>
+      </p:sp>
+      <p:sp>
+        <p:nvSpPr>
+          <p:cNvPr id="3" name="Shape 1"/>
+          <p:cNvSpPr/>
+          <p:nvPr/>
+        </p:nvSpPr>
+        <p:spPr>
+          <a:xfrm>
+            <a:off x="0" y="0"/>
+            <a:ext cx="9144000" cy="64008"/>
+          </a:xfrm>
+          <a:prstGeom prst="rect">
+            <a:avLst/>
+          </a:prstGeom>
+          <a:solidFill>
+            <a:srgbClr val="4F8EF7"/>
+          </a:solidFill>
+          <a:ln w="12700">
+            <a:solidFill>
+              <a:srgbClr val="4F8EF7"/>
+            </a:solidFill>
+            <a:prstDash val="solid"/>
+          </a:ln>
+        </p:spPr>
+      </p:sp>
+      <p:sp>
+        <p:nvSpPr>
+          <p:cNvPr id="4" name="Text 2"/>
+          <p:cNvSpPr/>
+          <p:nvPr/>
+        </p:nvSpPr>
+        <p:spPr>
+          <a:xfrm>
+            <a:off x="365760" y="137160"/>
+            <a:ext cx="8412480" cy="502920"/>
+          </a:xfrm>
+          <a:prstGeom prst="rect">
+            <a:avLst/>
+          </a:prstGeom>
+          <a:noFill/>
+          <a:ln/>
+        </p:spPr>
+        <p:txBody>
+          <a:bodyPr wrap="square" rtlCol="0" anchor="ctr"/>
+          <a:lstStyle/>
+          <a:p>
+            <a:pPr marL="0" indent="0">
+              <a:buNone/>
+            </a:pPr>
+            <a:r>
+              <a:rPr lang="en-US" sz="2000" b="1" dirty="0">
+                <a:solidFill>
+                  <a:srgbClr val="FFFFFF"/>
+                </a:solidFill>
+                <a:latin typeface="Calibri" pitchFamily="34" charset="0"/>
+                <a:ea typeface="Calibri" pitchFamily="34" charset="-122"/>
+                <a:cs typeface="Calibri" pitchFamily="34" charset="-120"/>
+              </a:rPr>
+              <a:t>🏢  </a:t>
+            </a:r>
+            <a:r>
+              <a:rPr lang="hu-HU" sz="2000" b="1" dirty="0">
+                <a:solidFill>
+                  <a:srgbClr val="FFFFFF"/>
+                </a:solidFill>
+                <a:latin typeface="Calibri" pitchFamily="34" charset="0"/>
+                <a:ea typeface="Calibri" pitchFamily="34" charset="-122"/>
+                <a:cs typeface="Calibri" pitchFamily="34" charset="-120"/>
+              </a:rPr>
+              <a:t>WINDOWS SZERVER</a:t>
+            </a:r>
+            <a:endParaRPr lang="en-US" sz="2000" dirty="0"/>
+          </a:p>
+        </p:txBody>
+      </p:sp>
+      <p:sp>
+        <p:nvSpPr>
+          <p:cNvPr id="5" name="Shape 3"/>
+          <p:cNvSpPr/>
+          <p:nvPr/>
+        </p:nvSpPr>
+        <p:spPr>
+          <a:xfrm>
+            <a:off x="365760" y="960120"/>
+            <a:ext cx="3840480" cy="3657600"/>
+          </a:xfrm>
+          <a:prstGeom prst="rect">
+            <a:avLst/>
+          </a:prstGeom>
+          <a:solidFill>
+            <a:srgbClr val="242A4A"/>
+          </a:solidFill>
+          <a:ln w="12700">
+            <a:solidFill>
+              <a:srgbClr val="4F8EF7"/>
+            </a:solidFill>
+            <a:prstDash val="solid"/>
+          </a:ln>
+        </p:spPr>
+      </p:sp>
+      <p:sp>
+        <p:nvSpPr>
+          <p:cNvPr id="7" name="Text 4"/>
+          <p:cNvSpPr/>
+          <p:nvPr/>
+        </p:nvSpPr>
+        <p:spPr>
+          <a:xfrm>
+            <a:off x="457200" y="4251960"/>
+            <a:ext cx="3657600" cy="365760"/>
+          </a:xfrm>
+          <a:prstGeom prst="rect">
+            <a:avLst/>
+          </a:prstGeom>
+          <a:noFill/>
+          <a:ln/>
+        </p:spPr>
+        <p:txBody>
+          <a:bodyPr wrap="square" rtlCol="0" anchor="ctr"/>
+          <a:lstStyle/>
+          <a:p>
+            <a:pPr marL="0" indent="0" algn="ctr">
+              <a:buNone/>
+            </a:pPr>
+            <a:endParaRPr lang="en-US" sz="1000" dirty="0"/>
+          </a:p>
+        </p:txBody>
+      </p:sp>
+      <p:sp>
+        <p:nvSpPr>
+          <p:cNvPr id="8" name="Shape 5"/>
+          <p:cNvSpPr/>
+          <p:nvPr/>
+        </p:nvSpPr>
+        <p:spPr>
+          <a:xfrm>
+            <a:off x="4572000" y="960120"/>
+            <a:ext cx="4114800" cy="594360"/>
+          </a:xfrm>
+          <a:prstGeom prst="rect">
+            <a:avLst/>
+          </a:prstGeom>
+          <a:solidFill>
+            <a:srgbClr val="242A4A"/>
+          </a:solidFill>
+          <a:ln w="12700">
+            <a:solidFill>
+              <a:srgbClr val="2C3566"/>
+            </a:solidFill>
+            <a:prstDash val="solid"/>
+          </a:ln>
+        </p:spPr>
+      </p:sp>
+      <p:sp>
+        <p:nvSpPr>
+          <p:cNvPr id="9" name="Shape 6"/>
+          <p:cNvSpPr/>
+          <p:nvPr/>
+        </p:nvSpPr>
+        <p:spPr>
+          <a:xfrm>
+            <a:off x="4572000" y="960120"/>
+            <a:ext cx="73152" cy="594360"/>
+          </a:xfrm>
+          <a:prstGeom prst="rect">
+            <a:avLst/>
+          </a:prstGeom>
+          <a:solidFill>
+            <a:srgbClr val="4F8EF7"/>
+          </a:solidFill>
+          <a:ln w="12700">
+            <a:solidFill>
+              <a:srgbClr val="4F8EF7"/>
+            </a:solidFill>
+            <a:prstDash val="solid"/>
+          </a:ln>
+        </p:spPr>
+      </p:sp>
+      <p:sp>
+        <p:nvSpPr>
+          <p:cNvPr id="10" name="Text 7"/>
+          <p:cNvSpPr/>
+          <p:nvPr/>
+        </p:nvSpPr>
+        <p:spPr>
+          <a:xfrm>
+            <a:off x="5751576" y="1155192"/>
+            <a:ext cx="1828800" cy="256032"/>
+          </a:xfrm>
+          <a:prstGeom prst="rect">
+            <a:avLst/>
+          </a:prstGeom>
+          <a:noFill/>
+          <a:ln/>
+        </p:spPr>
+        <p:txBody>
+          <a:bodyPr wrap="square" rtlCol="0" anchor="ctr"/>
+          <a:lstStyle/>
+          <a:p>
+            <a:pPr marL="0" indent="0">
+              <a:buNone/>
+            </a:pPr>
+            <a:r>
+              <a:rPr lang="en-US" sz="1000" b="1" dirty="0">
+                <a:solidFill>
+                  <a:srgbClr val="7CB3FF"/>
+                </a:solidFill>
+                <a:latin typeface="Calibri" pitchFamily="34" charset="0"/>
+                <a:ea typeface="Calibri" pitchFamily="34" charset="-122"/>
+                <a:cs typeface="Calibri" pitchFamily="34" charset="-120"/>
+              </a:rPr>
+              <a:t>📍  </a:t>
+            </a:r>
+            <a:r>
+              <a:rPr lang="hu-HU" sz="1400" b="1" dirty="0">
+                <a:solidFill>
+                  <a:srgbClr val="7CB3FF"/>
+                </a:solidFill>
+                <a:latin typeface="Calibri" pitchFamily="34" charset="0"/>
+                <a:ea typeface="Calibri" pitchFamily="34" charset="-122"/>
+                <a:cs typeface="Calibri" pitchFamily="34" charset="-120"/>
+              </a:rPr>
+              <a:t>KÖVETELMÉNYEK</a:t>
+            </a:r>
+            <a:endParaRPr lang="en-US" sz="1400" dirty="0"/>
+          </a:p>
+        </p:txBody>
+      </p:sp>
+      <p:sp>
+        <p:nvSpPr>
+          <p:cNvPr id="11" name="Text 8"/>
+          <p:cNvSpPr/>
+          <p:nvPr/>
+        </p:nvSpPr>
+        <p:spPr>
+          <a:xfrm>
+            <a:off x="4709160" y="1234440"/>
+            <a:ext cx="3840480" cy="274320"/>
+          </a:xfrm>
+          <a:prstGeom prst="rect">
+            <a:avLst/>
+          </a:prstGeom>
+          <a:noFill/>
+          <a:ln/>
+        </p:spPr>
+        <p:txBody>
+          <a:bodyPr wrap="square" rtlCol="0" anchor="ctr"/>
+          <a:lstStyle/>
+          <a:p>
+            <a:pPr marL="0" indent="0">
+              <a:buNone/>
+            </a:pPr>
+            <a:endParaRPr lang="en-US" sz="1300" dirty="0"/>
+          </a:p>
+        </p:txBody>
+      </p:sp>
+      <p:sp>
+        <p:nvSpPr>
+          <p:cNvPr id="12" name="Shape 9"/>
+          <p:cNvSpPr/>
+          <p:nvPr/>
+        </p:nvSpPr>
+        <p:spPr>
+          <a:xfrm>
+            <a:off x="4572000" y="1645920"/>
+            <a:ext cx="4114800" cy="594360"/>
+          </a:xfrm>
+          <a:prstGeom prst="rect">
+            <a:avLst/>
+          </a:prstGeom>
+          <a:solidFill>
+            <a:srgbClr val="242A4A"/>
+          </a:solidFill>
+          <a:ln w="12700">
+            <a:solidFill>
+              <a:srgbClr val="2C3566"/>
+            </a:solidFill>
+            <a:prstDash val="solid"/>
+          </a:ln>
+        </p:spPr>
+        <p:txBody>
+          <a:bodyPr/>
+          <a:lstStyle/>
+          <a:p>
+            <a:endParaRPr lang="hu-HU" dirty="0"/>
+          </a:p>
+        </p:txBody>
+      </p:sp>
+      <p:sp>
+        <p:nvSpPr>
+          <p:cNvPr id="13" name="Shape 10"/>
+          <p:cNvSpPr/>
+          <p:nvPr/>
+        </p:nvSpPr>
+        <p:spPr>
+          <a:xfrm>
+            <a:off x="4572000" y="1645920"/>
+            <a:ext cx="73152" cy="594360"/>
+          </a:xfrm>
+          <a:prstGeom prst="rect">
+            <a:avLst/>
+          </a:prstGeom>
+          <a:solidFill>
+            <a:srgbClr val="4F8EF7"/>
+          </a:solidFill>
+          <a:ln w="12700">
+            <a:solidFill>
+              <a:srgbClr val="4F8EF7"/>
+            </a:solidFill>
+            <a:prstDash val="solid"/>
+          </a:ln>
+        </p:spPr>
+      </p:sp>
+      <p:sp>
+        <p:nvSpPr>
+          <p:cNvPr id="14" name="Text 11"/>
+          <p:cNvSpPr/>
+          <p:nvPr/>
+        </p:nvSpPr>
+        <p:spPr>
+          <a:xfrm>
+            <a:off x="4709160" y="1691640"/>
+            <a:ext cx="1828800" cy="256032"/>
+          </a:xfrm>
+          <a:prstGeom prst="rect">
+            <a:avLst/>
+          </a:prstGeom>
+          <a:noFill/>
+          <a:ln/>
+        </p:spPr>
+        <p:txBody>
+          <a:bodyPr wrap="square" rtlCol="0" anchor="ctr"/>
+          <a:lstStyle/>
+          <a:p>
+            <a:pPr marL="0" indent="0">
+              <a:buNone/>
+            </a:pPr>
+            <a:endParaRPr lang="en-US" sz="1000" dirty="0"/>
+          </a:p>
+        </p:txBody>
+      </p:sp>
+      <p:sp>
+        <p:nvSpPr>
+          <p:cNvPr id="15" name="Text 12"/>
+          <p:cNvSpPr/>
+          <p:nvPr/>
+        </p:nvSpPr>
+        <p:spPr>
+          <a:xfrm>
+            <a:off x="5925725" y="1819656"/>
+            <a:ext cx="3840480" cy="274320"/>
+          </a:xfrm>
+          <a:prstGeom prst="rect">
+            <a:avLst/>
+          </a:prstGeom>
+          <a:noFill/>
+          <a:ln/>
+        </p:spPr>
+        <p:txBody>
+          <a:bodyPr wrap="square" rtlCol="0" anchor="ctr"/>
+          <a:lstStyle/>
+          <a:p>
+            <a:pPr marL="0" indent="0">
+              <a:buNone/>
+            </a:pPr>
+            <a:r>
+              <a:rPr lang="hu-HU" sz="1300" b="1" dirty="0">
+                <a:solidFill>
+                  <a:srgbClr val="FFFFFF"/>
+                </a:solidFill>
+                <a:latin typeface="Calibri" pitchFamily="34" charset="0"/>
+                <a:ea typeface="Calibri" pitchFamily="34" charset="-122"/>
+                <a:cs typeface="Calibri" pitchFamily="34" charset="-120"/>
+              </a:rPr>
+              <a:t>ACTIVE DIRECTORY</a:t>
+            </a:r>
+            <a:endParaRPr lang="en-US" sz="1300" dirty="0"/>
+          </a:p>
+        </p:txBody>
+      </p:sp>
+      <p:sp>
+        <p:nvSpPr>
+          <p:cNvPr id="16" name="Shape 13"/>
+          <p:cNvSpPr/>
+          <p:nvPr/>
+        </p:nvSpPr>
+        <p:spPr>
+          <a:xfrm>
+            <a:off x="4572000" y="2331720"/>
+            <a:ext cx="4114800" cy="594360"/>
+          </a:xfrm>
+          <a:prstGeom prst="rect">
+            <a:avLst/>
+          </a:prstGeom>
+          <a:solidFill>
+            <a:srgbClr val="242A4A"/>
+          </a:solidFill>
+          <a:ln w="12700">
+            <a:solidFill>
+              <a:srgbClr val="2C3566"/>
+            </a:solidFill>
+            <a:prstDash val="solid"/>
+          </a:ln>
+        </p:spPr>
+        <p:txBody>
+          <a:bodyPr/>
+          <a:lstStyle/>
+          <a:p>
+            <a:endParaRPr lang="hu-HU" dirty="0"/>
+          </a:p>
+        </p:txBody>
+      </p:sp>
+      <p:sp>
+        <p:nvSpPr>
+          <p:cNvPr id="17" name="Shape 14"/>
+          <p:cNvSpPr/>
+          <p:nvPr/>
+        </p:nvSpPr>
+        <p:spPr>
+          <a:xfrm>
+            <a:off x="4572000" y="2331720"/>
+            <a:ext cx="73152" cy="594360"/>
+          </a:xfrm>
+          <a:prstGeom prst="rect">
+            <a:avLst/>
+          </a:prstGeom>
+          <a:solidFill>
+            <a:srgbClr val="4F8EF7"/>
+          </a:solidFill>
+          <a:ln w="12700">
+            <a:solidFill>
+              <a:srgbClr val="4F8EF7"/>
+            </a:solidFill>
+            <a:prstDash val="solid"/>
+          </a:ln>
+        </p:spPr>
+      </p:sp>
+      <p:sp>
+        <p:nvSpPr>
+          <p:cNvPr id="19" name="Text 16"/>
+          <p:cNvSpPr/>
+          <p:nvPr/>
+        </p:nvSpPr>
+        <p:spPr>
+          <a:xfrm>
+            <a:off x="4709160" y="2606040"/>
+            <a:ext cx="3840480" cy="274320"/>
+          </a:xfrm>
+          <a:prstGeom prst="rect">
+            <a:avLst/>
+          </a:prstGeom>
+          <a:noFill/>
+          <a:ln/>
+        </p:spPr>
+        <p:txBody>
+          <a:bodyPr wrap="square" rtlCol="0" anchor="ctr"/>
+          <a:lstStyle/>
+          <a:p>
+            <a:pPr marL="0" indent="0">
+              <a:buNone/>
+            </a:pPr>
+            <a:endParaRPr lang="en-US" sz="1300" dirty="0"/>
+          </a:p>
+        </p:txBody>
+      </p:sp>
+      <p:sp>
+        <p:nvSpPr>
+          <p:cNvPr id="22" name="Text 19"/>
+          <p:cNvSpPr/>
+          <p:nvPr/>
+        </p:nvSpPr>
+        <p:spPr>
+          <a:xfrm>
+            <a:off x="4709160" y="3063240"/>
+            <a:ext cx="1828800" cy="256032"/>
+          </a:xfrm>
+          <a:prstGeom prst="rect">
+            <a:avLst/>
+          </a:prstGeom>
+          <a:noFill/>
+          <a:ln/>
+        </p:spPr>
+        <p:txBody>
+          <a:bodyPr wrap="square" rtlCol="0" anchor="ctr"/>
+          <a:lstStyle/>
+          <a:p>
+            <a:pPr marL="0" indent="0">
+              <a:buNone/>
+            </a:pPr>
+            <a:endParaRPr lang="en-US" sz="1000" dirty="0"/>
+          </a:p>
+        </p:txBody>
+      </p:sp>
+      <p:sp>
+        <p:nvSpPr>
+          <p:cNvPr id="23" name="Text 20"/>
+          <p:cNvSpPr/>
+          <p:nvPr/>
+        </p:nvSpPr>
+        <p:spPr>
+          <a:xfrm>
+            <a:off x="4709160" y="3291840"/>
+            <a:ext cx="3840480" cy="274320"/>
+          </a:xfrm>
+          <a:prstGeom prst="rect">
+            <a:avLst/>
+          </a:prstGeom>
+          <a:noFill/>
+          <a:ln/>
+        </p:spPr>
+        <p:txBody>
+          <a:bodyPr wrap="square" rtlCol="0" anchor="ctr"/>
+          <a:lstStyle/>
+          <a:p>
+            <a:pPr marL="0" indent="0">
+              <a:buNone/>
+            </a:pPr>
+            <a:endParaRPr lang="en-US" sz="1300" dirty="0"/>
+          </a:p>
+        </p:txBody>
+      </p:sp>
+      <p:sp>
+        <p:nvSpPr>
+          <p:cNvPr id="26" name="Text 23"/>
+          <p:cNvSpPr/>
+          <p:nvPr/>
+        </p:nvSpPr>
+        <p:spPr>
+          <a:xfrm>
+            <a:off x="4709160" y="3749040"/>
+            <a:ext cx="1828800" cy="256032"/>
+          </a:xfrm>
+          <a:prstGeom prst="rect">
+            <a:avLst/>
+          </a:prstGeom>
+          <a:noFill/>
+          <a:ln/>
+        </p:spPr>
+        <p:txBody>
+          <a:bodyPr wrap="square" rtlCol="0" anchor="ctr"/>
+          <a:lstStyle/>
+          <a:p>
+            <a:pPr marL="0" indent="0">
+              <a:buNone/>
+            </a:pPr>
+            <a:endParaRPr lang="en-US" sz="1000" dirty="0"/>
+          </a:p>
+        </p:txBody>
+      </p:sp>
+      <p:sp>
+        <p:nvSpPr>
+          <p:cNvPr id="27" name="Text 24"/>
+          <p:cNvSpPr/>
+          <p:nvPr/>
+        </p:nvSpPr>
+        <p:spPr>
+          <a:xfrm>
+            <a:off x="6358078" y="2483349"/>
+            <a:ext cx="3840480" cy="274320"/>
+          </a:xfrm>
+          <a:prstGeom prst="rect">
+            <a:avLst/>
+          </a:prstGeom>
+          <a:noFill/>
+          <a:ln/>
+        </p:spPr>
+        <p:txBody>
+          <a:bodyPr wrap="square" rtlCol="0" anchor="ctr"/>
+          <a:lstStyle/>
+          <a:p>
+            <a:pPr marL="0" indent="0">
+              <a:buNone/>
+            </a:pPr>
+            <a:r>
+              <a:rPr lang="hu-HU" sz="1300" b="1" dirty="0">
+                <a:solidFill>
+                  <a:schemeClr val="bg1"/>
+                </a:solidFill>
+                <a:latin typeface="+mj-lt"/>
+              </a:rPr>
+              <a:t>DHCP</a:t>
+            </a:r>
+            <a:endParaRPr lang="en-US" sz="1300" b="1" dirty="0">
+              <a:solidFill>
+                <a:schemeClr val="bg1"/>
+              </a:solidFill>
+              <a:latin typeface="+mj-lt"/>
+            </a:endParaRPr>
+          </a:p>
+        </p:txBody>
+      </p:sp>
+      <p:sp>
+        <p:nvSpPr>
+          <p:cNvPr id="29" name="Text 26"/>
+          <p:cNvSpPr/>
+          <p:nvPr/>
+        </p:nvSpPr>
+        <p:spPr>
+          <a:xfrm>
+            <a:off x="4663440" y="4526280"/>
+            <a:ext cx="3931920" cy="411480"/>
+          </a:xfrm>
+          <a:prstGeom prst="rect">
+            <a:avLst/>
+          </a:prstGeom>
+          <a:noFill/>
+          <a:ln/>
+        </p:spPr>
+        <p:txBody>
+          <a:bodyPr wrap="square" rtlCol="0" anchor="ctr"/>
+          <a:lstStyle/>
+          <a:p>
+            <a:pPr marL="0" indent="0">
+              <a:buNone/>
+            </a:pPr>
+            <a:endParaRPr lang="en-US" sz="1100" dirty="0"/>
+          </a:p>
+        </p:txBody>
+      </p:sp>
+      <p:pic>
+        <p:nvPicPr>
+          <p:cNvPr id="20" name="Kép 19">
+            <a:extLst>
+              <a:ext uri="{FF2B5EF4-FFF2-40B4-BE49-F238E27FC236}">
+                <a16:creationId xmlns:a16="http://schemas.microsoft.com/office/drawing/2014/main" id="{26278D47-7FF5-490D-83B8-C1C3A369B608}"/>
+              </a:ext>
+            </a:extLst>
+          </p:cNvPr>
+          <p:cNvPicPr>
+            <a:picLocks noChangeAspect="1"/>
+          </p:cNvPicPr>
+          <p:nvPr/>
+        </p:nvPicPr>
+        <p:blipFill rotWithShape="1">
+          <a:blip r:embed="rId3"/>
+          <a:srcRect r="463" b="6744"/>
+          <a:stretch/>
+        </p:blipFill>
+        <p:spPr>
+          <a:xfrm>
+            <a:off x="511198" y="1907755"/>
+            <a:ext cx="3493874" cy="1841285"/>
+          </a:xfrm>
+          <a:prstGeom prst="rect">
+            <a:avLst/>
+          </a:prstGeom>
+        </p:spPr>
+      </p:pic>
+      <p:sp>
+        <p:nvSpPr>
+          <p:cNvPr id="30" name="Shape 13">
+            <a:extLst>
+              <a:ext uri="{FF2B5EF4-FFF2-40B4-BE49-F238E27FC236}">
+                <a16:creationId xmlns:a16="http://schemas.microsoft.com/office/drawing/2014/main" id="{C2C452EA-EDB1-409A-9532-C1FC2FF63BEB}"/>
+              </a:ext>
+            </a:extLst>
+          </p:cNvPr>
+          <p:cNvSpPr/>
+          <p:nvPr/>
+        </p:nvSpPr>
+        <p:spPr>
+          <a:xfrm>
+            <a:off x="4572000" y="3012149"/>
+            <a:ext cx="4114800" cy="594360"/>
+          </a:xfrm>
+          <a:prstGeom prst="rect">
+            <a:avLst/>
+          </a:prstGeom>
+          <a:solidFill>
+            <a:srgbClr val="242A4A"/>
+          </a:solidFill>
+          <a:ln w="12700">
+            <a:solidFill>
+              <a:srgbClr val="2C3566"/>
+            </a:solidFill>
+            <a:prstDash val="solid"/>
+          </a:ln>
+        </p:spPr>
+        <p:txBody>
+          <a:bodyPr/>
+          <a:lstStyle/>
+          <a:p>
+            <a:endParaRPr lang="hu-HU" dirty="0"/>
+          </a:p>
+        </p:txBody>
+      </p:sp>
+      <p:sp>
+        <p:nvSpPr>
+          <p:cNvPr id="31" name="Shape 13">
+            <a:extLst>
+              <a:ext uri="{FF2B5EF4-FFF2-40B4-BE49-F238E27FC236}">
+                <a16:creationId xmlns:a16="http://schemas.microsoft.com/office/drawing/2014/main" id="{273AD76D-4353-42A4-9B64-47A9BF936354}"/>
+              </a:ext>
+            </a:extLst>
+          </p:cNvPr>
+          <p:cNvSpPr/>
+          <p:nvPr/>
+        </p:nvSpPr>
+        <p:spPr>
+          <a:xfrm>
+            <a:off x="4572000" y="3691128"/>
+            <a:ext cx="4114800" cy="594360"/>
+          </a:xfrm>
+          <a:prstGeom prst="rect">
+            <a:avLst/>
+          </a:prstGeom>
+          <a:solidFill>
+            <a:srgbClr val="242A4A"/>
+          </a:solidFill>
+          <a:ln w="12700">
+            <a:solidFill>
+              <a:srgbClr val="2C3566"/>
+            </a:solidFill>
+            <a:prstDash val="solid"/>
+          </a:ln>
+        </p:spPr>
+        <p:txBody>
+          <a:bodyPr/>
+          <a:lstStyle/>
+          <a:p>
+            <a:endParaRPr lang="hu-HU" dirty="0"/>
+          </a:p>
+        </p:txBody>
+      </p:sp>
+      <p:sp>
+        <p:nvSpPr>
+          <p:cNvPr id="32" name="Shape 13">
+            <a:extLst>
+              <a:ext uri="{FF2B5EF4-FFF2-40B4-BE49-F238E27FC236}">
+                <a16:creationId xmlns:a16="http://schemas.microsoft.com/office/drawing/2014/main" id="{FE7E742C-133C-4C72-A8F8-AA9EAB15D747}"/>
+              </a:ext>
+            </a:extLst>
+          </p:cNvPr>
+          <p:cNvSpPr/>
+          <p:nvPr/>
+        </p:nvSpPr>
+        <p:spPr>
+          <a:xfrm>
+            <a:off x="4572000" y="4370107"/>
+            <a:ext cx="4114800" cy="594360"/>
+          </a:xfrm>
+          <a:prstGeom prst="rect">
+            <a:avLst/>
+          </a:prstGeom>
+          <a:solidFill>
+            <a:srgbClr val="242A4A"/>
+          </a:solidFill>
+          <a:ln w="12700">
+            <a:solidFill>
+              <a:srgbClr val="2C3566"/>
+            </a:solidFill>
+            <a:prstDash val="solid"/>
+          </a:ln>
+        </p:spPr>
+        <p:txBody>
+          <a:bodyPr/>
+          <a:lstStyle/>
+          <a:p>
+            <a:endParaRPr lang="hu-HU" dirty="0"/>
+          </a:p>
+        </p:txBody>
+      </p:sp>
+      <p:sp>
+        <p:nvSpPr>
+          <p:cNvPr id="34" name="Shape 14">
+            <a:extLst>
+              <a:ext uri="{FF2B5EF4-FFF2-40B4-BE49-F238E27FC236}">
+                <a16:creationId xmlns:a16="http://schemas.microsoft.com/office/drawing/2014/main" id="{B6B1E06E-8763-425A-8A18-C2968D1EFB05}"/>
+              </a:ext>
+            </a:extLst>
+          </p:cNvPr>
+          <p:cNvSpPr/>
+          <p:nvPr/>
+        </p:nvSpPr>
+        <p:spPr>
+          <a:xfrm>
+            <a:off x="4567428" y="3012149"/>
+            <a:ext cx="73152" cy="594360"/>
+          </a:xfrm>
+          <a:prstGeom prst="rect">
+            <a:avLst/>
+          </a:prstGeom>
+          <a:solidFill>
+            <a:srgbClr val="4F8EF7"/>
+          </a:solidFill>
+          <a:ln w="12700">
+            <a:solidFill>
+              <a:srgbClr val="4F8EF7"/>
+            </a:solidFill>
+            <a:prstDash val="solid"/>
+          </a:ln>
+        </p:spPr>
+      </p:sp>
+      <p:sp>
+        <p:nvSpPr>
+          <p:cNvPr id="36" name="Shape 14">
+            <a:extLst>
+              <a:ext uri="{FF2B5EF4-FFF2-40B4-BE49-F238E27FC236}">
+                <a16:creationId xmlns:a16="http://schemas.microsoft.com/office/drawing/2014/main" id="{31616C5E-3E75-4A4C-A2E9-5FA0D517CB22}"/>
+              </a:ext>
+            </a:extLst>
+          </p:cNvPr>
+          <p:cNvSpPr/>
+          <p:nvPr/>
+        </p:nvSpPr>
+        <p:spPr>
+          <a:xfrm>
+            <a:off x="4572000" y="3701627"/>
+            <a:ext cx="73152" cy="594360"/>
+          </a:xfrm>
+          <a:prstGeom prst="rect">
+            <a:avLst/>
+          </a:prstGeom>
+          <a:solidFill>
+            <a:srgbClr val="4F8EF7"/>
+          </a:solidFill>
+          <a:ln w="12700">
+            <a:solidFill>
+              <a:srgbClr val="4F8EF7"/>
+            </a:solidFill>
+            <a:prstDash val="solid"/>
+          </a:ln>
+        </p:spPr>
+      </p:sp>
+      <p:sp>
+        <p:nvSpPr>
+          <p:cNvPr id="37" name="Shape 14">
+            <a:extLst>
+              <a:ext uri="{FF2B5EF4-FFF2-40B4-BE49-F238E27FC236}">
+                <a16:creationId xmlns:a16="http://schemas.microsoft.com/office/drawing/2014/main" id="{0B20DE86-E762-46D9-B7F6-473D460382EF}"/>
+              </a:ext>
+            </a:extLst>
+          </p:cNvPr>
+          <p:cNvSpPr/>
+          <p:nvPr/>
+        </p:nvSpPr>
+        <p:spPr>
+          <a:xfrm>
+            <a:off x="4572000" y="4378378"/>
+            <a:ext cx="73152" cy="594360"/>
+          </a:xfrm>
+          <a:prstGeom prst="rect">
+            <a:avLst/>
+          </a:prstGeom>
+          <a:solidFill>
+            <a:srgbClr val="4F8EF7"/>
+          </a:solidFill>
+          <a:ln w="12700">
+            <a:solidFill>
+              <a:srgbClr val="4F8EF7"/>
+            </a:solidFill>
+            <a:prstDash val="solid"/>
+          </a:ln>
+        </p:spPr>
+      </p:sp>
+      <p:sp>
+        <p:nvSpPr>
+          <p:cNvPr id="21" name="Szövegdoboz 20">
+            <a:extLst>
+              <a:ext uri="{FF2B5EF4-FFF2-40B4-BE49-F238E27FC236}">
+                <a16:creationId xmlns:a16="http://schemas.microsoft.com/office/drawing/2014/main" id="{53F2C664-2939-44A2-B1DC-8B2AABA710EB}"/>
+              </a:ext>
+            </a:extLst>
+          </p:cNvPr>
+          <p:cNvSpPr txBox="1"/>
+          <p:nvPr/>
+        </p:nvSpPr>
+        <p:spPr>
+          <a:xfrm>
+            <a:off x="6383178" y="3137951"/>
+            <a:ext cx="492443" cy="307777"/>
+          </a:xfrm>
+          <a:prstGeom prst="rect">
+            <a:avLst/>
+          </a:prstGeom>
+          <a:noFill/>
+        </p:spPr>
+        <p:txBody>
+          <a:bodyPr wrap="none" rtlCol="0">
+            <a:spAutoFit/>
+          </a:bodyPr>
+          <a:lstStyle/>
+          <a:p>
+            <a:r>
+              <a:rPr lang="hu-HU" sz="1400" b="1" dirty="0">
+                <a:solidFill>
+                  <a:schemeClr val="bg1"/>
+                </a:solidFill>
+                <a:latin typeface="+mj-lt"/>
+              </a:rPr>
+              <a:t>DNS</a:t>
+            </a:r>
+          </a:p>
+        </p:txBody>
+      </p:sp>
+      <p:sp>
+        <p:nvSpPr>
+          <p:cNvPr id="24" name="Szövegdoboz 23">
+            <a:extLst>
+              <a:ext uri="{FF2B5EF4-FFF2-40B4-BE49-F238E27FC236}">
+                <a16:creationId xmlns:a16="http://schemas.microsoft.com/office/drawing/2014/main" id="{32A60A98-803F-4C55-AAEB-DCC3C478B483}"/>
+              </a:ext>
+            </a:extLst>
+          </p:cNvPr>
+          <p:cNvSpPr txBox="1"/>
+          <p:nvPr/>
+        </p:nvSpPr>
+        <p:spPr>
+          <a:xfrm>
+            <a:off x="5404156" y="3845851"/>
+            <a:ext cx="2523640" cy="307777"/>
+          </a:xfrm>
+          <a:prstGeom prst="rect">
+            <a:avLst/>
+          </a:prstGeom>
+          <a:noFill/>
+        </p:spPr>
+        <p:txBody>
+          <a:bodyPr wrap="none" rtlCol="0">
+            <a:spAutoFit/>
+          </a:bodyPr>
+          <a:lstStyle/>
+          <a:p>
+            <a:r>
+              <a:rPr lang="hu-HU" sz="1400" b="1" dirty="0">
+                <a:solidFill>
+                  <a:schemeClr val="bg1"/>
+                </a:solidFill>
+                <a:latin typeface="+mj-lt"/>
+              </a:rPr>
+              <a:t>FÁJL ÉS NOMYTATÓ MEGOSZTÁS</a:t>
+            </a:r>
+          </a:p>
+        </p:txBody>
+      </p:sp>
+      <p:sp>
+        <p:nvSpPr>
+          <p:cNvPr id="25" name="Szövegdoboz 24">
+            <a:extLst>
+              <a:ext uri="{FF2B5EF4-FFF2-40B4-BE49-F238E27FC236}">
+                <a16:creationId xmlns:a16="http://schemas.microsoft.com/office/drawing/2014/main" id="{5DBC8C3D-D732-433B-AB84-0944C5268E77}"/>
+              </a:ext>
+            </a:extLst>
+          </p:cNvPr>
+          <p:cNvSpPr txBox="1"/>
+          <p:nvPr/>
+        </p:nvSpPr>
+        <p:spPr>
+          <a:xfrm>
+            <a:off x="5230326" y="4509542"/>
+            <a:ext cx="2871299" cy="307777"/>
+          </a:xfrm>
+          <a:prstGeom prst="rect">
+            <a:avLst/>
+          </a:prstGeom>
+          <a:noFill/>
+        </p:spPr>
+        <p:txBody>
+          <a:bodyPr wrap="none" rtlCol="0">
+            <a:spAutoFit/>
+          </a:bodyPr>
+          <a:lstStyle/>
+          <a:p>
+            <a:r>
+              <a:rPr lang="hu-HU" sz="1400" b="1" dirty="0">
+                <a:solidFill>
+                  <a:schemeClr val="bg1"/>
+                </a:solidFill>
+                <a:latin typeface="+mj-lt"/>
+              </a:rPr>
+              <a:t>AUTOMATIZÁLT SZOFTVERTELEPÍTÉS</a:t>
+            </a:r>
+          </a:p>
+        </p:txBody>
+      </p:sp>
+    </p:spTree>
+    <p:extLst>
+      <p:ext uri="{BB962C8B-B14F-4D97-AF65-F5344CB8AC3E}">
+        <p14:creationId xmlns:p14="http://schemas.microsoft.com/office/powerpoint/2010/main" val="95319879"/>
+      </p:ext>
+    </p:extLst>
+  </p:cSld>
+  <p:clrMapOvr>
+    <a:masterClrMapping/>
+  </p:clrMapOvr>
+</p:sld>
+</file>
+
+<file path=ppt/slides/slide7.xml><?xml version="1.0" encoding="utf-8"?>
+<p:sld xmlns:a="http://schemas.openxmlformats.org/drawingml/2006/main" xmlns:r="http://schemas.openxmlformats.org/officeDocument/2006/relationships" xmlns:p="http://schemas.openxmlformats.org/presentationml/2006/main">
+  <p:cSld>
+    <p:bg>
+      <p:bgPr>
+        <a:solidFill>
+          <a:srgbClr val="1A1F35"/>
+        </a:solidFill>
+        <a:effectLst/>
+      </p:bgPr>
+    </p:bg>
+    <p:spTree>
+      <p:nvGrpSpPr>
+        <p:cNvPr id="1" name=""/>
+        <p:cNvGrpSpPr/>
+        <p:nvPr/>
+      </p:nvGrpSpPr>
+      <p:grpSpPr>
+        <a:xfrm>
+          <a:off x="0" y="0"/>
+          <a:ext cx="0" cy="0"/>
+          <a:chOff x="0" y="0"/>
+          <a:chExt cx="0" cy="0"/>
+        </a:xfrm>
+      </p:grpSpPr>
+      <p:sp>
+        <p:nvSpPr>
+          <p:cNvPr id="2" name="Shape 0"/>
+          <p:cNvSpPr/>
+          <p:nvPr/>
+        </p:nvSpPr>
+        <p:spPr>
+          <a:xfrm>
+            <a:off x="0" y="0"/>
+            <a:ext cx="9144000" cy="777240"/>
+          </a:xfrm>
+          <a:prstGeom prst="rect">
+            <a:avLst/>
+          </a:prstGeom>
+          <a:solidFill>
+            <a:srgbClr val="2C3566"/>
+          </a:solidFill>
+          <a:ln w="12700">
+            <a:solidFill>
+              <a:srgbClr val="2C3566"/>
+            </a:solidFill>
+            <a:prstDash val="solid"/>
+          </a:ln>
+        </p:spPr>
+      </p:sp>
+      <p:sp>
+        <p:nvSpPr>
+          <p:cNvPr id="3" name="Shape 1"/>
+          <p:cNvSpPr/>
+          <p:nvPr/>
+        </p:nvSpPr>
+        <p:spPr>
+          <a:xfrm>
+            <a:off x="0" y="0"/>
+            <a:ext cx="9144000" cy="64008"/>
+          </a:xfrm>
+          <a:prstGeom prst="rect">
+            <a:avLst/>
+          </a:prstGeom>
+          <a:solidFill>
+            <a:srgbClr val="4F8EF7"/>
+          </a:solidFill>
+          <a:ln w="12700">
+            <a:solidFill>
+              <a:srgbClr val="4F8EF7"/>
+            </a:solidFill>
+            <a:prstDash val="solid"/>
+          </a:ln>
+        </p:spPr>
+      </p:sp>
+      <p:sp>
+        <p:nvSpPr>
+          <p:cNvPr id="4" name="Text 2"/>
+          <p:cNvSpPr/>
+          <p:nvPr/>
+        </p:nvSpPr>
+        <p:spPr>
+          <a:xfrm>
+            <a:off x="365760" y="137160"/>
+            <a:ext cx="8412480" cy="502920"/>
+          </a:xfrm>
+          <a:prstGeom prst="rect">
+            <a:avLst/>
+          </a:prstGeom>
+          <a:noFill/>
+          <a:ln/>
+        </p:spPr>
+        <p:txBody>
+          <a:bodyPr wrap="square" rtlCol="0" anchor="ctr"/>
+          <a:lstStyle/>
+          <a:p>
+            <a:pPr marL="0" indent="0">
+              <a:buNone/>
+            </a:pPr>
+            <a:r>
+              <a:rPr lang="en-US" sz="2000" b="1" dirty="0">
+                <a:solidFill>
+                  <a:srgbClr val="FFFFFF"/>
+                </a:solidFill>
+                <a:latin typeface="Calibri" pitchFamily="34" charset="0"/>
+                <a:ea typeface="Calibri" pitchFamily="34" charset="-122"/>
+                <a:cs typeface="Calibri" pitchFamily="34" charset="-120"/>
+              </a:rPr>
+              <a:t>🏢  </a:t>
+            </a:r>
+            <a:r>
+              <a:rPr lang="hu-HU" sz="2000" b="1" dirty="0">
+                <a:solidFill>
+                  <a:srgbClr val="FFFFFF"/>
+                </a:solidFill>
+                <a:latin typeface="Calibri" pitchFamily="34" charset="0"/>
+                <a:ea typeface="Calibri" pitchFamily="34" charset="-122"/>
+                <a:cs typeface="Calibri" pitchFamily="34" charset="-120"/>
+              </a:rPr>
+              <a:t>LINUX SZERVER</a:t>
+            </a:r>
+            <a:endParaRPr lang="en-US" sz="2000" dirty="0"/>
+          </a:p>
+        </p:txBody>
+      </p:sp>
+      <p:sp>
+        <p:nvSpPr>
+          <p:cNvPr id="5" name="Shape 3"/>
+          <p:cNvSpPr/>
+          <p:nvPr/>
+        </p:nvSpPr>
+        <p:spPr>
+          <a:xfrm>
+            <a:off x="365760" y="960120"/>
+            <a:ext cx="3840480" cy="3657600"/>
+          </a:xfrm>
+          <a:prstGeom prst="rect">
+            <a:avLst/>
+          </a:prstGeom>
+          <a:solidFill>
+            <a:srgbClr val="242A4A"/>
+          </a:solidFill>
+          <a:ln w="12700">
+            <a:solidFill>
+              <a:srgbClr val="4F8EF7"/>
+            </a:solidFill>
+            <a:prstDash val="solid"/>
+          </a:ln>
+        </p:spPr>
+      </p:sp>
+      <p:sp>
+        <p:nvSpPr>
+          <p:cNvPr id="7" name="Text 4"/>
+          <p:cNvSpPr/>
+          <p:nvPr/>
+        </p:nvSpPr>
+        <p:spPr>
+          <a:xfrm>
+            <a:off x="457200" y="4251960"/>
+            <a:ext cx="3657600" cy="365760"/>
+          </a:xfrm>
+          <a:prstGeom prst="rect">
+            <a:avLst/>
+          </a:prstGeom>
+          <a:noFill/>
+          <a:ln/>
+        </p:spPr>
+        <p:txBody>
+          <a:bodyPr wrap="square" rtlCol="0" anchor="ctr"/>
+          <a:lstStyle/>
+          <a:p>
+            <a:pPr marL="0" indent="0" algn="ctr">
+              <a:buNone/>
+            </a:pPr>
+            <a:endParaRPr lang="en-US" sz="1000" dirty="0"/>
+          </a:p>
+        </p:txBody>
+      </p:sp>
+      <p:sp>
+        <p:nvSpPr>
+          <p:cNvPr id="8" name="Shape 5"/>
+          <p:cNvSpPr/>
+          <p:nvPr/>
+        </p:nvSpPr>
+        <p:spPr>
+          <a:xfrm>
+            <a:off x="4572000" y="960120"/>
+            <a:ext cx="4114800" cy="594360"/>
+          </a:xfrm>
+          <a:prstGeom prst="rect">
+            <a:avLst/>
+          </a:prstGeom>
+          <a:solidFill>
+            <a:srgbClr val="242A4A"/>
+          </a:solidFill>
+          <a:ln w="12700">
+            <a:solidFill>
+              <a:srgbClr val="2C3566"/>
+            </a:solidFill>
+            <a:prstDash val="solid"/>
+          </a:ln>
+        </p:spPr>
+      </p:sp>
+      <p:sp>
+        <p:nvSpPr>
+          <p:cNvPr id="9" name="Shape 6"/>
+          <p:cNvSpPr/>
+          <p:nvPr/>
+        </p:nvSpPr>
+        <p:spPr>
+          <a:xfrm>
+            <a:off x="4572000" y="960120"/>
+            <a:ext cx="73152" cy="594360"/>
+          </a:xfrm>
+          <a:prstGeom prst="rect">
+            <a:avLst/>
+          </a:prstGeom>
+          <a:solidFill>
+            <a:srgbClr val="4F8EF7"/>
+          </a:solidFill>
+          <a:ln w="12700">
+            <a:solidFill>
+              <a:srgbClr val="4F8EF7"/>
+            </a:solidFill>
+            <a:prstDash val="solid"/>
+          </a:ln>
+        </p:spPr>
+      </p:sp>
+      <p:sp>
+        <p:nvSpPr>
+          <p:cNvPr id="10" name="Text 7"/>
+          <p:cNvSpPr/>
+          <p:nvPr/>
+        </p:nvSpPr>
+        <p:spPr>
+          <a:xfrm>
+            <a:off x="5751576" y="1155192"/>
+            <a:ext cx="1828800" cy="256032"/>
+          </a:xfrm>
+          <a:prstGeom prst="rect">
+            <a:avLst/>
+          </a:prstGeom>
+          <a:noFill/>
+          <a:ln/>
+        </p:spPr>
+        <p:txBody>
+          <a:bodyPr wrap="square" rtlCol="0" anchor="ctr"/>
+          <a:lstStyle/>
+          <a:p>
+            <a:pPr marL="0" indent="0">
+              <a:buNone/>
+            </a:pPr>
+            <a:r>
+              <a:rPr lang="en-US" sz="1000" b="1" dirty="0">
+                <a:solidFill>
+                  <a:srgbClr val="7CB3FF"/>
+                </a:solidFill>
+                <a:latin typeface="Calibri" pitchFamily="34" charset="0"/>
+                <a:ea typeface="Calibri" pitchFamily="34" charset="-122"/>
+                <a:cs typeface="Calibri" pitchFamily="34" charset="-120"/>
+              </a:rPr>
+              <a:t>📍  </a:t>
+            </a:r>
+            <a:r>
+              <a:rPr lang="hu-HU" sz="1400" b="1" dirty="0">
+                <a:solidFill>
+                  <a:srgbClr val="7CB3FF"/>
+                </a:solidFill>
+                <a:latin typeface="Calibri" pitchFamily="34" charset="0"/>
+                <a:ea typeface="Calibri" pitchFamily="34" charset="-122"/>
+                <a:cs typeface="Calibri" pitchFamily="34" charset="-120"/>
+              </a:rPr>
+              <a:t>KÖVETELMÉNYEK</a:t>
+            </a:r>
+            <a:endParaRPr lang="en-US" sz="1400" dirty="0"/>
+          </a:p>
+        </p:txBody>
+      </p:sp>
+      <p:sp>
+        <p:nvSpPr>
+          <p:cNvPr id="11" name="Text 8"/>
+          <p:cNvSpPr/>
+          <p:nvPr/>
+        </p:nvSpPr>
+        <p:spPr>
+          <a:xfrm>
+            <a:off x="4709160" y="1234440"/>
+            <a:ext cx="3840480" cy="274320"/>
+          </a:xfrm>
+          <a:prstGeom prst="rect">
+            <a:avLst/>
+          </a:prstGeom>
+          <a:noFill/>
+          <a:ln/>
+        </p:spPr>
+        <p:txBody>
+          <a:bodyPr wrap="square" rtlCol="0" anchor="ctr"/>
+          <a:lstStyle/>
+          <a:p>
+            <a:pPr marL="0" indent="0">
+              <a:buNone/>
+            </a:pPr>
+            <a:endParaRPr lang="en-US" sz="1300" dirty="0"/>
+          </a:p>
+        </p:txBody>
+      </p:sp>
+      <p:sp>
+        <p:nvSpPr>
+          <p:cNvPr id="12" name="Shape 9"/>
+          <p:cNvSpPr/>
+          <p:nvPr/>
+        </p:nvSpPr>
+        <p:spPr>
+          <a:xfrm>
+            <a:off x="4572000" y="1645920"/>
+            <a:ext cx="4114800" cy="594360"/>
+          </a:xfrm>
+          <a:prstGeom prst="rect">
+            <a:avLst/>
+          </a:prstGeom>
+          <a:solidFill>
+            <a:srgbClr val="242A4A"/>
+          </a:solidFill>
+          <a:ln w="12700">
+            <a:solidFill>
+              <a:srgbClr val="2C3566"/>
+            </a:solidFill>
+            <a:prstDash val="solid"/>
+          </a:ln>
+        </p:spPr>
+        <p:txBody>
+          <a:bodyPr/>
+          <a:lstStyle/>
+          <a:p>
+            <a:endParaRPr lang="hu-HU" dirty="0"/>
+          </a:p>
+        </p:txBody>
+      </p:sp>
+      <p:sp>
+        <p:nvSpPr>
+          <p:cNvPr id="13" name="Shape 10"/>
+          <p:cNvSpPr/>
+          <p:nvPr/>
+        </p:nvSpPr>
+        <p:spPr>
+          <a:xfrm>
+            <a:off x="4572000" y="1645920"/>
+            <a:ext cx="73152" cy="594360"/>
+          </a:xfrm>
+          <a:prstGeom prst="rect">
+            <a:avLst/>
+          </a:prstGeom>
+          <a:solidFill>
+            <a:srgbClr val="4F8EF7"/>
+          </a:solidFill>
+          <a:ln w="12700">
+            <a:solidFill>
+              <a:srgbClr val="4F8EF7"/>
+            </a:solidFill>
+            <a:prstDash val="solid"/>
+          </a:ln>
+        </p:spPr>
+      </p:sp>
+      <p:sp>
+        <p:nvSpPr>
+          <p:cNvPr id="14" name="Text 11"/>
+          <p:cNvSpPr/>
+          <p:nvPr/>
+        </p:nvSpPr>
+        <p:spPr>
+          <a:xfrm>
+            <a:off x="4709160" y="1691640"/>
+            <a:ext cx="1828800" cy="256032"/>
+          </a:xfrm>
+          <a:prstGeom prst="rect">
+            <a:avLst/>
+          </a:prstGeom>
+          <a:noFill/>
+          <a:ln/>
+        </p:spPr>
+        <p:txBody>
+          <a:bodyPr wrap="square" rtlCol="0" anchor="ctr"/>
+          <a:lstStyle/>
+          <a:p>
+            <a:pPr marL="0" indent="0">
+              <a:buNone/>
+            </a:pPr>
+            <a:endParaRPr lang="en-US" sz="1000" dirty="0"/>
+          </a:p>
+        </p:txBody>
+      </p:sp>
+      <p:sp>
+        <p:nvSpPr>
+          <p:cNvPr id="15" name="Text 12"/>
+          <p:cNvSpPr/>
+          <p:nvPr/>
+        </p:nvSpPr>
+        <p:spPr>
+          <a:xfrm>
+            <a:off x="5212080" y="1832187"/>
+            <a:ext cx="3840480" cy="274320"/>
+          </a:xfrm>
+          <a:prstGeom prst="rect">
+            <a:avLst/>
+          </a:prstGeom>
+          <a:noFill/>
+          <a:ln/>
+        </p:spPr>
+        <p:txBody>
+          <a:bodyPr wrap="square" rtlCol="0" anchor="ctr"/>
+          <a:lstStyle/>
+          <a:p>
+            <a:pPr marL="0" indent="0">
+              <a:buNone/>
+            </a:pPr>
+            <a:r>
+              <a:rPr lang="hu-HU" sz="1300" b="1" dirty="0">
+                <a:solidFill>
+                  <a:srgbClr val="FFFFFF"/>
+                </a:solidFill>
+                <a:latin typeface="Calibri" pitchFamily="34" charset="0"/>
+                <a:ea typeface="Calibri" pitchFamily="34" charset="-122"/>
+                <a:cs typeface="Calibri" pitchFamily="34" charset="-120"/>
+              </a:rPr>
+              <a:t>HTTP/HTTPS – APACHE2 WEBSZERVER</a:t>
+            </a:r>
+            <a:endParaRPr lang="en-US" sz="1300" dirty="0"/>
+          </a:p>
+        </p:txBody>
+      </p:sp>
+      <p:sp>
+        <p:nvSpPr>
+          <p:cNvPr id="16" name="Shape 13"/>
+          <p:cNvSpPr/>
+          <p:nvPr/>
+        </p:nvSpPr>
+        <p:spPr>
+          <a:xfrm>
+            <a:off x="4572000" y="2331720"/>
+            <a:ext cx="4114800" cy="594360"/>
+          </a:xfrm>
+          <a:prstGeom prst="rect">
+            <a:avLst/>
+          </a:prstGeom>
+          <a:solidFill>
+            <a:srgbClr val="242A4A"/>
+          </a:solidFill>
+          <a:ln w="12700">
+            <a:solidFill>
+              <a:srgbClr val="2C3566"/>
+            </a:solidFill>
+            <a:prstDash val="solid"/>
+          </a:ln>
+        </p:spPr>
+        <p:txBody>
+          <a:bodyPr/>
+          <a:lstStyle/>
+          <a:p>
+            <a:endParaRPr lang="hu-HU" dirty="0"/>
+          </a:p>
+        </p:txBody>
+      </p:sp>
+      <p:sp>
+        <p:nvSpPr>
+          <p:cNvPr id="17" name="Shape 14"/>
+          <p:cNvSpPr/>
+          <p:nvPr/>
+        </p:nvSpPr>
+        <p:spPr>
+          <a:xfrm>
+            <a:off x="4572000" y="2331720"/>
+            <a:ext cx="73152" cy="594360"/>
+          </a:xfrm>
+          <a:prstGeom prst="rect">
+            <a:avLst/>
+          </a:prstGeom>
+          <a:solidFill>
+            <a:srgbClr val="4F8EF7"/>
+          </a:solidFill>
+          <a:ln w="12700">
+            <a:solidFill>
+              <a:srgbClr val="4F8EF7"/>
+            </a:solidFill>
+            <a:prstDash val="solid"/>
+          </a:ln>
+        </p:spPr>
+      </p:sp>
+      <p:sp>
+        <p:nvSpPr>
+          <p:cNvPr id="18" name="Text 15"/>
+          <p:cNvSpPr/>
+          <p:nvPr/>
+        </p:nvSpPr>
+        <p:spPr>
+          <a:xfrm>
+            <a:off x="4709160" y="2377440"/>
+            <a:ext cx="1828800" cy="256032"/>
+          </a:xfrm>
+          <a:prstGeom prst="rect">
+            <a:avLst/>
+          </a:prstGeom>
+          <a:noFill/>
+          <a:ln/>
+        </p:spPr>
+        <p:txBody>
+          <a:bodyPr wrap="square" rtlCol="0" anchor="ctr"/>
+          <a:lstStyle/>
+          <a:p>
+            <a:pPr marL="0" indent="0">
+              <a:buNone/>
+            </a:pPr>
+            <a:endParaRPr lang="en-US" sz="1000" dirty="0"/>
+          </a:p>
+        </p:txBody>
+      </p:sp>
+      <p:sp>
+        <p:nvSpPr>
+          <p:cNvPr id="19" name="Text 16"/>
+          <p:cNvSpPr/>
+          <p:nvPr/>
+        </p:nvSpPr>
+        <p:spPr>
+          <a:xfrm>
+            <a:off x="4709160" y="2606040"/>
+            <a:ext cx="3840480" cy="274320"/>
+          </a:xfrm>
+          <a:prstGeom prst="rect">
+            <a:avLst/>
+          </a:prstGeom>
+          <a:noFill/>
+          <a:ln/>
+        </p:spPr>
+        <p:txBody>
+          <a:bodyPr wrap="square" rtlCol="0" anchor="ctr"/>
+          <a:lstStyle/>
+          <a:p>
+            <a:pPr marL="0" indent="0">
+              <a:buNone/>
+            </a:pPr>
+            <a:endParaRPr lang="en-US" sz="1300" dirty="0"/>
+          </a:p>
+        </p:txBody>
+      </p:sp>
+      <p:sp>
+        <p:nvSpPr>
+          <p:cNvPr id="22" name="Text 19"/>
+          <p:cNvSpPr/>
+          <p:nvPr/>
+        </p:nvSpPr>
+        <p:spPr>
+          <a:xfrm>
+            <a:off x="4709160" y="3063240"/>
+            <a:ext cx="1828800" cy="256032"/>
+          </a:xfrm>
+          <a:prstGeom prst="rect">
+            <a:avLst/>
+          </a:prstGeom>
+          <a:noFill/>
+          <a:ln/>
+        </p:spPr>
+        <p:txBody>
+          <a:bodyPr wrap="square" rtlCol="0" anchor="ctr"/>
+          <a:lstStyle/>
+          <a:p>
+            <a:pPr marL="0" indent="0">
+              <a:buNone/>
+            </a:pPr>
+            <a:endParaRPr lang="en-US" sz="1000" dirty="0"/>
+          </a:p>
+        </p:txBody>
+      </p:sp>
+      <p:sp>
+        <p:nvSpPr>
+          <p:cNvPr id="23" name="Text 20"/>
+          <p:cNvSpPr/>
+          <p:nvPr/>
+        </p:nvSpPr>
+        <p:spPr>
+          <a:xfrm>
+            <a:off x="4709160" y="3291840"/>
+            <a:ext cx="3840480" cy="274320"/>
+          </a:xfrm>
+          <a:prstGeom prst="rect">
+            <a:avLst/>
+          </a:prstGeom>
+          <a:noFill/>
+          <a:ln/>
+        </p:spPr>
+        <p:txBody>
+          <a:bodyPr wrap="square" rtlCol="0" anchor="ctr"/>
+          <a:lstStyle/>
+          <a:p>
+            <a:pPr marL="0" indent="0">
+              <a:buNone/>
+            </a:pPr>
+            <a:endParaRPr lang="en-US" sz="1300" dirty="0"/>
+          </a:p>
+        </p:txBody>
+      </p:sp>
+      <p:sp>
+        <p:nvSpPr>
+          <p:cNvPr id="26" name="Text 23"/>
+          <p:cNvSpPr/>
+          <p:nvPr/>
+        </p:nvSpPr>
+        <p:spPr>
+          <a:xfrm>
+            <a:off x="4709160" y="3749040"/>
+            <a:ext cx="1828800" cy="256032"/>
+          </a:xfrm>
+          <a:prstGeom prst="rect">
+            <a:avLst/>
+          </a:prstGeom>
+          <a:noFill/>
+          <a:ln/>
+        </p:spPr>
+        <p:txBody>
+          <a:bodyPr wrap="square" rtlCol="0" anchor="ctr"/>
+          <a:lstStyle/>
+          <a:p>
+            <a:pPr marL="0" indent="0">
+              <a:buNone/>
+            </a:pPr>
+            <a:endParaRPr lang="en-US" sz="1000" dirty="0"/>
+          </a:p>
+        </p:txBody>
+      </p:sp>
+      <p:sp>
+        <p:nvSpPr>
+          <p:cNvPr id="27" name="Text 24"/>
+          <p:cNvSpPr/>
+          <p:nvPr/>
+        </p:nvSpPr>
+        <p:spPr>
+          <a:xfrm>
+            <a:off x="5623560" y="2468880"/>
+            <a:ext cx="3840480" cy="274320"/>
+          </a:xfrm>
+          <a:prstGeom prst="rect">
+            <a:avLst/>
+          </a:prstGeom>
+          <a:noFill/>
+          <a:ln/>
+        </p:spPr>
+        <p:txBody>
+          <a:bodyPr wrap="square" rtlCol="0" anchor="ctr"/>
+          <a:lstStyle/>
+          <a:p>
+            <a:pPr marL="0" indent="0">
+              <a:buNone/>
+            </a:pPr>
+            <a:r>
+              <a:rPr lang="hu-HU" sz="1300" b="1" dirty="0">
+                <a:solidFill>
+                  <a:schemeClr val="bg1"/>
+                </a:solidFill>
+                <a:latin typeface="+mj-lt"/>
+              </a:rPr>
+              <a:t>AUTOMATIZÁLT MENTÉS</a:t>
+            </a:r>
+            <a:endParaRPr lang="en-US" sz="1300" b="1" dirty="0">
+              <a:solidFill>
+                <a:schemeClr val="bg1"/>
+              </a:solidFill>
+              <a:latin typeface="+mj-lt"/>
+            </a:endParaRPr>
+          </a:p>
+        </p:txBody>
+      </p:sp>
+      <p:sp>
+        <p:nvSpPr>
+          <p:cNvPr id="28" name="Shape 25"/>
+          <p:cNvSpPr/>
+          <p:nvPr/>
+        </p:nvSpPr>
+        <p:spPr>
+          <a:xfrm>
+            <a:off x="4572000" y="4480560"/>
+            <a:ext cx="4114800" cy="502920"/>
+          </a:xfrm>
+          <a:prstGeom prst="rect">
+            <a:avLst/>
+          </a:prstGeom>
+          <a:solidFill>
+            <a:srgbClr val="0D3B6E"/>
+          </a:solidFill>
+          <a:ln w="12700">
+            <a:solidFill>
+              <a:srgbClr val="7CB3FF"/>
+            </a:solidFill>
+            <a:prstDash val="solid"/>
+          </a:ln>
+        </p:spPr>
+      </p:sp>
+      <p:sp>
+        <p:nvSpPr>
+          <p:cNvPr id="29" name="Text 26"/>
+          <p:cNvSpPr/>
+          <p:nvPr/>
+        </p:nvSpPr>
+        <p:spPr>
+          <a:xfrm>
+            <a:off x="4663440" y="4526280"/>
+            <a:ext cx="3931920" cy="411480"/>
+          </a:xfrm>
+          <a:prstGeom prst="rect">
+            <a:avLst/>
+          </a:prstGeom>
+          <a:noFill/>
+          <a:ln/>
+        </p:spPr>
+        <p:txBody>
+          <a:bodyPr wrap="square" rtlCol="0" anchor="ctr"/>
+          <a:lstStyle/>
+          <a:p>
+            <a:pPr marL="0" indent="0">
+              <a:buNone/>
+            </a:pPr>
+            <a:r>
+              <a:rPr lang="en-US" sz="1100" i="1" dirty="0">
+                <a:solidFill>
+                  <a:srgbClr val="7CB3FF"/>
+                </a:solidFill>
+                <a:latin typeface="Calibri" pitchFamily="34" charset="0"/>
+                <a:ea typeface="Calibri" pitchFamily="34" charset="-122"/>
+                <a:cs typeface="Calibri" pitchFamily="34" charset="-120"/>
+              </a:rPr>
+              <a:t>💡  </a:t>
+            </a:r>
+            <a:r>
+              <a:rPr lang="hu-HU" sz="1100" i="1" dirty="0">
+                <a:solidFill>
+                  <a:srgbClr val="7CB3FF"/>
+                </a:solidFill>
+                <a:latin typeface="Calibri" pitchFamily="34" charset="0"/>
+                <a:ea typeface="Calibri" pitchFamily="34" charset="-122"/>
+                <a:cs typeface="Calibri" pitchFamily="34" charset="-120"/>
+              </a:rPr>
+              <a:t>Kép az Apache2 szerverről</a:t>
+            </a:r>
+            <a:endParaRPr lang="en-US" sz="1100" dirty="0"/>
+          </a:p>
+        </p:txBody>
+      </p:sp>
+      <p:pic>
+        <p:nvPicPr>
+          <p:cNvPr id="33" name="Kép 32">
+            <a:extLst>
+              <a:ext uri="{FF2B5EF4-FFF2-40B4-BE49-F238E27FC236}">
+                <a16:creationId xmlns:a16="http://schemas.microsoft.com/office/drawing/2014/main" id="{187162FD-0A4C-41C8-BA58-A3DF208DC2BD}"/>
+              </a:ext>
+            </a:extLst>
+          </p:cNvPr>
+          <p:cNvPicPr>
+            <a:picLocks noChangeAspect="1"/>
+          </p:cNvPicPr>
+          <p:nvPr/>
+        </p:nvPicPr>
+        <p:blipFill rotWithShape="1">
+          <a:blip r:embed="rId3"/>
+          <a:srcRect l="16409" t="12886" r="16237" b="12887"/>
+          <a:stretch/>
+        </p:blipFill>
+        <p:spPr>
+          <a:xfrm>
+            <a:off x="530352" y="1832187"/>
+            <a:ext cx="3436393" cy="2130213"/>
+          </a:xfrm>
+          <a:prstGeom prst="rect">
+            <a:avLst/>
+          </a:prstGeom>
+        </p:spPr>
+      </p:pic>
+      <p:pic>
+        <p:nvPicPr>
+          <p:cNvPr id="35" name="Kép 34">
+            <a:extLst>
+              <a:ext uri="{FF2B5EF4-FFF2-40B4-BE49-F238E27FC236}">
+                <a16:creationId xmlns:a16="http://schemas.microsoft.com/office/drawing/2014/main" id="{FBE05668-9AF2-4B97-9985-EFFAD45B520D}"/>
+              </a:ext>
+            </a:extLst>
+          </p:cNvPr>
+          <p:cNvPicPr>
+            <a:picLocks noChangeAspect="1"/>
+          </p:cNvPicPr>
+          <p:nvPr/>
+        </p:nvPicPr>
+        <p:blipFill>
+          <a:blip r:embed="rId4"/>
+          <a:stretch>
+            <a:fillRect/>
+          </a:stretch>
+        </p:blipFill>
+        <p:spPr>
+          <a:xfrm>
+            <a:off x="5229954" y="2963334"/>
+            <a:ext cx="2616011" cy="1471506"/>
+          </a:xfrm>
+          <a:prstGeom prst="rect">
+            <a:avLst/>
+          </a:prstGeom>
+        </p:spPr>
+      </p:pic>
+    </p:spTree>
+    <p:extLst>
+      <p:ext uri="{BB962C8B-B14F-4D97-AF65-F5344CB8AC3E}">
+        <p14:creationId xmlns:p14="http://schemas.microsoft.com/office/powerpoint/2010/main" val="3711494425"/>
+      </p:ext>
+    </p:extLst>
+  </p:cSld>
+  <p:clrMapOvr>
+    <a:masterClrMapping/>
+  </p:clrMapOvr>
+</p:sld>
+</file>
+
+<file path=ppt/slides/slide8.xml><?xml version="1.0" encoding="utf-8"?>
 <p:sld xmlns:a="http://schemas.openxmlformats.org/drawingml/2006/main" xmlns:r="http://schemas.openxmlformats.org/officeDocument/2006/relationships" xmlns:p="http://schemas.openxmlformats.org/presentationml/2006/main">
   <p:cSld name="Slide 6">
     <p:bg>
@@ -8756,978 +12604,7 @@
 </p:sld>
 </file>
 
-<file path=ppt/slides/slide7.xml><?xml version="1.0" encoding="utf-8"?>
-<p:sld xmlns:a="http://schemas.openxmlformats.org/drawingml/2006/main" xmlns:r="http://schemas.openxmlformats.org/officeDocument/2006/relationships" xmlns:p="http://schemas.openxmlformats.org/presentationml/2006/main">
-  <p:cSld name="Slide 7">
-    <p:bg>
-      <p:bgPr>
-        <a:solidFill>
-          <a:srgbClr val="1A1F35"/>
-        </a:solidFill>
-        <a:effectLst/>
-      </p:bgPr>
-    </p:bg>
-    <p:spTree>
-      <p:nvGrpSpPr>
-        <p:cNvPr id="1" name=""/>
-        <p:cNvGrpSpPr/>
-        <p:nvPr/>
-      </p:nvGrpSpPr>
-      <p:grpSpPr>
-        <a:xfrm>
-          <a:off x="0" y="0"/>
-          <a:ext cx="0" cy="0"/>
-          <a:chOff x="0" y="0"/>
-          <a:chExt cx="0" cy="0"/>
-        </a:xfrm>
-      </p:grpSpPr>
-      <p:sp>
-        <p:nvSpPr>
-          <p:cNvPr id="2" name="Shape 0"/>
-          <p:cNvSpPr/>
-          <p:nvPr/>
-        </p:nvSpPr>
-        <p:spPr>
-          <a:xfrm>
-            <a:off x="0" y="0"/>
-            <a:ext cx="9144000" cy="777240"/>
-          </a:xfrm>
-          <a:prstGeom prst="rect">
-            <a:avLst/>
-          </a:prstGeom>
-          <a:solidFill>
-            <a:srgbClr val="2C3566"/>
-          </a:solidFill>
-          <a:ln w="12700">
-            <a:solidFill>
-              <a:srgbClr val="2C3566"/>
-            </a:solidFill>
-            <a:prstDash val="solid"/>
-          </a:ln>
-        </p:spPr>
-      </p:sp>
-      <p:sp>
-        <p:nvSpPr>
-          <p:cNvPr id="3" name="Shape 1"/>
-          <p:cNvSpPr/>
-          <p:nvPr/>
-        </p:nvSpPr>
-        <p:spPr>
-          <a:xfrm>
-            <a:off x="0" y="0"/>
-            <a:ext cx="9144000" cy="64008"/>
-          </a:xfrm>
-          <a:prstGeom prst="rect">
-            <a:avLst/>
-          </a:prstGeom>
-          <a:solidFill>
-            <a:srgbClr val="4F8EF7"/>
-          </a:solidFill>
-          <a:ln w="12700">
-            <a:solidFill>
-              <a:srgbClr val="4F8EF7"/>
-            </a:solidFill>
-            <a:prstDash val="solid"/>
-          </a:ln>
-        </p:spPr>
-      </p:sp>
-      <p:sp>
-        <p:nvSpPr>
-          <p:cNvPr id="4" name="Text 2"/>
-          <p:cNvSpPr/>
-          <p:nvPr/>
-        </p:nvSpPr>
-        <p:spPr>
-          <a:xfrm>
-            <a:off x="365760" y="137160"/>
-            <a:ext cx="8412480" cy="502920"/>
-          </a:xfrm>
-          <a:prstGeom prst="rect">
-            <a:avLst/>
-          </a:prstGeom>
-          <a:noFill/>
-          <a:ln/>
-        </p:spPr>
-        <p:txBody>
-          <a:bodyPr wrap="square" rtlCol="0" anchor="ctr"/>
-          <a:lstStyle/>
-          <a:p>
-            <a:pPr marL="0" indent="0">
-              <a:buNone/>
-            </a:pPr>
-            <a:r>
-              <a:rPr lang="en-US" sz="2000" b="1" dirty="0">
-                <a:solidFill>
-                  <a:srgbClr val="FFFFFF"/>
-                </a:solidFill>
-                <a:latin typeface="Calibri" pitchFamily="34" charset="0"/>
-                <a:ea typeface="Calibri" pitchFamily="34" charset="-122"/>
-                <a:cs typeface="Calibri" pitchFamily="34" charset="-120"/>
-              </a:rPr>
-              <a:t>⚡  SCRUM MÓDSZERTAN</a:t>
-            </a:r>
-            <a:endParaRPr lang="en-US" sz="2000" dirty="0"/>
-          </a:p>
-        </p:txBody>
-      </p:sp>
-      <p:sp>
-        <p:nvSpPr>
-          <p:cNvPr id="5" name="Shape 3"/>
-          <p:cNvSpPr/>
-          <p:nvPr/>
-        </p:nvSpPr>
-        <p:spPr>
-          <a:xfrm>
-            <a:off x="365760" y="960120"/>
-            <a:ext cx="2286000" cy="1097280"/>
-          </a:xfrm>
-          <a:prstGeom prst="rect">
-            <a:avLst/>
-          </a:prstGeom>
-          <a:solidFill>
-            <a:srgbClr val="242A4A"/>
-          </a:solidFill>
-          <a:ln w="12700">
-            <a:solidFill>
-              <a:srgbClr val="4F8EF7"/>
-            </a:solidFill>
-            <a:prstDash val="solid"/>
-          </a:ln>
-        </p:spPr>
-      </p:sp>
-      <p:sp>
-        <p:nvSpPr>
-          <p:cNvPr id="6" name="Text 4"/>
-          <p:cNvSpPr/>
-          <p:nvPr/>
-        </p:nvSpPr>
-        <p:spPr>
-          <a:xfrm>
-            <a:off x="365760" y="1051560"/>
-            <a:ext cx="2286000" cy="640080"/>
-          </a:xfrm>
-          <a:prstGeom prst="rect">
-            <a:avLst/>
-          </a:prstGeom>
-          <a:noFill/>
-          <a:ln/>
-        </p:spPr>
-        <p:txBody>
-          <a:bodyPr wrap="square" rtlCol="0" anchor="ctr"/>
-          <a:lstStyle/>
-          <a:p>
-            <a:pPr marL="0" indent="0" algn="ctr">
-              <a:buNone/>
-            </a:pPr>
-            <a:r>
-              <a:rPr lang="en-US" sz="4800" b="1" dirty="0">
-                <a:solidFill>
-                  <a:srgbClr val="4F8EF7"/>
-                </a:solidFill>
-                <a:latin typeface="Calibri" pitchFamily="34" charset="0"/>
-                <a:ea typeface="Calibri" pitchFamily="34" charset="-122"/>
-                <a:cs typeface="Calibri" pitchFamily="34" charset="-120"/>
-              </a:rPr>
-              <a:t>8</a:t>
-            </a:r>
-            <a:endParaRPr lang="en-US" sz="4800" dirty="0"/>
-          </a:p>
-        </p:txBody>
-      </p:sp>
-      <p:sp>
-        <p:nvSpPr>
-          <p:cNvPr id="7" name="Text 5"/>
-          <p:cNvSpPr/>
-          <p:nvPr/>
-        </p:nvSpPr>
-        <p:spPr>
-          <a:xfrm>
-            <a:off x="365760" y="1645920"/>
-            <a:ext cx="2286000" cy="274320"/>
-          </a:xfrm>
-          <a:prstGeom prst="rect">
-            <a:avLst/>
-          </a:prstGeom>
-          <a:noFill/>
-          <a:ln/>
-        </p:spPr>
-        <p:txBody>
-          <a:bodyPr wrap="square" rtlCol="0" anchor="ctr"/>
-          <a:lstStyle/>
-          <a:p>
-            <a:pPr marL="0" indent="0" algn="ctr">
-              <a:buNone/>
-            </a:pPr>
-            <a:r>
-              <a:rPr lang="en-US" sz="1100" b="1" dirty="0">
-                <a:solidFill>
-                  <a:srgbClr val="FFFFFF"/>
-                </a:solidFill>
-                <a:latin typeface="Calibri" pitchFamily="34" charset="0"/>
-                <a:ea typeface="Calibri" pitchFamily="34" charset="-122"/>
-                <a:cs typeface="Calibri" pitchFamily="34" charset="-120"/>
-              </a:rPr>
-              <a:t>Sprint összesen</a:t>
-            </a:r>
-            <a:endParaRPr lang="en-US" sz="1100" dirty="0"/>
-          </a:p>
-        </p:txBody>
-      </p:sp>
-      <p:sp>
-        <p:nvSpPr>
-          <p:cNvPr id="8" name="Shape 6"/>
-          <p:cNvSpPr/>
-          <p:nvPr/>
-        </p:nvSpPr>
-        <p:spPr>
-          <a:xfrm>
-            <a:off x="365760" y="2194560"/>
-            <a:ext cx="2286000" cy="1097280"/>
-          </a:xfrm>
-          <a:prstGeom prst="rect">
-            <a:avLst/>
-          </a:prstGeom>
-          <a:solidFill>
-            <a:srgbClr val="242A4A"/>
-          </a:solidFill>
-          <a:ln w="12700">
-            <a:solidFill>
-              <a:srgbClr val="4F8EF7"/>
-            </a:solidFill>
-            <a:prstDash val="solid"/>
-          </a:ln>
-        </p:spPr>
-      </p:sp>
-      <p:sp>
-        <p:nvSpPr>
-          <p:cNvPr id="9" name="Text 7"/>
-          <p:cNvSpPr/>
-          <p:nvPr/>
-        </p:nvSpPr>
-        <p:spPr>
-          <a:xfrm>
-            <a:off x="365760" y="2286000"/>
-            <a:ext cx="2286000" cy="640080"/>
-          </a:xfrm>
-          <a:prstGeom prst="rect">
-            <a:avLst/>
-          </a:prstGeom>
-          <a:noFill/>
-          <a:ln/>
-        </p:spPr>
-        <p:txBody>
-          <a:bodyPr wrap="square" rtlCol="0" anchor="ctr"/>
-          <a:lstStyle/>
-          <a:p>
-            <a:pPr marL="0" indent="0" algn="ctr">
-              <a:buNone/>
-            </a:pPr>
-            <a:r>
-              <a:rPr lang="en-US" sz="4800" b="1" dirty="0">
-                <a:solidFill>
-                  <a:srgbClr val="4F8EF7"/>
-                </a:solidFill>
-                <a:latin typeface="Calibri" pitchFamily="34" charset="0"/>
-                <a:ea typeface="Calibri" pitchFamily="34" charset="-122"/>
-                <a:cs typeface="Calibri" pitchFamily="34" charset="-120"/>
-              </a:rPr>
-              <a:t>1</a:t>
-            </a:r>
-            <a:endParaRPr lang="en-US" sz="4800" dirty="0"/>
-          </a:p>
-        </p:txBody>
-      </p:sp>
-      <p:sp>
-        <p:nvSpPr>
-          <p:cNvPr id="10" name="Text 8"/>
-          <p:cNvSpPr/>
-          <p:nvPr/>
-        </p:nvSpPr>
-        <p:spPr>
-          <a:xfrm>
-            <a:off x="365760" y="2880360"/>
-            <a:ext cx="2286000" cy="274320"/>
-          </a:xfrm>
-          <a:prstGeom prst="rect">
-            <a:avLst/>
-          </a:prstGeom>
-          <a:noFill/>
-          <a:ln/>
-        </p:spPr>
-        <p:txBody>
-          <a:bodyPr wrap="square" rtlCol="0" anchor="ctr"/>
-          <a:lstStyle/>
-          <a:p>
-            <a:pPr marL="0" indent="0" algn="ctr">
-              <a:buNone/>
-            </a:pPr>
-            <a:r>
-              <a:rPr lang="en-US" sz="1100" b="1" dirty="0">
-                <a:solidFill>
-                  <a:srgbClr val="FFFFFF"/>
-                </a:solidFill>
-                <a:latin typeface="Calibri" pitchFamily="34" charset="0"/>
-                <a:ea typeface="Calibri" pitchFamily="34" charset="-122"/>
-                <a:cs typeface="Calibri" pitchFamily="34" charset="-120"/>
-              </a:rPr>
-              <a:t>Hetes sprintek</a:t>
-            </a:r>
-            <a:endParaRPr lang="en-US" sz="1100" dirty="0"/>
-          </a:p>
-        </p:txBody>
-      </p:sp>
-      <p:sp>
-        <p:nvSpPr>
-          <p:cNvPr id="11" name="Shape 9"/>
-          <p:cNvSpPr/>
-          <p:nvPr/>
-        </p:nvSpPr>
-        <p:spPr>
-          <a:xfrm>
-            <a:off x="365760" y="3429000"/>
-            <a:ext cx="2286000" cy="1097280"/>
-          </a:xfrm>
-          <a:prstGeom prst="rect">
-            <a:avLst/>
-          </a:prstGeom>
-          <a:solidFill>
-            <a:srgbClr val="242A4A"/>
-          </a:solidFill>
-          <a:ln w="12700">
-            <a:solidFill>
-              <a:srgbClr val="4F8EF7"/>
-            </a:solidFill>
-            <a:prstDash val="solid"/>
-          </a:ln>
-        </p:spPr>
-      </p:sp>
-      <p:sp>
-        <p:nvSpPr>
-          <p:cNvPr id="12" name="Text 10"/>
-          <p:cNvSpPr/>
-          <p:nvPr/>
-        </p:nvSpPr>
-        <p:spPr>
-          <a:xfrm>
-            <a:off x="365760" y="3520440"/>
-            <a:ext cx="2286000" cy="640080"/>
-          </a:xfrm>
-          <a:prstGeom prst="rect">
-            <a:avLst/>
-          </a:prstGeom>
-          <a:noFill/>
-          <a:ln/>
-        </p:spPr>
-        <p:txBody>
-          <a:bodyPr wrap="square" rtlCol="0" anchor="ctr"/>
-          <a:lstStyle/>
-          <a:p>
-            <a:pPr marL="0" indent="0" algn="ctr">
-              <a:buNone/>
-            </a:pPr>
-            <a:r>
-              <a:rPr lang="en-US" sz="4800" b="1" dirty="0">
-                <a:solidFill>
-                  <a:srgbClr val="4F8EF7"/>
-                </a:solidFill>
-                <a:latin typeface="Calibri" pitchFamily="34" charset="0"/>
-                <a:ea typeface="Calibri" pitchFamily="34" charset="-122"/>
-                <a:cs typeface="Calibri" pitchFamily="34" charset="-120"/>
-              </a:rPr>
-              <a:t>15'</a:t>
-            </a:r>
-            <a:endParaRPr lang="en-US" sz="4800" dirty="0"/>
-          </a:p>
-        </p:txBody>
-      </p:sp>
-      <p:sp>
-        <p:nvSpPr>
-          <p:cNvPr id="13" name="Text 11"/>
-          <p:cNvSpPr/>
-          <p:nvPr/>
-        </p:nvSpPr>
-        <p:spPr>
-          <a:xfrm>
-            <a:off x="365760" y="4114800"/>
-            <a:ext cx="2286000" cy="274320"/>
-          </a:xfrm>
-          <a:prstGeom prst="rect">
-            <a:avLst/>
-          </a:prstGeom>
-          <a:noFill/>
-          <a:ln/>
-        </p:spPr>
-        <p:txBody>
-          <a:bodyPr wrap="square" rtlCol="0" anchor="ctr"/>
-          <a:lstStyle/>
-          <a:p>
-            <a:pPr marL="0" indent="0" algn="ctr">
-              <a:buNone/>
-            </a:pPr>
-            <a:r>
-              <a:rPr lang="en-US" sz="1100" b="1" dirty="0">
-                <a:solidFill>
-                  <a:srgbClr val="FFFFFF"/>
-                </a:solidFill>
-                <a:latin typeface="Calibri" pitchFamily="34" charset="0"/>
-                <a:ea typeface="Calibri" pitchFamily="34" charset="-122"/>
-                <a:cs typeface="Calibri" pitchFamily="34" charset="-120"/>
-              </a:rPr>
-              <a:t>Napi stand-up</a:t>
-            </a:r>
-            <a:endParaRPr lang="en-US" sz="1100" dirty="0"/>
-          </a:p>
-        </p:txBody>
-      </p:sp>
-      <p:sp>
-        <p:nvSpPr>
-          <p:cNvPr id="14" name="Shape 12"/>
-          <p:cNvSpPr/>
-          <p:nvPr/>
-        </p:nvSpPr>
-        <p:spPr>
-          <a:xfrm>
-            <a:off x="2926080" y="960120"/>
-            <a:ext cx="5852160" cy="777240"/>
-          </a:xfrm>
-          <a:prstGeom prst="rect">
-            <a:avLst/>
-          </a:prstGeom>
-          <a:solidFill>
-            <a:srgbClr val="242A4A"/>
-          </a:solidFill>
-          <a:ln w="12700">
-            <a:solidFill>
-              <a:srgbClr val="2C3566"/>
-            </a:solidFill>
-            <a:prstDash val="solid"/>
-          </a:ln>
-        </p:spPr>
-      </p:sp>
-      <p:sp>
-        <p:nvSpPr>
-          <p:cNvPr id="15" name="Shape 13"/>
-          <p:cNvSpPr/>
-          <p:nvPr/>
-        </p:nvSpPr>
-        <p:spPr>
-          <a:xfrm>
-            <a:off x="2926080" y="960120"/>
-            <a:ext cx="73152" cy="777240"/>
-          </a:xfrm>
-          <a:prstGeom prst="rect">
-            <a:avLst/>
-          </a:prstGeom>
-          <a:solidFill>
-            <a:srgbClr val="4F8EF7"/>
-          </a:solidFill>
-          <a:ln w="12700">
-            <a:solidFill>
-              <a:srgbClr val="4F8EF7"/>
-            </a:solidFill>
-            <a:prstDash val="solid"/>
-          </a:ln>
-        </p:spPr>
-      </p:sp>
-      <p:sp>
-        <p:nvSpPr>
-          <p:cNvPr id="16" name="Text 14"/>
-          <p:cNvSpPr/>
-          <p:nvPr/>
-        </p:nvSpPr>
-        <p:spPr>
-          <a:xfrm>
-            <a:off x="3108960" y="1033272"/>
-            <a:ext cx="2743200" cy="320040"/>
-          </a:xfrm>
-          <a:prstGeom prst="rect">
-            <a:avLst/>
-          </a:prstGeom>
-          <a:noFill/>
-          <a:ln/>
-        </p:spPr>
-        <p:txBody>
-          <a:bodyPr wrap="square" rtlCol="0" anchor="ctr"/>
-          <a:lstStyle/>
-          <a:p>
-            <a:pPr marL="0" indent="0">
-              <a:buNone/>
-            </a:pPr>
-            <a:r>
-              <a:rPr lang="en-US" sz="1300" b="1" dirty="0">
-                <a:solidFill>
-                  <a:srgbClr val="FFFFFF"/>
-                </a:solidFill>
-                <a:latin typeface="Calibri" pitchFamily="34" charset="0"/>
-                <a:ea typeface="Calibri" pitchFamily="34" charset="-122"/>
-                <a:cs typeface="Calibri" pitchFamily="34" charset="-120"/>
-              </a:rPr>
-              <a:t>📋  Sprint Planning</a:t>
-            </a:r>
-            <a:endParaRPr lang="en-US" sz="1300" dirty="0"/>
-          </a:p>
-        </p:txBody>
-      </p:sp>
-      <p:sp>
-        <p:nvSpPr>
-          <p:cNvPr id="17" name="Text 15"/>
-          <p:cNvSpPr/>
-          <p:nvPr/>
-        </p:nvSpPr>
-        <p:spPr>
-          <a:xfrm>
-            <a:off x="3108960" y="1362456"/>
-            <a:ext cx="5486400" cy="292608"/>
-          </a:xfrm>
-          <a:prstGeom prst="rect">
-            <a:avLst/>
-          </a:prstGeom>
-          <a:noFill/>
-          <a:ln/>
-        </p:spPr>
-        <p:txBody>
-          <a:bodyPr wrap="square" rtlCol="0" anchor="ctr"/>
-          <a:lstStyle/>
-          <a:p>
-            <a:pPr marL="0" indent="0">
-              <a:buNone/>
-            </a:pPr>
-            <a:r>
-              <a:rPr lang="en-US" sz="1100" dirty="0">
-                <a:solidFill>
-                  <a:srgbClr val="C8D4F0"/>
-                </a:solidFill>
-                <a:latin typeface="Calibri" pitchFamily="34" charset="0"/>
-                <a:ea typeface="Calibri" pitchFamily="34" charset="-122"/>
-                <a:cs typeface="Calibri" pitchFamily="34" charset="-120"/>
-              </a:rPr>
-              <a:t>Heti feladatok megtervezése</a:t>
-            </a:r>
-            <a:endParaRPr lang="en-US" sz="1100" dirty="0"/>
-          </a:p>
-        </p:txBody>
-      </p:sp>
-      <p:sp>
-        <p:nvSpPr>
-          <p:cNvPr id="18" name="Shape 16"/>
-          <p:cNvSpPr/>
-          <p:nvPr/>
-        </p:nvSpPr>
-        <p:spPr>
-          <a:xfrm>
-            <a:off x="2926080" y="1874520"/>
-            <a:ext cx="5852160" cy="777240"/>
-          </a:xfrm>
-          <a:prstGeom prst="rect">
-            <a:avLst/>
-          </a:prstGeom>
-          <a:solidFill>
-            <a:srgbClr val="242A4A"/>
-          </a:solidFill>
-          <a:ln w="12700">
-            <a:solidFill>
-              <a:srgbClr val="2C3566"/>
-            </a:solidFill>
-            <a:prstDash val="solid"/>
-          </a:ln>
-        </p:spPr>
-      </p:sp>
-      <p:sp>
-        <p:nvSpPr>
-          <p:cNvPr id="19" name="Shape 17"/>
-          <p:cNvSpPr/>
-          <p:nvPr/>
-        </p:nvSpPr>
-        <p:spPr>
-          <a:xfrm>
-            <a:off x="2926080" y="1874520"/>
-            <a:ext cx="73152" cy="777240"/>
-          </a:xfrm>
-          <a:prstGeom prst="rect">
-            <a:avLst/>
-          </a:prstGeom>
-          <a:solidFill>
-            <a:srgbClr val="4F8EF7"/>
-          </a:solidFill>
-          <a:ln w="12700">
-            <a:solidFill>
-              <a:srgbClr val="4F8EF7"/>
-            </a:solidFill>
-            <a:prstDash val="solid"/>
-          </a:ln>
-        </p:spPr>
-      </p:sp>
-      <p:sp>
-        <p:nvSpPr>
-          <p:cNvPr id="20" name="Text 18"/>
-          <p:cNvSpPr/>
-          <p:nvPr/>
-        </p:nvSpPr>
-        <p:spPr>
-          <a:xfrm>
-            <a:off x="3108960" y="1947672"/>
-            <a:ext cx="2743200" cy="320040"/>
-          </a:xfrm>
-          <a:prstGeom prst="rect">
-            <a:avLst/>
-          </a:prstGeom>
-          <a:noFill/>
-          <a:ln/>
-        </p:spPr>
-        <p:txBody>
-          <a:bodyPr wrap="square" rtlCol="0" anchor="ctr"/>
-          <a:lstStyle/>
-          <a:p>
-            <a:pPr marL="0" indent="0">
-              <a:buNone/>
-            </a:pPr>
-            <a:r>
-              <a:rPr lang="en-US" sz="1300" b="1" dirty="0">
-                <a:solidFill>
-                  <a:srgbClr val="FFFFFF"/>
-                </a:solidFill>
-                <a:latin typeface="Calibri" pitchFamily="34" charset="0"/>
-                <a:ea typeface="Calibri" pitchFamily="34" charset="-122"/>
-                <a:cs typeface="Calibri" pitchFamily="34" charset="-120"/>
-              </a:rPr>
-              <a:t>💬  Daily Stand-up</a:t>
-            </a:r>
-            <a:endParaRPr lang="en-US" sz="1300" dirty="0"/>
-          </a:p>
-        </p:txBody>
-      </p:sp>
-      <p:sp>
-        <p:nvSpPr>
-          <p:cNvPr id="21" name="Text 19"/>
-          <p:cNvSpPr/>
-          <p:nvPr/>
-        </p:nvSpPr>
-        <p:spPr>
-          <a:xfrm>
-            <a:off x="3108960" y="2276856"/>
-            <a:ext cx="5486400" cy="292608"/>
-          </a:xfrm>
-          <a:prstGeom prst="rect">
-            <a:avLst/>
-          </a:prstGeom>
-          <a:noFill/>
-          <a:ln/>
-        </p:spPr>
-        <p:txBody>
-          <a:bodyPr wrap="square" rtlCol="0" anchor="ctr"/>
-          <a:lstStyle/>
-          <a:p>
-            <a:pPr marL="0" indent="0">
-              <a:buNone/>
-            </a:pPr>
-            <a:r>
-              <a:rPr lang="en-US" sz="1100" dirty="0">
-                <a:solidFill>
-                  <a:srgbClr val="C8D4F0"/>
-                </a:solidFill>
-                <a:latin typeface="Calibri" pitchFamily="34" charset="0"/>
-                <a:ea typeface="Calibri" pitchFamily="34" charset="-122"/>
-                <a:cs typeface="Calibri" pitchFamily="34" charset="-120"/>
-              </a:rPr>
-              <a:t>Napi 15 perces egyeztetés Discordon</a:t>
-            </a:r>
-            <a:endParaRPr lang="en-US" sz="1100" dirty="0"/>
-          </a:p>
-        </p:txBody>
-      </p:sp>
-      <p:sp>
-        <p:nvSpPr>
-          <p:cNvPr id="22" name="Shape 20"/>
-          <p:cNvSpPr/>
-          <p:nvPr/>
-        </p:nvSpPr>
-        <p:spPr>
-          <a:xfrm>
-            <a:off x="2926080" y="2788920"/>
-            <a:ext cx="5852160" cy="777240"/>
-          </a:xfrm>
-          <a:prstGeom prst="rect">
-            <a:avLst/>
-          </a:prstGeom>
-          <a:solidFill>
-            <a:srgbClr val="242A4A"/>
-          </a:solidFill>
-          <a:ln w="12700">
-            <a:solidFill>
-              <a:srgbClr val="2C3566"/>
-            </a:solidFill>
-            <a:prstDash val="solid"/>
-          </a:ln>
-        </p:spPr>
-      </p:sp>
-      <p:sp>
-        <p:nvSpPr>
-          <p:cNvPr id="23" name="Shape 21"/>
-          <p:cNvSpPr/>
-          <p:nvPr/>
-        </p:nvSpPr>
-        <p:spPr>
-          <a:xfrm>
-            <a:off x="2926080" y="2788920"/>
-            <a:ext cx="73152" cy="777240"/>
-          </a:xfrm>
-          <a:prstGeom prst="rect">
-            <a:avLst/>
-          </a:prstGeom>
-          <a:solidFill>
-            <a:srgbClr val="4F8EF7"/>
-          </a:solidFill>
-          <a:ln w="12700">
-            <a:solidFill>
-              <a:srgbClr val="4F8EF7"/>
-            </a:solidFill>
-            <a:prstDash val="solid"/>
-          </a:ln>
-        </p:spPr>
-      </p:sp>
-      <p:sp>
-        <p:nvSpPr>
-          <p:cNvPr id="24" name="Text 22"/>
-          <p:cNvSpPr/>
-          <p:nvPr/>
-        </p:nvSpPr>
-        <p:spPr>
-          <a:xfrm>
-            <a:off x="3108960" y="2862072"/>
-            <a:ext cx="2743200" cy="320040"/>
-          </a:xfrm>
-          <a:prstGeom prst="rect">
-            <a:avLst/>
-          </a:prstGeom>
-          <a:noFill/>
-          <a:ln/>
-        </p:spPr>
-        <p:txBody>
-          <a:bodyPr wrap="square" rtlCol="0" anchor="ctr"/>
-          <a:lstStyle/>
-          <a:p>
-            <a:pPr marL="0" indent="0">
-              <a:buNone/>
-            </a:pPr>
-            <a:r>
-              <a:rPr lang="en-US" sz="1300" b="1" dirty="0">
-                <a:solidFill>
-                  <a:srgbClr val="FFFFFF"/>
-                </a:solidFill>
-                <a:latin typeface="Calibri" pitchFamily="34" charset="0"/>
-                <a:ea typeface="Calibri" pitchFamily="34" charset="-122"/>
-                <a:cs typeface="Calibri" pitchFamily="34" charset="-120"/>
-              </a:rPr>
-              <a:t>✅  Sprint Review</a:t>
-            </a:r>
-            <a:endParaRPr lang="en-US" sz="1300" dirty="0"/>
-          </a:p>
-        </p:txBody>
-      </p:sp>
-      <p:sp>
-        <p:nvSpPr>
-          <p:cNvPr id="25" name="Text 23"/>
-          <p:cNvSpPr/>
-          <p:nvPr/>
-        </p:nvSpPr>
-        <p:spPr>
-          <a:xfrm>
-            <a:off x="3108960" y="3191256"/>
-            <a:ext cx="5486400" cy="292608"/>
-          </a:xfrm>
-          <a:prstGeom prst="rect">
-            <a:avLst/>
-          </a:prstGeom>
-          <a:noFill/>
-          <a:ln/>
-        </p:spPr>
-        <p:txBody>
-          <a:bodyPr wrap="square" rtlCol="0" anchor="ctr"/>
-          <a:lstStyle/>
-          <a:p>
-            <a:pPr marL="0" indent="0">
-              <a:buNone/>
-            </a:pPr>
-            <a:r>
-              <a:rPr lang="en-US" sz="1100" dirty="0">
-                <a:solidFill>
-                  <a:srgbClr val="C8D4F0"/>
-                </a:solidFill>
-                <a:latin typeface="Calibri" pitchFamily="34" charset="0"/>
-                <a:ea typeface="Calibri" pitchFamily="34" charset="-122"/>
-                <a:cs typeface="Calibri" pitchFamily="34" charset="-120"/>
-              </a:rPr>
-              <a:t>Heti eredmények bemutatása</a:t>
-            </a:r>
-            <a:endParaRPr lang="en-US" sz="1100" dirty="0"/>
-          </a:p>
-        </p:txBody>
-      </p:sp>
-      <p:sp>
-        <p:nvSpPr>
-          <p:cNvPr id="26" name="Shape 24"/>
-          <p:cNvSpPr/>
-          <p:nvPr/>
-        </p:nvSpPr>
-        <p:spPr>
-          <a:xfrm>
-            <a:off x="2926080" y="3703320"/>
-            <a:ext cx="5852160" cy="777240"/>
-          </a:xfrm>
-          <a:prstGeom prst="rect">
-            <a:avLst/>
-          </a:prstGeom>
-          <a:solidFill>
-            <a:srgbClr val="242A4A"/>
-          </a:solidFill>
-          <a:ln w="12700">
-            <a:solidFill>
-              <a:srgbClr val="2C3566"/>
-            </a:solidFill>
-            <a:prstDash val="solid"/>
-          </a:ln>
-        </p:spPr>
-      </p:sp>
-      <p:sp>
-        <p:nvSpPr>
-          <p:cNvPr id="27" name="Shape 25"/>
-          <p:cNvSpPr/>
-          <p:nvPr/>
-        </p:nvSpPr>
-        <p:spPr>
-          <a:xfrm>
-            <a:off x="2926080" y="3703320"/>
-            <a:ext cx="73152" cy="777240"/>
-          </a:xfrm>
-          <a:prstGeom prst="rect">
-            <a:avLst/>
-          </a:prstGeom>
-          <a:solidFill>
-            <a:srgbClr val="4F8EF7"/>
-          </a:solidFill>
-          <a:ln w="12700">
-            <a:solidFill>
-              <a:srgbClr val="4F8EF7"/>
-            </a:solidFill>
-            <a:prstDash val="solid"/>
-          </a:ln>
-        </p:spPr>
-      </p:sp>
-      <p:sp>
-        <p:nvSpPr>
-          <p:cNvPr id="28" name="Text 26"/>
-          <p:cNvSpPr/>
-          <p:nvPr/>
-        </p:nvSpPr>
-        <p:spPr>
-          <a:xfrm>
-            <a:off x="3108960" y="3776472"/>
-            <a:ext cx="2743200" cy="320040"/>
-          </a:xfrm>
-          <a:prstGeom prst="rect">
-            <a:avLst/>
-          </a:prstGeom>
-          <a:noFill/>
-          <a:ln/>
-        </p:spPr>
-        <p:txBody>
-          <a:bodyPr wrap="square" rtlCol="0" anchor="ctr"/>
-          <a:lstStyle/>
-          <a:p>
-            <a:pPr marL="0" indent="0">
-              <a:buNone/>
-            </a:pPr>
-            <a:r>
-              <a:rPr lang="en-US" sz="1300" b="1" dirty="0">
-                <a:solidFill>
-                  <a:srgbClr val="FFFFFF"/>
-                </a:solidFill>
-                <a:latin typeface="Calibri" pitchFamily="34" charset="0"/>
-                <a:ea typeface="Calibri" pitchFamily="34" charset="-122"/>
-                <a:cs typeface="Calibri" pitchFamily="34" charset="-120"/>
-              </a:rPr>
-              <a:t>🔄  Retrospective</a:t>
-            </a:r>
-            <a:endParaRPr lang="en-US" sz="1300" dirty="0"/>
-          </a:p>
-        </p:txBody>
-      </p:sp>
-      <p:sp>
-        <p:nvSpPr>
-          <p:cNvPr id="29" name="Text 27"/>
-          <p:cNvSpPr/>
-          <p:nvPr/>
-        </p:nvSpPr>
-        <p:spPr>
-          <a:xfrm>
-            <a:off x="3108960" y="4105656"/>
-            <a:ext cx="5486400" cy="292608"/>
-          </a:xfrm>
-          <a:prstGeom prst="rect">
-            <a:avLst/>
-          </a:prstGeom>
-          <a:noFill/>
-          <a:ln/>
-        </p:spPr>
-        <p:txBody>
-          <a:bodyPr wrap="square" rtlCol="0" anchor="ctr"/>
-          <a:lstStyle/>
-          <a:p>
-            <a:pPr marL="0" indent="0">
-              <a:buNone/>
-            </a:pPr>
-            <a:r>
-              <a:rPr lang="en-US" sz="1100" dirty="0">
-                <a:solidFill>
-                  <a:srgbClr val="C8D4F0"/>
-                </a:solidFill>
-                <a:latin typeface="Calibri" pitchFamily="34" charset="0"/>
-                <a:ea typeface="Calibri" pitchFamily="34" charset="-122"/>
-                <a:cs typeface="Calibri" pitchFamily="34" charset="-120"/>
-              </a:rPr>
-              <a:t>Mit csináltunk jól? Mit javítsunk?</a:t>
-            </a:r>
-            <a:endParaRPr lang="en-US" sz="1100" dirty="0"/>
-          </a:p>
-        </p:txBody>
-      </p:sp>
-      <p:sp>
-        <p:nvSpPr>
-          <p:cNvPr id="31" name="Text 29"/>
-          <p:cNvSpPr/>
-          <p:nvPr/>
-        </p:nvSpPr>
-        <p:spPr>
-          <a:xfrm>
-            <a:off x="3108960" y="4690872"/>
-            <a:ext cx="5486400" cy="320040"/>
-          </a:xfrm>
-          <a:prstGeom prst="rect">
-            <a:avLst/>
-          </a:prstGeom>
-          <a:noFill/>
-          <a:ln/>
-        </p:spPr>
-        <p:txBody>
-          <a:bodyPr wrap="square" rtlCol="0" anchor="ctr"/>
-          <a:lstStyle/>
-          <a:p>
-            <a:pPr marL="0" indent="0">
-              <a:buNone/>
-            </a:pPr>
-            <a:endParaRPr lang="en-US" sz="1100" dirty="0"/>
-          </a:p>
-        </p:txBody>
-      </p:sp>
-    </p:spTree>
-  </p:cSld>
-  <p:clrMapOvr>
-    <a:masterClrMapping/>
-  </p:clrMapOvr>
-</p:sld>
-</file>
-
-<file path=ppt/slides/slide8.xml><?xml version="1.0" encoding="utf-8"?>
+<file path=ppt/slides/slide9.xml><?xml version="1.0" encoding="utf-8"?>
 <p:sld xmlns:a="http://schemas.openxmlformats.org/drawingml/2006/main" xmlns:r="http://schemas.openxmlformats.org/officeDocument/2006/relationships" xmlns:p="http://schemas.openxmlformats.org/presentationml/2006/main">
   <p:cSld name="Slide 8">
     <p:bg>
@@ -9849,7 +12726,7 @@
         </p:nvSpPr>
         <p:spPr>
           <a:xfrm>
-            <a:off x="365760" y="960120"/>
+            <a:off x="365760" y="964692"/>
             <a:ext cx="1920240" cy="411480"/>
           </a:xfrm>
           <a:prstGeom prst="rect">
@@ -9865,6 +12742,13 @@
             <a:prstDash val="solid"/>
           </a:ln>
         </p:spPr>
+        <p:txBody>
+          <a:bodyPr/>
+          <a:lstStyle/>
+          <a:p>
+            <a:endParaRPr lang="hu-HU" dirty="0"/>
+          </a:p>
+        </p:txBody>
       </p:sp>
       <p:sp>
         <p:nvSpPr>
@@ -9891,7 +12775,7 @@
               <a:buNone/>
             </a:pPr>
             <a:r>
-              <a:rPr lang="en-US" sz="1100" b="1" dirty="0">
+              <a:rPr lang="hu-HU" sz="1100" b="1" dirty="0">
                 <a:solidFill>
                   <a:srgbClr val="1A1F35"/>
                 </a:solidFill>
@@ -9899,36 +12783,11 @@
                 <a:ea typeface="Calibri" pitchFamily="34" charset="-122"/>
                 <a:cs typeface="Calibri" pitchFamily="34" charset="-120"/>
               </a:rPr>
-              <a:t>TO DO</a:t>
+              <a:t>IDŐ LOGOLÁS</a:t>
             </a:r>
             <a:endParaRPr lang="en-US" sz="1100" dirty="0"/>
           </a:p>
         </p:txBody>
-      </p:sp>
-      <p:sp>
-        <p:nvSpPr>
-          <p:cNvPr id="7" name="Shape 5"/>
-          <p:cNvSpPr/>
-          <p:nvPr/>
-        </p:nvSpPr>
-        <p:spPr>
-          <a:xfrm>
-            <a:off x="411480" y="1463040"/>
-            <a:ext cx="1828800" cy="457200"/>
-          </a:xfrm>
-          <a:prstGeom prst="rect">
-            <a:avLst/>
-          </a:prstGeom>
-          <a:solidFill>
-            <a:srgbClr val="242A4A"/>
-          </a:solidFill>
-          <a:ln w="6350">
-            <a:solidFill>
-              <a:srgbClr val="C8D4F0"/>
-            </a:solidFill>
-            <a:prstDash val="solid"/>
-          </a:ln>
-        </p:spPr>
       </p:sp>
       <p:sp>
         <p:nvSpPr>
@@ -9954,45 +12813,9 @@
             <a:pPr marL="0" indent="0">
               <a:buNone/>
             </a:pPr>
-            <a:r>
-              <a:rPr lang="en-US" sz="1000" dirty="0">
-                <a:solidFill>
-                  <a:srgbClr val="C8D4F0"/>
-                </a:solidFill>
-                <a:latin typeface="Calibri" pitchFamily="34" charset="0"/>
-                <a:ea typeface="Calibri" pitchFamily="34" charset="-122"/>
-                <a:cs typeface="Calibri" pitchFamily="34" charset="-120"/>
-              </a:rPr>
-              <a:t>Task 1</a:t>
-            </a:r>
             <a:endParaRPr lang="en-US" sz="1000" dirty="0"/>
           </a:p>
         </p:txBody>
-      </p:sp>
-      <p:sp>
-        <p:nvSpPr>
-          <p:cNvPr id="9" name="Shape 7"/>
-          <p:cNvSpPr/>
-          <p:nvPr/>
-        </p:nvSpPr>
-        <p:spPr>
-          <a:xfrm>
-            <a:off x="411480" y="2011680"/>
-            <a:ext cx="1828800" cy="457200"/>
-          </a:xfrm>
-          <a:prstGeom prst="rect">
-            <a:avLst/>
-          </a:prstGeom>
-          <a:solidFill>
-            <a:srgbClr val="242A4A"/>
-          </a:solidFill>
-          <a:ln w="6350">
-            <a:solidFill>
-              <a:srgbClr val="C8D4F0"/>
-            </a:solidFill>
-            <a:prstDash val="solid"/>
-          </a:ln>
-        </p:spPr>
       </p:sp>
       <p:sp>
         <p:nvSpPr>
@@ -10018,45 +12841,9 @@
             <a:pPr marL="0" indent="0">
               <a:buNone/>
             </a:pPr>
-            <a:r>
-              <a:rPr lang="en-US" sz="1000" dirty="0">
-                <a:solidFill>
-                  <a:srgbClr val="C8D4F0"/>
-                </a:solidFill>
-                <a:latin typeface="Calibri" pitchFamily="34" charset="0"/>
-                <a:ea typeface="Calibri" pitchFamily="34" charset="-122"/>
-                <a:cs typeface="Calibri" pitchFamily="34" charset="-120"/>
-              </a:rPr>
-              <a:t>Task 2</a:t>
-            </a:r>
             <a:endParaRPr lang="en-US" sz="1000" dirty="0"/>
           </a:p>
         </p:txBody>
-      </p:sp>
-      <p:sp>
-        <p:nvSpPr>
-          <p:cNvPr id="11" name="Shape 9"/>
-          <p:cNvSpPr/>
-          <p:nvPr/>
-        </p:nvSpPr>
-        <p:spPr>
-          <a:xfrm>
-            <a:off x="411480" y="2560320"/>
-            <a:ext cx="1828800" cy="457200"/>
-          </a:xfrm>
-          <a:prstGeom prst="rect">
-            <a:avLst/>
-          </a:prstGeom>
-          <a:solidFill>
-            <a:srgbClr val="242A4A"/>
-          </a:solidFill>
-          <a:ln w="6350">
-            <a:solidFill>
-              <a:srgbClr val="C8D4F0"/>
-            </a:solidFill>
-            <a:prstDash val="solid"/>
-          </a:ln>
-        </p:spPr>
       </p:sp>
       <p:sp>
         <p:nvSpPr>
@@ -10082,17 +12869,6 @@
             <a:pPr marL="0" indent="0">
               <a:buNone/>
             </a:pPr>
-            <a:r>
-              <a:rPr lang="en-US" sz="1000" dirty="0">
-                <a:solidFill>
-                  <a:srgbClr val="C8D4F0"/>
-                </a:solidFill>
-                <a:latin typeface="Calibri" pitchFamily="34" charset="0"/>
-                <a:ea typeface="Calibri" pitchFamily="34" charset="-122"/>
-                <a:cs typeface="Calibri" pitchFamily="34" charset="-120"/>
-              </a:rPr>
-              <a:t>Task 3</a:t>
-            </a:r>
             <a:endParaRPr lang="en-US" sz="1000" dirty="0"/>
           </a:p>
         </p:txBody>
@@ -10105,7 +12881,7 @@
         </p:nvSpPr>
         <p:spPr>
           <a:xfrm>
-            <a:off x="2468880" y="960120"/>
+            <a:off x="3515359" y="946404"/>
             <a:ext cx="1920240" cy="411480"/>
           </a:xfrm>
           <a:prstGeom prst="rect">
@@ -10130,7 +12906,7 @@
         </p:nvSpPr>
         <p:spPr>
           <a:xfrm>
-            <a:off x="2468880" y="987552"/>
+            <a:off x="3515359" y="951512"/>
             <a:ext cx="1920240" cy="365760"/>
           </a:xfrm>
           <a:prstGeom prst="rect">
@@ -10147,7 +12923,7 @@
               <a:buNone/>
             </a:pPr>
             <a:r>
-              <a:rPr lang="en-US" sz="1100" b="1" dirty="0">
+              <a:rPr lang="hu-HU" sz="1100" b="1" dirty="0">
                 <a:solidFill>
                   <a:srgbClr val="FFFFFF"/>
                 </a:solidFill>
@@ -10155,36 +12931,11 @@
                 <a:ea typeface="Calibri" pitchFamily="34" charset="-122"/>
                 <a:cs typeface="Calibri" pitchFamily="34" charset="-120"/>
               </a:rPr>
-              <a:t>IN PROGRESS</a:t>
+              <a:t>MUNKAFOLYAMAT NYOMONKÖVETÉSE</a:t>
             </a:r>
             <a:endParaRPr lang="en-US" sz="1100" dirty="0"/>
           </a:p>
         </p:txBody>
-      </p:sp>
-      <p:sp>
-        <p:nvSpPr>
-          <p:cNvPr id="15" name="Shape 13"/>
-          <p:cNvSpPr/>
-          <p:nvPr/>
-        </p:nvSpPr>
-        <p:spPr>
-          <a:xfrm>
-            <a:off x="2514600" y="1463040"/>
-            <a:ext cx="1828800" cy="457200"/>
-          </a:xfrm>
-          <a:prstGeom prst="rect">
-            <a:avLst/>
-          </a:prstGeom>
-          <a:solidFill>
-            <a:srgbClr val="242A4A"/>
-          </a:solidFill>
-          <a:ln w="6350">
-            <a:solidFill>
-              <a:srgbClr val="4F8EF7"/>
-            </a:solidFill>
-            <a:prstDash val="solid"/>
-          </a:ln>
-        </p:spPr>
       </p:sp>
       <p:sp>
         <p:nvSpPr>
@@ -10210,45 +12961,9 @@
             <a:pPr marL="0" indent="0">
               <a:buNone/>
             </a:pPr>
-            <a:r>
-              <a:rPr lang="en-US" sz="1000" dirty="0">
-                <a:solidFill>
-                  <a:srgbClr val="C8D4F0"/>
-                </a:solidFill>
-                <a:latin typeface="Calibri" pitchFamily="34" charset="0"/>
-                <a:ea typeface="Calibri" pitchFamily="34" charset="-122"/>
-                <a:cs typeface="Calibri" pitchFamily="34" charset="-120"/>
-              </a:rPr>
-              <a:t>Task 1</a:t>
-            </a:r>
             <a:endParaRPr lang="en-US" sz="1000" dirty="0"/>
           </a:p>
         </p:txBody>
-      </p:sp>
-      <p:sp>
-        <p:nvSpPr>
-          <p:cNvPr id="17" name="Shape 15"/>
-          <p:cNvSpPr/>
-          <p:nvPr/>
-        </p:nvSpPr>
-        <p:spPr>
-          <a:xfrm>
-            <a:off x="2514600" y="2011680"/>
-            <a:ext cx="1828800" cy="457200"/>
-          </a:xfrm>
-          <a:prstGeom prst="rect">
-            <a:avLst/>
-          </a:prstGeom>
-          <a:solidFill>
-            <a:srgbClr val="242A4A"/>
-          </a:solidFill>
-          <a:ln w="6350">
-            <a:solidFill>
-              <a:srgbClr val="4F8EF7"/>
-            </a:solidFill>
-            <a:prstDash val="solid"/>
-          </a:ln>
-        </p:spPr>
       </p:sp>
       <p:sp>
         <p:nvSpPr>
@@ -10274,45 +12989,9 @@
             <a:pPr marL="0" indent="0">
               <a:buNone/>
             </a:pPr>
-            <a:r>
-              <a:rPr lang="en-US" sz="1000" dirty="0">
-                <a:solidFill>
-                  <a:srgbClr val="C8D4F0"/>
-                </a:solidFill>
-                <a:latin typeface="Calibri" pitchFamily="34" charset="0"/>
-                <a:ea typeface="Calibri" pitchFamily="34" charset="-122"/>
-                <a:cs typeface="Calibri" pitchFamily="34" charset="-120"/>
-              </a:rPr>
-              <a:t>Task 2</a:t>
-            </a:r>
             <a:endParaRPr lang="en-US" sz="1000" dirty="0"/>
           </a:p>
         </p:txBody>
-      </p:sp>
-      <p:sp>
-        <p:nvSpPr>
-          <p:cNvPr id="19" name="Shape 17"/>
-          <p:cNvSpPr/>
-          <p:nvPr/>
-        </p:nvSpPr>
-        <p:spPr>
-          <a:xfrm>
-            <a:off x="2514600" y="2560320"/>
-            <a:ext cx="1828800" cy="457200"/>
-          </a:xfrm>
-          <a:prstGeom prst="rect">
-            <a:avLst/>
-          </a:prstGeom>
-          <a:solidFill>
-            <a:srgbClr val="242A4A"/>
-          </a:solidFill>
-          <a:ln w="6350">
-            <a:solidFill>
-              <a:srgbClr val="4F8EF7"/>
-            </a:solidFill>
-            <a:prstDash val="solid"/>
-          </a:ln>
-        </p:spPr>
       </p:sp>
       <p:sp>
         <p:nvSpPr>
@@ -10338,17 +13017,6 @@
             <a:pPr marL="0" indent="0">
               <a:buNone/>
             </a:pPr>
-            <a:r>
-              <a:rPr lang="en-US" sz="1000" dirty="0">
-                <a:solidFill>
-                  <a:srgbClr val="C8D4F0"/>
-                </a:solidFill>
-                <a:latin typeface="Calibri" pitchFamily="34" charset="0"/>
-                <a:ea typeface="Calibri" pitchFamily="34" charset="-122"/>
-                <a:cs typeface="Calibri" pitchFamily="34" charset="-120"/>
-              </a:rPr>
-              <a:t>Task 3</a:t>
-            </a:r>
             <a:endParaRPr lang="en-US" sz="1000" dirty="0"/>
           </a:p>
         </p:txBody>
@@ -10361,7 +13029,7 @@
         </p:nvSpPr>
         <p:spPr>
           <a:xfrm>
-            <a:off x="4572000" y="960120"/>
+            <a:off x="6858000" y="1001268"/>
             <a:ext cx="1920240" cy="411480"/>
           </a:xfrm>
           <a:prstGeom prst="rect">
@@ -10386,7 +13054,7 @@
         </p:nvSpPr>
         <p:spPr>
           <a:xfrm>
-            <a:off x="4572000" y="987552"/>
+            <a:off x="6858000" y="1008126"/>
             <a:ext cx="1920240" cy="365760"/>
           </a:xfrm>
           <a:prstGeom prst="rect">
@@ -10403,7 +13071,7 @@
               <a:buNone/>
             </a:pPr>
             <a:r>
-              <a:rPr lang="en-US" sz="1100" b="1" dirty="0">
+              <a:rPr lang="hu-HU" sz="1100" b="1" dirty="0">
                 <a:solidFill>
                   <a:srgbClr val="FFFFFF"/>
                 </a:solidFill>
@@ -10411,36 +13079,11 @@
                 <a:ea typeface="Calibri" pitchFamily="34" charset="-122"/>
                 <a:cs typeface="Calibri" pitchFamily="34" charset="-120"/>
               </a:rPr>
-              <a:t>TESTING</a:t>
+              <a:t>FELADAT KIOSZTÁS</a:t>
             </a:r>
             <a:endParaRPr lang="en-US" sz="1100" dirty="0"/>
           </a:p>
         </p:txBody>
-      </p:sp>
-      <p:sp>
-        <p:nvSpPr>
-          <p:cNvPr id="23" name="Shape 21"/>
-          <p:cNvSpPr/>
-          <p:nvPr/>
-        </p:nvSpPr>
-        <p:spPr>
-          <a:xfrm>
-            <a:off x="4617720" y="1463040"/>
-            <a:ext cx="1828800" cy="457200"/>
-          </a:xfrm>
-          <a:prstGeom prst="rect">
-            <a:avLst/>
-          </a:prstGeom>
-          <a:solidFill>
-            <a:srgbClr val="242A4A"/>
-          </a:solidFill>
-          <a:ln w="6350">
-            <a:solidFill>
-              <a:srgbClr val="F59E0B"/>
-            </a:solidFill>
-            <a:prstDash val="solid"/>
-          </a:ln>
-        </p:spPr>
       </p:sp>
       <p:sp>
         <p:nvSpPr>
@@ -10466,45 +13109,9 @@
             <a:pPr marL="0" indent="0">
               <a:buNone/>
             </a:pPr>
-            <a:r>
-              <a:rPr lang="en-US" sz="1000" dirty="0">
-                <a:solidFill>
-                  <a:srgbClr val="C8D4F0"/>
-                </a:solidFill>
-                <a:latin typeface="Calibri" pitchFamily="34" charset="0"/>
-                <a:ea typeface="Calibri" pitchFamily="34" charset="-122"/>
-                <a:cs typeface="Calibri" pitchFamily="34" charset="-120"/>
-              </a:rPr>
-              <a:t>Task 1</a:t>
-            </a:r>
             <a:endParaRPr lang="en-US" sz="1000" dirty="0"/>
           </a:p>
         </p:txBody>
-      </p:sp>
-      <p:sp>
-        <p:nvSpPr>
-          <p:cNvPr id="25" name="Shape 23"/>
-          <p:cNvSpPr/>
-          <p:nvPr/>
-        </p:nvSpPr>
-        <p:spPr>
-          <a:xfrm>
-            <a:off x="4617720" y="2011680"/>
-            <a:ext cx="1828800" cy="457200"/>
-          </a:xfrm>
-          <a:prstGeom prst="rect">
-            <a:avLst/>
-          </a:prstGeom>
-          <a:solidFill>
-            <a:srgbClr val="242A4A"/>
-          </a:solidFill>
-          <a:ln w="6350">
-            <a:solidFill>
-              <a:srgbClr val="F59E0B"/>
-            </a:solidFill>
-            <a:prstDash val="solid"/>
-          </a:ln>
-        </p:spPr>
       </p:sp>
       <p:sp>
         <p:nvSpPr>
@@ -10530,45 +13137,9 @@
             <a:pPr marL="0" indent="0">
               <a:buNone/>
             </a:pPr>
-            <a:r>
-              <a:rPr lang="en-US" sz="1000" dirty="0">
-                <a:solidFill>
-                  <a:srgbClr val="C8D4F0"/>
-                </a:solidFill>
-                <a:latin typeface="Calibri" pitchFamily="34" charset="0"/>
-                <a:ea typeface="Calibri" pitchFamily="34" charset="-122"/>
-                <a:cs typeface="Calibri" pitchFamily="34" charset="-120"/>
-              </a:rPr>
-              <a:t>Task 2</a:t>
-            </a:r>
             <a:endParaRPr lang="en-US" sz="1000" dirty="0"/>
           </a:p>
         </p:txBody>
-      </p:sp>
-      <p:sp>
-        <p:nvSpPr>
-          <p:cNvPr id="27" name="Shape 25"/>
-          <p:cNvSpPr/>
-          <p:nvPr/>
-        </p:nvSpPr>
-        <p:spPr>
-          <a:xfrm>
-            <a:off x="4617720" y="2560320"/>
-            <a:ext cx="1828800" cy="457200"/>
-          </a:xfrm>
-          <a:prstGeom prst="rect">
-            <a:avLst/>
-          </a:prstGeom>
-          <a:solidFill>
-            <a:srgbClr val="242A4A"/>
-          </a:solidFill>
-          <a:ln w="6350">
-            <a:solidFill>
-              <a:srgbClr val="F59E0B"/>
-            </a:solidFill>
-            <a:prstDash val="solid"/>
-          </a:ln>
-        </p:spPr>
       </p:sp>
       <p:sp>
         <p:nvSpPr>
@@ -10594,45 +13165,9 @@
             <a:pPr marL="0" indent="0">
               <a:buNone/>
             </a:pPr>
-            <a:r>
-              <a:rPr lang="en-US" sz="1000" dirty="0">
-                <a:solidFill>
-                  <a:srgbClr val="C8D4F0"/>
-                </a:solidFill>
-                <a:latin typeface="Calibri" pitchFamily="34" charset="0"/>
-                <a:ea typeface="Calibri" pitchFamily="34" charset="-122"/>
-                <a:cs typeface="Calibri" pitchFamily="34" charset="-120"/>
-              </a:rPr>
-              <a:t>Task 3</a:t>
-            </a:r>
             <a:endParaRPr lang="en-US" sz="1000" dirty="0"/>
           </a:p>
         </p:txBody>
-      </p:sp>
-      <p:sp>
-        <p:nvSpPr>
-          <p:cNvPr id="29" name="Shape 27"/>
-          <p:cNvSpPr/>
-          <p:nvPr/>
-        </p:nvSpPr>
-        <p:spPr>
-          <a:xfrm>
-            <a:off x="6675120" y="960120"/>
-            <a:ext cx="1920240" cy="411480"/>
-          </a:xfrm>
-          <a:prstGeom prst="rect">
-            <a:avLst/>
-          </a:prstGeom>
-          <a:solidFill>
-            <a:srgbClr val="22C55E"/>
-          </a:solidFill>
-          <a:ln w="12700">
-            <a:solidFill>
-              <a:srgbClr val="22C55E"/>
-            </a:solidFill>
-            <a:prstDash val="solid"/>
-          </a:ln>
-        </p:spPr>
       </p:sp>
       <p:sp>
         <p:nvSpPr>
@@ -10658,45 +13193,9 @@
             <a:pPr marL="0" indent="0" algn="ctr">
               <a:buNone/>
             </a:pPr>
-            <a:r>
-              <a:rPr lang="en-US" sz="1100" b="1" dirty="0">
-                <a:solidFill>
-                  <a:srgbClr val="FFFFFF"/>
-                </a:solidFill>
-                <a:latin typeface="Calibri" pitchFamily="34" charset="0"/>
-                <a:ea typeface="Calibri" pitchFamily="34" charset="-122"/>
-                <a:cs typeface="Calibri" pitchFamily="34" charset="-120"/>
-              </a:rPr>
-              <a:t>DONE ✅</a:t>
-            </a:r>
             <a:endParaRPr lang="en-US" sz="1100" dirty="0"/>
           </a:p>
         </p:txBody>
-      </p:sp>
-      <p:sp>
-        <p:nvSpPr>
-          <p:cNvPr id="31" name="Shape 29"/>
-          <p:cNvSpPr/>
-          <p:nvPr/>
-        </p:nvSpPr>
-        <p:spPr>
-          <a:xfrm>
-            <a:off x="6720840" y="1463040"/>
-            <a:ext cx="1828800" cy="457200"/>
-          </a:xfrm>
-          <a:prstGeom prst="rect">
-            <a:avLst/>
-          </a:prstGeom>
-          <a:solidFill>
-            <a:srgbClr val="242A4A"/>
-          </a:solidFill>
-          <a:ln w="6350">
-            <a:solidFill>
-              <a:srgbClr val="22C55E"/>
-            </a:solidFill>
-            <a:prstDash val="solid"/>
-          </a:ln>
-        </p:spPr>
       </p:sp>
       <p:sp>
         <p:nvSpPr>
@@ -10722,45 +13221,9 @@
             <a:pPr marL="0" indent="0">
               <a:buNone/>
             </a:pPr>
-            <a:r>
-              <a:rPr lang="en-US" sz="1000" dirty="0">
-                <a:solidFill>
-                  <a:srgbClr val="22C55E"/>
-                </a:solidFill>
-                <a:latin typeface="Calibri" pitchFamily="34" charset="0"/>
-                <a:ea typeface="Calibri" pitchFamily="34" charset="-122"/>
-                <a:cs typeface="Calibri" pitchFamily="34" charset="-120"/>
-              </a:rPr>
-              <a:t>✓ Task</a:t>
-            </a:r>
             <a:endParaRPr lang="en-US" sz="1000" dirty="0"/>
           </a:p>
         </p:txBody>
-      </p:sp>
-      <p:sp>
-        <p:nvSpPr>
-          <p:cNvPr id="33" name="Shape 31"/>
-          <p:cNvSpPr/>
-          <p:nvPr/>
-        </p:nvSpPr>
-        <p:spPr>
-          <a:xfrm>
-            <a:off x="6720840" y="2011680"/>
-            <a:ext cx="1828800" cy="457200"/>
-          </a:xfrm>
-          <a:prstGeom prst="rect">
-            <a:avLst/>
-          </a:prstGeom>
-          <a:solidFill>
-            <a:srgbClr val="242A4A"/>
-          </a:solidFill>
-          <a:ln w="6350">
-            <a:solidFill>
-              <a:srgbClr val="22C55E"/>
-            </a:solidFill>
-            <a:prstDash val="solid"/>
-          </a:ln>
-        </p:spPr>
       </p:sp>
       <p:sp>
         <p:nvSpPr>
@@ -10786,45 +13249,9 @@
             <a:pPr marL="0" indent="0">
               <a:buNone/>
             </a:pPr>
-            <a:r>
-              <a:rPr lang="en-US" sz="1000" dirty="0">
-                <a:solidFill>
-                  <a:srgbClr val="22C55E"/>
-                </a:solidFill>
-                <a:latin typeface="Calibri" pitchFamily="34" charset="0"/>
-                <a:ea typeface="Calibri" pitchFamily="34" charset="-122"/>
-                <a:cs typeface="Calibri" pitchFamily="34" charset="-120"/>
-              </a:rPr>
-              <a:t>✓ Task</a:t>
-            </a:r>
             <a:endParaRPr lang="en-US" sz="1000" dirty="0"/>
           </a:p>
         </p:txBody>
-      </p:sp>
-      <p:sp>
-        <p:nvSpPr>
-          <p:cNvPr id="35" name="Shape 33"/>
-          <p:cNvSpPr/>
-          <p:nvPr/>
-        </p:nvSpPr>
-        <p:spPr>
-          <a:xfrm>
-            <a:off x="6720840" y="2560320"/>
-            <a:ext cx="1828800" cy="457200"/>
-          </a:xfrm>
-          <a:prstGeom prst="rect">
-            <a:avLst/>
-          </a:prstGeom>
-          <a:solidFill>
-            <a:srgbClr val="242A4A"/>
-          </a:solidFill>
-          <a:ln w="6350">
-            <a:solidFill>
-              <a:srgbClr val="22C55E"/>
-            </a:solidFill>
-            <a:prstDash val="solid"/>
-          </a:ln>
-        </p:spPr>
       </p:sp>
       <p:sp>
         <p:nvSpPr>
@@ -10850,17 +13277,6 @@
             <a:pPr marL="0" indent="0">
               <a:buNone/>
             </a:pPr>
-            <a:r>
-              <a:rPr lang="en-US" sz="1000" dirty="0">
-                <a:solidFill>
-                  <a:srgbClr val="22C55E"/>
-                </a:solidFill>
-                <a:latin typeface="Calibri" pitchFamily="34" charset="0"/>
-                <a:ea typeface="Calibri" pitchFamily="34" charset="-122"/>
-                <a:cs typeface="Calibri" pitchFamily="34" charset="-120"/>
-              </a:rPr>
-              <a:t>✓ Task</a:t>
-            </a:r>
             <a:endParaRPr lang="en-US" sz="1000" dirty="0"/>
           </a:p>
         </p:txBody>
@@ -11086,697 +13502,153 @@
             <a:off x="2831253" y="3255264"/>
             <a:ext cx="3288453" cy="1572056"/>
           </a:xfrm>
-          <a:prstGeom prst="rect">
-            <a:avLst/>
-          </a:prstGeom>
+          <a:prstGeom prst="roundRect">
+            <a:avLst>
+              <a:gd name="adj" fmla="val 8594"/>
+            </a:avLst>
+          </a:prstGeom>
+          <a:solidFill>
+            <a:srgbClr val="FFFFFF">
+              <a:shade val="85000"/>
+            </a:srgbClr>
+          </a:solidFill>
+          <a:ln>
+            <a:noFill/>
+          </a:ln>
+          <a:effectLst>
+            <a:reflection blurRad="12700" stA="38000" endPos="28000" dist="5000" dir="5400000" sy="-100000" algn="bl" rotWithShape="0"/>
+          </a:effectLst>
         </p:spPr>
       </p:pic>
-    </p:spTree>
-  </p:cSld>
-  <p:clrMapOvr>
-    <a:masterClrMapping/>
-  </p:clrMapOvr>
-</p:sld>
-</file>
-
-<file path=ppt/slides/slide9.xml><?xml version="1.0" encoding="utf-8"?>
-<p:sld xmlns:a="http://schemas.openxmlformats.org/drawingml/2006/main" xmlns:r="http://schemas.openxmlformats.org/officeDocument/2006/relationships" xmlns:p="http://schemas.openxmlformats.org/presentationml/2006/main">
-  <p:cSld name="Slide 9">
-    <p:bg>
-      <p:bgPr>
-        <a:solidFill>
-          <a:srgbClr val="1A1F35"/>
-        </a:solidFill>
-        <a:effectLst/>
-      </p:bgPr>
-    </p:bg>
-    <p:spTree>
-      <p:nvGrpSpPr>
-        <p:cNvPr id="1" name=""/>
-        <p:cNvGrpSpPr/>
-        <p:nvPr/>
-      </p:nvGrpSpPr>
-      <p:grpSpPr>
-        <a:xfrm>
-          <a:off x="0" y="0"/>
-          <a:ext cx="0" cy="0"/>
-          <a:chOff x="0" y="0"/>
-          <a:chExt cx="0" cy="0"/>
-        </a:xfrm>
-      </p:grpSpPr>
-      <p:sp>
-        <p:nvSpPr>
-          <p:cNvPr id="2" name="Shape 0"/>
-          <p:cNvSpPr/>
-          <p:nvPr/>
-        </p:nvSpPr>
-        <p:spPr>
-          <a:xfrm>
-            <a:off x="0" y="0"/>
-            <a:ext cx="9144000" cy="777240"/>
-          </a:xfrm>
-          <a:prstGeom prst="rect">
-            <a:avLst/>
-          </a:prstGeom>
-          <a:solidFill>
-            <a:srgbClr val="2C3566"/>
-          </a:solidFill>
-          <a:ln w="12700">
-            <a:solidFill>
-              <a:srgbClr val="2C3566"/>
-            </a:solidFill>
-            <a:prstDash val="solid"/>
-          </a:ln>
-        </p:spPr>
-      </p:sp>
-      <p:sp>
-        <p:nvSpPr>
-          <p:cNvPr id="3" name="Shape 1"/>
-          <p:cNvSpPr/>
-          <p:nvPr/>
-        </p:nvSpPr>
-        <p:spPr>
-          <a:xfrm>
-            <a:off x="0" y="0"/>
-            <a:ext cx="9144000" cy="64008"/>
-          </a:xfrm>
-          <a:prstGeom prst="rect">
-            <a:avLst/>
-          </a:prstGeom>
-          <a:solidFill>
-            <a:srgbClr val="4F8EF7"/>
-          </a:solidFill>
-          <a:ln w="12700">
-            <a:solidFill>
-              <a:srgbClr val="4F8EF7"/>
-            </a:solidFill>
-            <a:prstDash val="solid"/>
-          </a:ln>
-        </p:spPr>
-      </p:sp>
-      <p:sp>
-        <p:nvSpPr>
-          <p:cNvPr id="4" name="Text 2"/>
-          <p:cNvSpPr/>
-          <p:nvPr/>
-        </p:nvSpPr>
-        <p:spPr>
-          <a:xfrm>
-            <a:off x="365760" y="137160"/>
-            <a:ext cx="8412480" cy="502920"/>
-          </a:xfrm>
-          <a:prstGeom prst="rect">
-            <a:avLst/>
-          </a:prstGeom>
-          <a:noFill/>
-          <a:ln/>
-        </p:spPr>
-        <p:txBody>
-          <a:bodyPr wrap="square" rtlCol="0" anchor="ctr"/>
-          <a:lstStyle/>
-          <a:p>
-            <a:pPr marL="0" indent="0">
-              <a:buNone/>
-            </a:pPr>
-            <a:r>
-              <a:rPr lang="en-US" sz="2000" b="1" dirty="0">
-                <a:solidFill>
-                  <a:srgbClr val="FFFFFF"/>
-                </a:solidFill>
-                <a:latin typeface="Calibri" pitchFamily="34" charset="0"/>
-                <a:ea typeface="Calibri" pitchFamily="34" charset="-122"/>
-                <a:cs typeface="Calibri" pitchFamily="34" charset="-120"/>
-              </a:rPr>
-              <a:t>🐙  GIT &amp; GITHUB – VERZIÓKEZELÉS</a:t>
-            </a:r>
-            <a:endParaRPr lang="en-US" sz="2000" dirty="0"/>
-          </a:p>
-        </p:txBody>
-      </p:sp>
-      <p:sp>
-        <p:nvSpPr>
-          <p:cNvPr id="5" name="Shape 3"/>
-          <p:cNvSpPr/>
-          <p:nvPr/>
-        </p:nvSpPr>
-        <p:spPr>
-          <a:xfrm>
-            <a:off x="365760" y="960120"/>
-            <a:ext cx="3840480" cy="3474720"/>
-          </a:xfrm>
-          <a:prstGeom prst="rect">
-            <a:avLst/>
-          </a:prstGeom>
-          <a:solidFill>
-            <a:srgbClr val="242A4A"/>
-          </a:solidFill>
-          <a:ln w="12700">
-            <a:solidFill>
-              <a:srgbClr val="4F8EF7"/>
-            </a:solidFill>
-            <a:prstDash val="solid"/>
-          </a:ln>
-        </p:spPr>
-      </p:sp>
       <p:pic>
         <p:nvPicPr>
-          <p:cNvPr id="6" name="Image 0" descr="preencoded.png"/>
+          <p:cNvPr id="40" name="Kép 39">
+            <a:extLst>
+              <a:ext uri="{FF2B5EF4-FFF2-40B4-BE49-F238E27FC236}">
+                <a16:creationId xmlns:a16="http://schemas.microsoft.com/office/drawing/2014/main" id="{7FAE4538-6FD2-439A-97A7-B31A0DE80929}"/>
+              </a:ext>
+            </a:extLst>
+          </p:cNvPr>
           <p:cNvPicPr>
             <a:picLocks noChangeAspect="1"/>
           </p:cNvPicPr>
           <p:nvPr/>
         </p:nvPicPr>
         <p:blipFill>
-          <a:blip r:embed="rId3"/>
+          <a:blip r:embed="rId4"/>
           <a:stretch>
             <a:fillRect/>
           </a:stretch>
         </p:blipFill>
         <p:spPr>
           <a:xfrm>
-            <a:off x="1280160" y="1554480"/>
-            <a:ext cx="2011680" cy="2011680"/>
-          </a:xfrm>
-          <a:prstGeom prst="rect">
-            <a:avLst/>
-          </a:prstGeom>
+            <a:off x="388539" y="1716701"/>
+            <a:ext cx="1874682" cy="1303133"/>
+          </a:xfrm>
+          <a:prstGeom prst="roundRect">
+            <a:avLst>
+              <a:gd name="adj" fmla="val 8594"/>
+            </a:avLst>
+          </a:prstGeom>
+          <a:solidFill>
+            <a:srgbClr val="FFFFFF">
+              <a:shade val="85000"/>
+            </a:srgbClr>
+          </a:solidFill>
+          <a:ln>
+            <a:noFill/>
+          </a:ln>
+          <a:effectLst>
+            <a:reflection blurRad="12700" stA="38000" endPos="28000" dist="5000" dir="5400000" sy="-100000" algn="bl" rotWithShape="0"/>
+          </a:effectLst>
         </p:spPr>
       </p:pic>
-      <p:sp>
-        <p:nvSpPr>
-          <p:cNvPr id="7" name="Text 4"/>
-          <p:cNvSpPr/>
-          <p:nvPr/>
-        </p:nvSpPr>
-        <p:spPr>
-          <a:xfrm>
-            <a:off x="457200" y="4114800"/>
-            <a:ext cx="3657600" cy="365760"/>
-          </a:xfrm>
-          <a:prstGeom prst="rect">
-            <a:avLst/>
-          </a:prstGeom>
-          <a:noFill/>
-          <a:ln/>
-        </p:spPr>
-        <p:txBody>
-          <a:bodyPr wrap="square" rtlCol="0" anchor="ctr"/>
-          <a:lstStyle/>
-          <a:p>
-            <a:pPr marL="0" indent="0" algn="ctr">
-              <a:buNone/>
-            </a:pPr>
-            <a:endParaRPr lang="en-US" sz="1000" dirty="0"/>
-          </a:p>
-        </p:txBody>
-      </p:sp>
-      <p:sp>
-        <p:nvSpPr>
-          <p:cNvPr id="8" name="Shape 5"/>
-          <p:cNvSpPr/>
-          <p:nvPr/>
-        </p:nvSpPr>
-        <p:spPr>
-          <a:xfrm>
-            <a:off x="4572000" y="960120"/>
-            <a:ext cx="4114800" cy="804672"/>
-          </a:xfrm>
-          <a:prstGeom prst="rect">
-            <a:avLst/>
-          </a:prstGeom>
-          <a:solidFill>
-            <a:srgbClr val="242A4A"/>
-          </a:solidFill>
-          <a:ln w="12700">
-            <a:solidFill>
-              <a:srgbClr val="2C3566"/>
-            </a:solidFill>
-            <a:prstDash val="solid"/>
+      <p:pic>
+        <p:nvPicPr>
+          <p:cNvPr id="46" name="Kép 45">
+            <a:extLst>
+              <a:ext uri="{FF2B5EF4-FFF2-40B4-BE49-F238E27FC236}">
+                <a16:creationId xmlns:a16="http://schemas.microsoft.com/office/drawing/2014/main" id="{3554BEA6-38C1-4E5D-B22A-E2D63F1EB2D6}"/>
+              </a:ext>
+            </a:extLst>
+          </p:cNvPr>
+          <p:cNvPicPr>
+            <a:picLocks noChangeAspect="1"/>
+          </p:cNvPicPr>
+          <p:nvPr/>
+        </p:nvPicPr>
+        <p:blipFill>
+          <a:blip r:embed="rId5"/>
+          <a:stretch>
+            <a:fillRect/>
+          </a:stretch>
+        </p:blipFill>
+        <p:spPr>
+          <a:xfrm>
+            <a:off x="3293771" y="1701320"/>
+            <a:ext cx="2465018" cy="1303133"/>
+          </a:xfrm>
+          <a:prstGeom prst="roundRect">
+            <a:avLst>
+              <a:gd name="adj" fmla="val 8594"/>
+            </a:avLst>
+          </a:prstGeom>
+          <a:solidFill>
+            <a:srgbClr val="FFFFFF">
+              <a:shade val="85000"/>
+            </a:srgbClr>
+          </a:solidFill>
+          <a:ln>
+            <a:noFill/>
           </a:ln>
-        </p:spPr>
-      </p:sp>
-      <p:sp>
-        <p:nvSpPr>
-          <p:cNvPr id="9" name="Shape 6"/>
-          <p:cNvSpPr/>
-          <p:nvPr/>
-        </p:nvSpPr>
-        <p:spPr>
-          <a:xfrm>
-            <a:off x="4572000" y="960120"/>
-            <a:ext cx="73152" cy="804672"/>
-          </a:xfrm>
-          <a:prstGeom prst="rect">
-            <a:avLst/>
-          </a:prstGeom>
-          <a:solidFill>
-            <a:srgbClr val="4F8EF7"/>
-          </a:solidFill>
-          <a:ln w="12700">
-            <a:solidFill>
-              <a:srgbClr val="4F8EF7"/>
-            </a:solidFill>
-            <a:prstDash val="solid"/>
+          <a:effectLst>
+            <a:reflection blurRad="12700" stA="38000" endPos="28000" dist="5000" dir="5400000" sy="-100000" algn="bl" rotWithShape="0"/>
+          </a:effectLst>
+        </p:spPr>
+      </p:pic>
+      <p:pic>
+        <p:nvPicPr>
+          <p:cNvPr id="50" name="Kép 49">
+            <a:extLst>
+              <a:ext uri="{FF2B5EF4-FFF2-40B4-BE49-F238E27FC236}">
+                <a16:creationId xmlns:a16="http://schemas.microsoft.com/office/drawing/2014/main" id="{45F52407-0AEE-4F48-868B-D432AB8EA0DB}"/>
+              </a:ext>
+            </a:extLst>
+          </p:cNvPr>
+          <p:cNvPicPr>
+            <a:picLocks noChangeAspect="1"/>
+          </p:cNvPicPr>
+          <p:nvPr/>
+        </p:nvPicPr>
+        <p:blipFill>
+          <a:blip r:embed="rId6"/>
+          <a:stretch>
+            <a:fillRect/>
+          </a:stretch>
+        </p:blipFill>
+        <p:spPr>
+          <a:xfrm>
+            <a:off x="6911842" y="1602176"/>
+            <a:ext cx="1812556" cy="1916287"/>
+          </a:xfrm>
+          <a:prstGeom prst="roundRect">
+            <a:avLst>
+              <a:gd name="adj" fmla="val 8594"/>
+            </a:avLst>
+          </a:prstGeom>
+          <a:solidFill>
+            <a:srgbClr val="FFFFFF">
+              <a:shade val="85000"/>
+            </a:srgbClr>
+          </a:solidFill>
+          <a:ln>
+            <a:noFill/>
           </a:ln>
-        </p:spPr>
-      </p:sp>
-      <p:sp>
-        <p:nvSpPr>
-          <p:cNvPr id="10" name="Text 7"/>
-          <p:cNvSpPr/>
-          <p:nvPr/>
-        </p:nvSpPr>
-        <p:spPr>
-          <a:xfrm>
-            <a:off x="4754880" y="1033272"/>
-            <a:ext cx="3657600" cy="320040"/>
-          </a:xfrm>
-          <a:prstGeom prst="rect">
-            <a:avLst/>
-          </a:prstGeom>
-          <a:noFill/>
-          <a:ln/>
-        </p:spPr>
-        <p:txBody>
-          <a:bodyPr wrap="square" rtlCol="0" anchor="ctr"/>
-          <a:lstStyle/>
-          <a:p>
-            <a:pPr marL="0" indent="0">
-              <a:buNone/>
-            </a:pPr>
-            <a:r>
-              <a:rPr lang="en-US" sz="1300" b="1" dirty="0">
-                <a:solidFill>
-                  <a:srgbClr val="FFFFFF"/>
-                </a:solidFill>
-                <a:latin typeface="Calibri" pitchFamily="34" charset="0"/>
-                <a:ea typeface="Calibri" pitchFamily="34" charset="-122"/>
-                <a:cs typeface="Calibri" pitchFamily="34" charset="-120"/>
-              </a:rPr>
-              <a:t>🌿  Branch stratégia</a:t>
-            </a:r>
-            <a:endParaRPr lang="en-US" sz="1300" dirty="0"/>
-          </a:p>
-        </p:txBody>
-      </p:sp>
-      <p:sp>
-        <p:nvSpPr>
-          <p:cNvPr id="11" name="Text 8"/>
-          <p:cNvSpPr/>
-          <p:nvPr/>
-        </p:nvSpPr>
-        <p:spPr>
-          <a:xfrm>
-            <a:off x="4754880" y="1380744"/>
-            <a:ext cx="3657600" cy="292608"/>
-          </a:xfrm>
-          <a:prstGeom prst="rect">
-            <a:avLst/>
-          </a:prstGeom>
-          <a:noFill/>
-          <a:ln/>
-        </p:spPr>
-        <p:txBody>
-          <a:bodyPr wrap="square" rtlCol="0" anchor="ctr"/>
-          <a:lstStyle/>
-          <a:p>
-            <a:pPr marL="0" indent="0">
-              <a:buNone/>
-            </a:pPr>
-            <a:r>
-              <a:rPr lang="en-US" sz="1100" dirty="0">
-                <a:solidFill>
-                  <a:srgbClr val="C8D4F0"/>
-                </a:solidFill>
-                <a:latin typeface="Calibri" pitchFamily="34" charset="0"/>
-                <a:ea typeface="Calibri" pitchFamily="34" charset="-122"/>
-                <a:cs typeface="Calibri" pitchFamily="34" charset="-120"/>
-              </a:rPr>
-              <a:t>Main + feature branch-ek</a:t>
-            </a:r>
-            <a:endParaRPr lang="en-US" sz="1100" dirty="0"/>
-          </a:p>
-        </p:txBody>
-      </p:sp>
-      <p:sp>
-        <p:nvSpPr>
-          <p:cNvPr id="12" name="Shape 9"/>
-          <p:cNvSpPr/>
-          <p:nvPr/>
-        </p:nvSpPr>
-        <p:spPr>
-          <a:xfrm>
-            <a:off x="4572000" y="1874520"/>
-            <a:ext cx="4114800" cy="804672"/>
-          </a:xfrm>
-          <a:prstGeom prst="rect">
-            <a:avLst/>
-          </a:prstGeom>
-          <a:solidFill>
-            <a:srgbClr val="242A4A"/>
-          </a:solidFill>
-          <a:ln w="12700">
-            <a:solidFill>
-              <a:srgbClr val="2C3566"/>
-            </a:solidFill>
-            <a:prstDash val="solid"/>
-          </a:ln>
-        </p:spPr>
-      </p:sp>
-      <p:sp>
-        <p:nvSpPr>
-          <p:cNvPr id="13" name="Shape 10"/>
-          <p:cNvSpPr/>
-          <p:nvPr/>
-        </p:nvSpPr>
-        <p:spPr>
-          <a:xfrm>
-            <a:off x="4572000" y="1874520"/>
-            <a:ext cx="73152" cy="804672"/>
-          </a:xfrm>
-          <a:prstGeom prst="rect">
-            <a:avLst/>
-          </a:prstGeom>
-          <a:solidFill>
-            <a:srgbClr val="4F8EF7"/>
-          </a:solidFill>
-          <a:ln w="12700">
-            <a:solidFill>
-              <a:srgbClr val="4F8EF7"/>
-            </a:solidFill>
-            <a:prstDash val="solid"/>
-          </a:ln>
-        </p:spPr>
-      </p:sp>
-      <p:sp>
-        <p:nvSpPr>
-          <p:cNvPr id="14" name="Text 11"/>
-          <p:cNvSpPr/>
-          <p:nvPr/>
-        </p:nvSpPr>
-        <p:spPr>
-          <a:xfrm>
-            <a:off x="4754880" y="1947672"/>
-            <a:ext cx="3657600" cy="320040"/>
-          </a:xfrm>
-          <a:prstGeom prst="rect">
-            <a:avLst/>
-          </a:prstGeom>
-          <a:noFill/>
-          <a:ln/>
-        </p:spPr>
-        <p:txBody>
-          <a:bodyPr wrap="square" rtlCol="0" anchor="ctr"/>
-          <a:lstStyle/>
-          <a:p>
-            <a:pPr marL="0" indent="0">
-              <a:buNone/>
-            </a:pPr>
-            <a:r>
-              <a:rPr lang="en-US" sz="1300" b="1" dirty="0">
-                <a:solidFill>
-                  <a:srgbClr val="FFFFFF"/>
-                </a:solidFill>
-                <a:latin typeface="Calibri" pitchFamily="34" charset="0"/>
-                <a:ea typeface="Calibri" pitchFamily="34" charset="-122"/>
-                <a:cs typeface="Calibri" pitchFamily="34" charset="-120"/>
-              </a:rPr>
-              <a:t>💬  Commit konvenció</a:t>
-            </a:r>
-            <a:endParaRPr lang="en-US" sz="1300" dirty="0"/>
-          </a:p>
-        </p:txBody>
-      </p:sp>
-      <p:sp>
-        <p:nvSpPr>
-          <p:cNvPr id="15" name="Text 12"/>
-          <p:cNvSpPr/>
-          <p:nvPr/>
-        </p:nvSpPr>
-        <p:spPr>
-          <a:xfrm>
-            <a:off x="4754880" y="2295144"/>
-            <a:ext cx="3657600" cy="292608"/>
-          </a:xfrm>
-          <a:prstGeom prst="rect">
-            <a:avLst/>
-          </a:prstGeom>
-          <a:noFill/>
-          <a:ln/>
-        </p:spPr>
-        <p:txBody>
-          <a:bodyPr wrap="square" rtlCol="0" anchor="ctr"/>
-          <a:lstStyle/>
-          <a:p>
-            <a:pPr marL="0" indent="0">
-              <a:buNone/>
-            </a:pPr>
-            <a:r>
-              <a:rPr lang="en-US" sz="1100" dirty="0">
-                <a:solidFill>
-                  <a:srgbClr val="C8D4F0"/>
-                </a:solidFill>
-                <a:latin typeface="Calibri" pitchFamily="34" charset="0"/>
-                <a:ea typeface="Calibri" pitchFamily="34" charset="-122"/>
-                <a:cs typeface="Calibri" pitchFamily="34" charset="-120"/>
-              </a:rPr>
-              <a:t>Szemantikus commit üzenetek</a:t>
-            </a:r>
-            <a:endParaRPr lang="en-US" sz="1100" dirty="0"/>
-          </a:p>
-        </p:txBody>
-      </p:sp>
-      <p:sp>
-        <p:nvSpPr>
-          <p:cNvPr id="16" name="Shape 13"/>
-          <p:cNvSpPr/>
-          <p:nvPr/>
-        </p:nvSpPr>
-        <p:spPr>
-          <a:xfrm>
-            <a:off x="4572000" y="2788920"/>
-            <a:ext cx="4114800" cy="804672"/>
-          </a:xfrm>
-          <a:prstGeom prst="rect">
-            <a:avLst/>
-          </a:prstGeom>
-          <a:solidFill>
-            <a:srgbClr val="242A4A"/>
-          </a:solidFill>
-          <a:ln w="12700">
-            <a:solidFill>
-              <a:srgbClr val="2C3566"/>
-            </a:solidFill>
-            <a:prstDash val="solid"/>
-          </a:ln>
-        </p:spPr>
-      </p:sp>
-      <p:sp>
-        <p:nvSpPr>
-          <p:cNvPr id="17" name="Shape 14"/>
-          <p:cNvSpPr/>
-          <p:nvPr/>
-        </p:nvSpPr>
-        <p:spPr>
-          <a:xfrm>
-            <a:off x="4572000" y="2788920"/>
-            <a:ext cx="73152" cy="804672"/>
-          </a:xfrm>
-          <a:prstGeom prst="rect">
-            <a:avLst/>
-          </a:prstGeom>
-          <a:solidFill>
-            <a:srgbClr val="4F8EF7"/>
-          </a:solidFill>
-          <a:ln w="12700">
-            <a:solidFill>
-              <a:srgbClr val="4F8EF7"/>
-            </a:solidFill>
-            <a:prstDash val="solid"/>
-          </a:ln>
-        </p:spPr>
-      </p:sp>
-      <p:sp>
-        <p:nvSpPr>
-          <p:cNvPr id="18" name="Text 15"/>
-          <p:cNvSpPr/>
-          <p:nvPr/>
-        </p:nvSpPr>
-        <p:spPr>
-          <a:xfrm>
-            <a:off x="4754880" y="2862072"/>
-            <a:ext cx="3657600" cy="320040"/>
-          </a:xfrm>
-          <a:prstGeom prst="rect">
-            <a:avLst/>
-          </a:prstGeom>
-          <a:noFill/>
-          <a:ln/>
-        </p:spPr>
-        <p:txBody>
-          <a:bodyPr wrap="square" rtlCol="0" anchor="ctr"/>
-          <a:lstStyle/>
-          <a:p>
-            <a:pPr marL="0" indent="0">
-              <a:buNone/>
-            </a:pPr>
-            <a:r>
-              <a:rPr lang="en-US" sz="1300" b="1" dirty="0">
-                <a:solidFill>
-                  <a:srgbClr val="FFFFFF"/>
-                </a:solidFill>
-                <a:latin typeface="Calibri" pitchFamily="34" charset="0"/>
-                <a:ea typeface="Calibri" pitchFamily="34" charset="-122"/>
-                <a:cs typeface="Calibri" pitchFamily="34" charset="-120"/>
-              </a:rPr>
-              <a:t>🔁  Pull Request</a:t>
-            </a:r>
-            <a:endParaRPr lang="en-US" sz="1300" dirty="0"/>
-          </a:p>
-        </p:txBody>
-      </p:sp>
-      <p:sp>
-        <p:nvSpPr>
-          <p:cNvPr id="19" name="Text 16"/>
-          <p:cNvSpPr/>
-          <p:nvPr/>
-        </p:nvSpPr>
-        <p:spPr>
-          <a:xfrm>
-            <a:off x="4754880" y="3209544"/>
-            <a:ext cx="3657600" cy="292608"/>
-          </a:xfrm>
-          <a:prstGeom prst="rect">
-            <a:avLst/>
-          </a:prstGeom>
-          <a:noFill/>
-          <a:ln/>
-        </p:spPr>
-        <p:txBody>
-          <a:bodyPr wrap="square" rtlCol="0" anchor="ctr"/>
-          <a:lstStyle/>
-          <a:p>
-            <a:pPr marL="0" indent="0">
-              <a:buNone/>
-            </a:pPr>
-            <a:r>
-              <a:rPr lang="en-US" sz="1100" dirty="0">
-                <a:solidFill>
-                  <a:srgbClr val="C8D4F0"/>
-                </a:solidFill>
-                <a:latin typeface="Calibri" pitchFamily="34" charset="0"/>
-                <a:ea typeface="Calibri" pitchFamily="34" charset="-122"/>
-                <a:cs typeface="Calibri" pitchFamily="34" charset="-120"/>
-              </a:rPr>
-              <a:t>Code review minden merge előtt</a:t>
-            </a:r>
-            <a:endParaRPr lang="en-US" sz="1100" dirty="0"/>
-          </a:p>
-        </p:txBody>
-      </p:sp>
-      <p:sp>
-        <p:nvSpPr>
-          <p:cNvPr id="20" name="Shape 17"/>
-          <p:cNvSpPr/>
-          <p:nvPr/>
-        </p:nvSpPr>
-        <p:spPr>
-          <a:xfrm>
-            <a:off x="4572000" y="3749040"/>
-            <a:ext cx="4114800" cy="685800"/>
-          </a:xfrm>
-          <a:prstGeom prst="rect">
-            <a:avLst/>
-          </a:prstGeom>
-          <a:solidFill>
-            <a:srgbClr val="0D3B6E"/>
-          </a:solidFill>
-          <a:ln w="12700">
-            <a:solidFill>
-              <a:srgbClr val="7CB3FF"/>
-            </a:solidFill>
-            <a:prstDash val="solid"/>
-          </a:ln>
-        </p:spPr>
-      </p:sp>
-      <p:sp>
-        <p:nvSpPr>
-          <p:cNvPr id="21" name="Text 18"/>
-          <p:cNvSpPr/>
-          <p:nvPr/>
-        </p:nvSpPr>
-        <p:spPr>
-          <a:xfrm>
-            <a:off x="4709160" y="3794760"/>
-            <a:ext cx="3840480" cy="274320"/>
-          </a:xfrm>
-          <a:prstGeom prst="rect">
-            <a:avLst/>
-          </a:prstGeom>
-          <a:noFill/>
-          <a:ln/>
-        </p:spPr>
-        <p:txBody>
-          <a:bodyPr wrap="square" rtlCol="0" anchor="ctr"/>
-          <a:lstStyle/>
-          <a:p>
-            <a:pPr marL="0" indent="0">
-              <a:buNone/>
-            </a:pPr>
-            <a:r>
-              <a:rPr lang="en-US" sz="1100" b="1" dirty="0">
-                <a:solidFill>
-                  <a:srgbClr val="7CB3FF"/>
-                </a:solidFill>
-                <a:latin typeface="Calibri" pitchFamily="34" charset="0"/>
-                <a:ea typeface="Calibri" pitchFamily="34" charset="-122"/>
-                <a:cs typeface="Calibri" pitchFamily="34" charset="-120"/>
-              </a:rPr>
-              <a:t>📦  Tárolt tartalmak:</a:t>
-            </a:r>
-            <a:endParaRPr lang="en-US" sz="1100" dirty="0"/>
-          </a:p>
-        </p:txBody>
-      </p:sp>
-      <p:sp>
-        <p:nvSpPr>
-          <p:cNvPr id="22" name="Text 19"/>
-          <p:cNvSpPr/>
-          <p:nvPr/>
-        </p:nvSpPr>
-        <p:spPr>
-          <a:xfrm>
-            <a:off x="4709160" y="4069080"/>
-            <a:ext cx="3840480" cy="320040"/>
-          </a:xfrm>
-          <a:prstGeom prst="rect">
-            <a:avLst/>
-          </a:prstGeom>
-          <a:noFill/>
-          <a:ln/>
-        </p:spPr>
-        <p:txBody>
-          <a:bodyPr wrap="square" rtlCol="0" anchor="ctr"/>
-          <a:lstStyle/>
-          <a:p>
-            <a:pPr marL="0" indent="0">
-              <a:buNone/>
-            </a:pPr>
-            <a:r>
-              <a:rPr lang="en-US" sz="1000" dirty="0">
-                <a:solidFill>
-                  <a:srgbClr val="C8D4F0"/>
-                </a:solidFill>
-                <a:latin typeface="Calibri" pitchFamily="34" charset="0"/>
-                <a:ea typeface="Calibri" pitchFamily="34" charset="-122"/>
-                <a:cs typeface="Calibri" pitchFamily="34" charset="-120"/>
-              </a:rPr>
-              <a:t>.pkt fájlok  •  Konfigurációk  •  Dokumentációk  •  Tesztek  •  Prezentáció</a:t>
-            </a:r>
-            <a:endParaRPr lang="en-US" sz="1000" dirty="0"/>
-          </a:p>
-        </p:txBody>
-      </p:sp>
+          <a:effectLst>
+            <a:reflection blurRad="12700" stA="38000" endPos="28000" dist="5000" dir="5400000" sy="-100000" algn="bl" rotWithShape="0"/>
+          </a:effectLst>
+        </p:spPr>
+      </p:pic>
     </p:spTree>
   </p:cSld>
   <p:clrMapOvr>
